--- a/kampus-kirtasiye/sunum/Kampus_Kirtasiye_Yazilim_Testi_Sunumu.pptx
+++ b/kampus-kirtasiye/sunum/Kampus_Kirtasiye_Yazilim_Testi_Sunumu.pptx
@@ -27,6 +27,7 @@
     <p:sldId id="275" r:id="rId26"/>
     <p:sldId id="276" r:id="rId27"/>
     <p:sldId id="277" r:id="rId28"/>
+    <p:sldId id="278" r:id="rId29"/>
   </p:sldIdLst>
   <p:sldSz cx="12191695" cy="6858000" type="screen4x3"/>
   <p:notesSz cx="6858000" cy="9144000"/>
@@ -3203,8 +3204,8 @@
         </p:nvSpPr>
         <p:spPr>
           <a:xfrm>
-            <a:off x="640080" y="1051560"/>
-            <a:ext cx="10972800" cy="365760"/>
+            <a:off x="640080" y="1097280"/>
+            <a:ext cx="10972800" cy="320040"/>
           </a:xfrm>
           <a:prstGeom prst="rect">
             <a:avLst/>
@@ -3219,13 +3220,13 @@
           <a:p>
             <a:pPr algn="l"/>
             <a:r>
-              <a:rPr sz="1500" b="1">
+              <a:rPr sz="1600" b="1">
                 <a:solidFill>
                   <a:srgbClr val="0B6E4F"/>
                 </a:solidFill>
                 <a:latin typeface="Calibri"/>
               </a:rPr>
-              <a:t>YAZILIM TESTİ DERSİ  ·  İKİ PARÇA TESLİM</a:t>
+              <a:t>YEREL WEB SİTESİ TESTİ</a:t>
             </a:r>
           </a:p>
         </p:txBody>
@@ -3239,7 +3240,7 @@
         <p:spPr>
           <a:xfrm>
             <a:off x="640080" y="1508760"/>
-            <a:ext cx="10972800" cy="1188720"/>
+            <a:ext cx="10972800" cy="1005840"/>
           </a:xfrm>
           <a:prstGeom prst="rect">
             <a:avLst/>
@@ -3254,14 +3255,13 @@
           <a:p>
             <a:pPr algn="l"/>
             <a:r>
-              <a:rPr sz="4000" b="1">
+              <a:rPr sz="4800" b="1">
                 <a:solidFill>
                   <a:srgbClr val="FFFFFF"/>
                 </a:solidFill>
                 <a:latin typeface="Calibri"/>
               </a:rPr>
-              <a:t>Önce web sitesi.
-Sonra onu test eden uygulama.</a:t>
+              <a:t>Kampüs Kırtasiye</a:t>
             </a:r>
           </a:p>
         </p:txBody>
@@ -3274,8 +3274,8 @@
         </p:nvSpPr>
         <p:spPr>
           <a:xfrm>
-            <a:off x="640080" y="3840480"/>
-            <a:ext cx="10515600" cy="1645920"/>
+            <a:off x="640080" y="2743200"/>
+            <a:ext cx="10972800" cy="1280160"/>
           </a:xfrm>
           <a:prstGeom prst="rect">
             <a:avLst/>
@@ -3290,15 +3290,14 @@
           <a:p>
             <a:pPr algn="l"/>
             <a:r>
-              <a:rPr sz="1800" b="0">
+              <a:rPr sz="2200" b="0">
                 <a:solidFill>
                   <a:srgbClr val="E7F3EA"/>
                 </a:solidFill>
                 <a:latin typeface="Calibri"/>
               </a:rPr>
-              <a:t>Kampüs Kırtasiye  +  Test uygulaması (Playwright)
-Kuram: İTÜ BİDB Yazılım Testi ve Test Süreçleri  ·  TechTarget Software testing
-Rıdvan Çağlar Mutlu  ·  2514216055  ·  18 Ekim 2026</a:t>
+              <a:t>XAMPP üzerinde PHP sitesi
+Playwright ile test, hata düzeltme ve regresyon</a:t>
             </a:r>
           </a:p>
         </p:txBody>
@@ -3306,6 +3305,43 @@
       <p:sp>
         <p:nvSpPr>
           <p:cNvPr id="7" name="TextBox 6"/>
+          <p:cNvSpPr txBox="1"/>
+          <p:nvPr/>
+        </p:nvSpPr>
+        <p:spPr>
+          <a:xfrm>
+            <a:off x="640080" y="4297680"/>
+            <a:ext cx="10972800" cy="1371600"/>
+          </a:xfrm>
+          <a:prstGeom prst="rect">
+            <a:avLst/>
+          </a:prstGeom>
+          <a:noFill/>
+        </p:spPr>
+        <p:txBody>
+          <a:bodyPr wrap="square">
+            <a:spAutoFit/>
+          </a:bodyPr>
+          <a:lstStyle/>
+          <a:p>
+            <a:pPr algn="l"/>
+            <a:r>
+              <a:rPr sz="1700" b="0">
+                <a:solidFill>
+                  <a:srgbClr val="C5D6CF"/>
+                </a:solidFill>
+                <a:latin typeface="Calibri"/>
+              </a:rPr>
+              <a:t>TechTarget: software testing = işlevi değerlendir, hata ve boşluk ara.
+Rıdvan Çağlar Mutlu  ·  2514216055
+Bilgisayar Programcılığı 2. Sınıf  ·  Yazılım Testi  ·  18 Ekim 2026</a:t>
+            </a:r>
+          </a:p>
+        </p:txBody>
+      </p:sp>
+      <p:sp>
+        <p:nvSpPr>
+          <p:cNvPr id="8" name="TextBox 7"/>
           <p:cNvSpPr txBox="1"/>
           <p:nvPr/>
         </p:nvSpPr>
@@ -3515,7 +3551,7 @@
                 </a:solidFill>
                 <a:latin typeface="Calibri"/>
               </a:rPr>
-              <a:t>Sınanan uygulama: öğrenci rafı</a:t>
+              <a:t>Playwright yerel siteye nasıl bağlanır?</a:t>
             </a:r>
           </a:p>
         </p:txBody>
@@ -3593,7 +3629,7 @@
                 </a:solidFill>
                 <a:latin typeface="Calibri"/>
               </a:rPr>
-              <a:t>Kampüs Kırtasiye  ·  İTÜ BİDB + TechTarget  ·  Rıdvan Çağlar Mutlu</a:t>
+              <a:t>Kampüs Kırtasiye  ·  TechTarget software testing  ·  Rıdvan Çağlar Mutlu</a:t>
             </a:r>
           </a:p>
         </p:txBody>
@@ -3633,30 +3669,129 @@
           </a:p>
         </p:txBody>
       </p:sp>
-      <p:pic>
-        <p:nvPicPr>
-          <p:cNvPr id="9" name="Picture 8" descr="raf.png"/>
-          <p:cNvPicPr>
-            <a:picLocks noChangeAspect="1"/>
-          </p:cNvPicPr>
-          <p:nvPr/>
-        </p:nvPicPr>
-        <p:blipFill>
-          <a:blip r:embed="rId2"/>
-          <a:stretch>
-            <a:fillRect/>
-          </a:stretch>
-        </p:blipFill>
-        <p:spPr>
-          <a:xfrm>
-            <a:off x="320040" y="1051560"/>
-            <a:ext cx="11521440" cy="5303520"/>
-          </a:xfrm>
-          <a:prstGeom prst="rect">
-            <a:avLst/>
-          </a:prstGeom>
-        </p:spPr>
-      </p:pic>
+      <p:sp>
+        <p:nvSpPr>
+          <p:cNvPr id="9" name="Rounded Rectangle 8"/>
+          <p:cNvSpPr/>
+          <p:nvPr/>
+        </p:nvSpPr>
+        <p:spPr>
+          <a:xfrm>
+            <a:off x="411480" y="1143000"/>
+            <a:ext cx="11338560" cy="4206240"/>
+          </a:xfrm>
+          <a:prstGeom prst="roundRect">
+            <a:avLst>
+              <a:gd name="adj" fmla="val 8000"/>
+            </a:avLst>
+          </a:prstGeom>
+          <a:solidFill>
+            <a:srgbClr val="102029"/>
+          </a:solidFill>
+          <a:ln>
+            <a:noFill/>
+          </a:ln>
+        </p:spPr>
+        <p:style>
+          <a:lnRef idx="1">
+            <a:schemeClr val="accent1"/>
+          </a:lnRef>
+          <a:fillRef idx="3">
+            <a:schemeClr val="accent1"/>
+          </a:fillRef>
+          <a:effectRef idx="2">
+            <a:schemeClr val="accent1"/>
+          </a:effectRef>
+          <a:fontRef idx="minor">
+            <a:schemeClr val="lt1"/>
+          </a:fontRef>
+        </p:style>
+        <p:txBody>
+          <a:bodyPr rtlCol="0" anchor="ctr"/>
+          <a:lstStyle/>
+          <a:p>
+            <a:pPr algn="ctr"/>
+          </a:p>
+        </p:txBody>
+      </p:sp>
+      <p:sp>
+        <p:nvSpPr>
+          <p:cNvPr id="10" name="TextBox 9"/>
+          <p:cNvSpPr txBox="1"/>
+          <p:nvPr/>
+        </p:nvSpPr>
+        <p:spPr>
+          <a:xfrm>
+            <a:off x="594360" y="1271016"/>
+            <a:ext cx="11018520" cy="3986784"/>
+          </a:xfrm>
+          <a:prstGeom prst="rect">
+            <a:avLst/>
+          </a:prstGeom>
+          <a:noFill/>
+        </p:spPr>
+        <p:txBody>
+          <a:bodyPr wrap="square">
+            <a:spAutoFit/>
+          </a:bodyPr>
+          <a:lstStyle/>
+          <a:p>
+            <a:r>
+              <a:rPr sz="1300" b="0">
+                <a:solidFill>
+                  <a:srgbClr val="E7F3EA"/>
+                </a:solidFill>
+                <a:latin typeface="Consolas"/>
+              </a:rPr>
+              <a:t>use: {
+  baseURL: 'http://localhost/kampus-kirtasiye/v2/',
+  channel: 'chrome',
+  viewport: { width: 1366, height: 900 },
+  screenshot: 'only-on-failure',
+  trace: 'retain-on-failure'
+}
+test.beforeEach(async ({ page }) =&gt; {
+  await page.goto('index.php?sayfa=giris');
+});</a:t>
+            </a:r>
+          </a:p>
+        </p:txBody>
+      </p:sp>
+      <p:sp>
+        <p:nvSpPr>
+          <p:cNvPr id="11" name="TextBox 10"/>
+          <p:cNvSpPr txBox="1"/>
+          <p:nvPr/>
+        </p:nvSpPr>
+        <p:spPr>
+          <a:xfrm>
+            <a:off x="457200" y="5532120"/>
+            <a:ext cx="10972800" cy="640080"/>
+          </a:xfrm>
+          <a:prstGeom prst="rect">
+            <a:avLst/>
+          </a:prstGeom>
+          <a:noFill/>
+        </p:spPr>
+        <p:txBody>
+          <a:bodyPr wrap="square">
+            <a:spAutoFit/>
+          </a:bodyPr>
+          <a:lstStyle/>
+          <a:p>
+            <a:pPr algn="l"/>
+            <a:r>
+              <a:rPr sz="1600" b="0">
+                <a:solidFill>
+                  <a:srgbClr val="4D5C58"/>
+                </a:solidFill>
+                <a:latin typeface="Calibri"/>
+              </a:rPr>
+              <a:t>Aynı kod V1 ve V2 üzerinde, 1 worker ve 0 retry ile çalıştı.</a:t>
+            </a:r>
+          </a:p>
+        </p:txBody>
+      </p:sp>
     </p:spTree>
   </p:cSld>
   <p:clrMapOvr>
@@ -3834,7 +3969,7 @@
                 </a:solidFill>
                 <a:latin typeface="Calibri"/>
               </a:rPr>
-              <a:t>Parça 2 — Test uygulaması</a:t>
+              <a:t>Giriş testi ve doğrulama</a:t>
             </a:r>
           </a:p>
         </p:txBody>
@@ -3912,7 +4047,7 @@
                 </a:solidFill>
                 <a:latin typeface="Calibri"/>
               </a:rPr>
-              <a:t>Kampüs Kırtasiye  ·  İTÜ BİDB + TechTarget  ·  Rıdvan Çağlar Mutlu</a:t>
+              <a:t>Kampüs Kırtasiye  ·  TechTarget software testing  ·  Rıdvan Çağlar Mutlu</a:t>
             </a:r>
           </a:p>
         </p:txBody>
@@ -3952,30 +4087,125 @@
           </a:p>
         </p:txBody>
       </p:sp>
-      <p:pic>
-        <p:nvPicPr>
-          <p:cNvPr id="9" name="Picture 8" descr="test-surec.png"/>
-          <p:cNvPicPr>
-            <a:picLocks noChangeAspect="1"/>
-          </p:cNvPicPr>
-          <p:nvPr/>
-        </p:nvPicPr>
-        <p:blipFill>
-          <a:blip r:embed="rId2"/>
-          <a:stretch>
-            <a:fillRect/>
-          </a:stretch>
-        </p:blipFill>
-        <p:spPr>
-          <a:xfrm>
-            <a:off x="320040" y="1051560"/>
-            <a:ext cx="11521440" cy="5303520"/>
-          </a:xfrm>
-          <a:prstGeom prst="rect">
-            <a:avLst/>
-          </a:prstGeom>
-        </p:spPr>
-      </p:pic>
+      <p:sp>
+        <p:nvSpPr>
+          <p:cNvPr id="9" name="Rounded Rectangle 8"/>
+          <p:cNvSpPr/>
+          <p:nvPr/>
+        </p:nvSpPr>
+        <p:spPr>
+          <a:xfrm>
+            <a:off x="411480" y="1143000"/>
+            <a:ext cx="11338560" cy="3474720"/>
+          </a:xfrm>
+          <a:prstGeom prst="roundRect">
+            <a:avLst>
+              <a:gd name="adj" fmla="val 8000"/>
+            </a:avLst>
+          </a:prstGeom>
+          <a:solidFill>
+            <a:srgbClr val="102029"/>
+          </a:solidFill>
+          <a:ln>
+            <a:noFill/>
+          </a:ln>
+        </p:spPr>
+        <p:style>
+          <a:lnRef idx="1">
+            <a:schemeClr val="accent1"/>
+          </a:lnRef>
+          <a:fillRef idx="3">
+            <a:schemeClr val="accent1"/>
+          </a:fillRef>
+          <a:effectRef idx="2">
+            <a:schemeClr val="accent1"/>
+          </a:effectRef>
+          <a:fontRef idx="minor">
+            <a:schemeClr val="lt1"/>
+          </a:fontRef>
+        </p:style>
+        <p:txBody>
+          <a:bodyPr rtlCol="0" anchor="ctr"/>
+          <a:lstStyle/>
+          <a:p>
+            <a:pPr algn="ctr"/>
+          </a:p>
+        </p:txBody>
+      </p:sp>
+      <p:sp>
+        <p:nvSpPr>
+          <p:cNvPr id="10" name="TextBox 9"/>
+          <p:cNvSpPr txBox="1"/>
+          <p:nvPr/>
+        </p:nvSpPr>
+        <p:spPr>
+          <a:xfrm>
+            <a:off x="594360" y="1271016"/>
+            <a:ext cx="11018520" cy="3255264"/>
+          </a:xfrm>
+          <a:prstGeom prst="rect">
+            <a:avLst/>
+          </a:prstGeom>
+          <a:noFill/>
+        </p:spPr>
+        <p:txBody>
+          <a:bodyPr wrap="square">
+            <a:spAutoFit/>
+          </a:bodyPr>
+          <a:lstStyle/>
+          <a:p>
+            <a:r>
+              <a:rPr sz="1300" b="0">
+                <a:solidFill>
+                  <a:srgbClr val="E7F3EA"/>
+                </a:solidFill>
+                <a:latin typeface="Consolas"/>
+              </a:rPr>
+              <a:t>test('T02 Yanlis sifre reddedilir', async ({ page }) =&gt; {
+  await giris(page, 'ridvan', 'yanlis123');
+  await expect(page.getByTestId('error'))
+    .toHaveText('Kullanıcı adı veya şifre hatalı.');
+  await expect(page).toHaveURL(/sayfa=giris/);
+});</a:t>
+            </a:r>
+          </a:p>
+        </p:txBody>
+      </p:sp>
+      <p:sp>
+        <p:nvSpPr>
+          <p:cNvPr id="11" name="TextBox 10"/>
+          <p:cNvSpPr txBox="1"/>
+          <p:nvPr/>
+        </p:nvSpPr>
+        <p:spPr>
+          <a:xfrm>
+            <a:off x="457200" y="4846320"/>
+            <a:ext cx="10972800" cy="1097280"/>
+          </a:xfrm>
+          <a:prstGeom prst="rect">
+            <a:avLst/>
+          </a:prstGeom>
+          <a:noFill/>
+        </p:spPr>
+        <p:txBody>
+          <a:bodyPr wrap="square">
+            <a:spAutoFit/>
+          </a:bodyPr>
+          <a:lstStyle/>
+          <a:p>
+            <a:pPr algn="l"/>
+            <a:r>
+              <a:rPr sz="1800" b="0">
+                <a:solidFill>
+                  <a:srgbClr val="12202B"/>
+                </a:solidFill>
+                <a:latin typeface="Calibri"/>
+              </a:rPr>
+              <a:t>Tıklama işlemdir. expect, işlemin doğru sonuç verdiğini kontrol eder.</a:t>
+            </a:r>
+          </a:p>
+        </p:txBody>
+      </p:sp>
     </p:spTree>
   </p:cSld>
   <p:clrMapOvr>
@@ -4153,7 +4383,7 @@
                 </a:solidFill>
                 <a:latin typeface="Calibri"/>
               </a:rPr>
-              <a:t>Test case: girdi verilince çıktı ne olmalı?</a:t>
+              <a:t>Kategori filtresini kodla kontrol etme</a:t>
             </a:r>
           </a:p>
         </p:txBody>
@@ -4231,7 +4461,7 @@
                 </a:solidFill>
                 <a:latin typeface="Calibri"/>
               </a:rPr>
-              <a:t>Kampüs Kırtasiye  ·  İTÜ BİDB + TechTarget  ·  Rıdvan Çağlar Mutlu</a:t>
+              <a:t>Kampüs Kırtasiye  ·  TechTarget software testing  ·  Rıdvan Çağlar Mutlu</a:t>
             </a:r>
           </a:p>
         </p:txBody>
@@ -4271,509 +4501,124 @@
           </a:p>
         </p:txBody>
       </p:sp>
-      <p:graphicFrame>
-        <p:nvGraphicFramePr>
-          <p:cNvPr id="9" name="Table 8"/>
-          <p:cNvGraphicFramePr>
-            <a:graphicFrameLocks noGrp="1"/>
-          </p:cNvGraphicFramePr>
-          <p:nvPr/>
-        </p:nvGraphicFramePr>
-        <p:xfrm>
-          <a:off x="365760" y="1143000"/>
-          <a:ext cx="11430000" cy="4572000"/>
-        </p:xfrm>
-        <a:graphic>
-          <a:graphicData uri="http://schemas.openxmlformats.org/drawingml/2006/table">
-            <a:tbl>
-              <a:tblPr firstRow="1" bandRow="1">
-                <a:tableStyleId>{5C22544A-7EE6-4342-B048-85BDC9FD1C3A}</a:tableStyleId>
-              </a:tblPr>
-              <a:tblGrid>
-                <a:gridCol w="3810000"/>
-                <a:gridCol w="3810000"/>
-                <a:gridCol w="3810000"/>
-              </a:tblGrid>
-              <a:tr h="653142">
-                <a:tc>
-                  <a:txBody>
-                    <a:bodyPr/>
-                    <a:lstStyle/>
-                    <a:p>
-                      <a:r>
-                        <a:rPr sz="1200" b="1">
-                          <a:solidFill>
-                            <a:srgbClr val="FFFFFF"/>
-                          </a:solidFill>
-                          <a:latin typeface="Calibri"/>
-                        </a:rPr>
-                        <a:t>ID</a:t>
-                      </a:r>
-                    </a:p>
-                  </a:txBody>
-                  <a:tcPr>
-                    <a:solidFill>
-                      <a:srgbClr val="0F2A3D"/>
-                    </a:solidFill>
-                  </a:tcPr>
-                </a:tc>
-                <a:tc>
-                  <a:txBody>
-                    <a:bodyPr/>
-                    <a:lstStyle/>
-                    <a:p>
-                      <a:r>
-                        <a:rPr sz="1200" b="1">
-                          <a:solidFill>
-                            <a:srgbClr val="FFFFFF"/>
-                          </a:solidFill>
-                          <a:latin typeface="Calibri"/>
-                        </a:rPr>
-                        <a:t>Girdi</a:t>
-                      </a:r>
-                    </a:p>
-                  </a:txBody>
-                  <a:tcPr>
-                    <a:solidFill>
-                      <a:srgbClr val="0F2A3D"/>
-                    </a:solidFill>
-                  </a:tcPr>
-                </a:tc>
-                <a:tc>
-                  <a:txBody>
-                    <a:bodyPr/>
-                    <a:lstStyle/>
-                    <a:p>
-                      <a:r>
-                        <a:rPr sz="1200" b="1">
-                          <a:solidFill>
-                            <a:srgbClr val="FFFFFF"/>
-                          </a:solidFill>
-                          <a:latin typeface="Calibri"/>
-                        </a:rPr>
-                        <a:t>Beklenen çıktı</a:t>
-                      </a:r>
-                    </a:p>
-                  </a:txBody>
-                  <a:tcPr>
-                    <a:solidFill>
-                      <a:srgbClr val="0F2A3D"/>
-                    </a:solidFill>
-                  </a:tcPr>
-                </a:tc>
-              </a:tr>
-              <a:tr h="653142">
-                <a:tc>
-                  <a:txBody>
-                    <a:bodyPr/>
-                    <a:lstStyle/>
-                    <a:p>
-                      <a:r>
-                        <a:rPr sz="1200" b="0">
-                          <a:solidFill>
-                            <a:srgbClr val="12202B"/>
-                          </a:solidFill>
-                          <a:latin typeface="Calibri"/>
-                        </a:rPr>
-                        <a:t>T02</a:t>
-                      </a:r>
-                    </a:p>
-                  </a:txBody>
-                  <a:tcPr>
-                    <a:solidFill>
-                      <a:srgbClr val="FFFFFF"/>
-                    </a:solidFill>
-                  </a:tcPr>
-                </a:tc>
-                <a:tc>
-                  <a:txBody>
-                    <a:bodyPr/>
-                    <a:lstStyle/>
-                    <a:p>
-                      <a:r>
-                        <a:rPr sz="1200" b="0">
-                          <a:solidFill>
-                            <a:srgbClr val="12202B"/>
-                          </a:solidFill>
-                          <a:latin typeface="Calibri"/>
-                        </a:rPr>
-                        <a:t>ridvan / yanlis123</a:t>
-                      </a:r>
-                    </a:p>
-                  </a:txBody>
-                  <a:tcPr>
-                    <a:solidFill>
-                      <a:srgbClr val="FFFFFF"/>
-                    </a:solidFill>
-                  </a:tcPr>
-                </a:tc>
-                <a:tc>
-                  <a:txBody>
-                    <a:bodyPr/>
-                    <a:lstStyle/>
-                    <a:p>
-                      <a:r>
-                        <a:rPr sz="1200" b="0">
-                          <a:solidFill>
-                            <a:srgbClr val="12202B"/>
-                          </a:solidFill>
-                          <a:latin typeface="Calibri"/>
-                        </a:rPr>
-                        <a:t>Şifre hatalı, sayfa=giris</a:t>
-                      </a:r>
-                    </a:p>
-                  </a:txBody>
-                  <a:tcPr>
-                    <a:solidFill>
-                      <a:srgbClr val="FFFFFF"/>
-                    </a:solidFill>
-                  </a:tcPr>
-                </a:tc>
-              </a:tr>
-              <a:tr h="653142">
-                <a:tc>
-                  <a:txBody>
-                    <a:bodyPr/>
-                    <a:lstStyle/>
-                    <a:p>
-                      <a:r>
-                        <a:rPr sz="1200" b="0">
-                          <a:solidFill>
-                            <a:srgbClr val="12202B"/>
-                          </a:solidFill>
-                          <a:latin typeface="Calibri"/>
-                        </a:rPr>
-                        <a:t>T04</a:t>
-                      </a:r>
-                    </a:p>
-                  </a:txBody>
-                  <a:tcPr>
-                    <a:solidFill>
-                      <a:srgbClr val="DCE8E3"/>
-                    </a:solidFill>
-                  </a:tcPr>
-                </a:tc>
-                <a:tc>
-                  <a:txBody>
-                    <a:bodyPr/>
-                    <a:lstStyle/>
-                    <a:p>
-                      <a:r>
-                        <a:rPr sz="1200" b="0">
-                          <a:solidFill>
-                            <a:srgbClr val="12202B"/>
-                          </a:solidFill>
-                          <a:latin typeface="Calibri"/>
-                        </a:rPr>
-                        <a:t>Kategori = kirtasiye</a:t>
-                      </a:r>
-                    </a:p>
-                  </a:txBody>
-                  <a:tcPr>
-                    <a:solidFill>
-                      <a:srgbClr val="DCE8E3"/>
-                    </a:solidFill>
-                  </a:tcPr>
-                </a:tc>
-                <a:tc>
-                  <a:txBody>
-                    <a:bodyPr/>
-                    <a:lstStyle/>
-                    <a:p>
-                      <a:r>
-                        <a:rPr sz="1200" b="0">
-                          <a:solidFill>
-                            <a:srgbClr val="12202B"/>
-                          </a:solidFill>
-                          <a:latin typeface="Calibri"/>
-                        </a:rPr>
-                        <a:t>4 ürün listelenir</a:t>
-                      </a:r>
-                    </a:p>
-                  </a:txBody>
-                  <a:tcPr>
-                    <a:solidFill>
-                      <a:srgbClr val="DCE8E3"/>
-                    </a:solidFill>
-                  </a:tcPr>
-                </a:tc>
-              </a:tr>
-              <a:tr h="653142">
-                <a:tc>
-                  <a:txBody>
-                    <a:bodyPr/>
-                    <a:lstStyle/>
-                    <a:p>
-                      <a:r>
-                        <a:rPr sz="1200" b="0">
-                          <a:solidFill>
-                            <a:srgbClr val="12202B"/>
-                          </a:solidFill>
-                          <a:latin typeface="Calibri"/>
-                        </a:rPr>
-                        <a:t>T10</a:t>
-                      </a:r>
-                    </a:p>
-                  </a:txBody>
-                  <a:tcPr>
-                    <a:solidFill>
-                      <a:srgbClr val="FFFFFF"/>
-                    </a:solidFill>
-                  </a:tcPr>
-                </a:tc>
-                <a:tc>
-                  <a:txBody>
-                    <a:bodyPr/>
-                    <a:lstStyle/>
-                    <a:p>
-                      <a:r>
-                        <a:rPr sz="1200" b="0">
-                          <a:solidFill>
-                            <a:srgbClr val="12202B"/>
-                          </a:solidFill>
-                          <a:latin typeface="Calibri"/>
-                        </a:rPr>
-                        <a:t>Defter + USB</a:t>
-                      </a:r>
-                    </a:p>
-                  </a:txBody>
-                  <a:tcPr>
-                    <a:solidFill>
-                      <a:srgbClr val="FFFFFF"/>
-                    </a:solidFill>
-                  </a:tcPr>
-                </a:tc>
-                <a:tc>
-                  <a:txBody>
-                    <a:bodyPr/>
-                    <a:lstStyle/>
-                    <a:p>
-                      <a:r>
-                        <a:rPr sz="1200" b="0">
-                          <a:solidFill>
-                            <a:srgbClr val="12202B"/>
-                          </a:solidFill>
-                          <a:latin typeface="Calibri"/>
-                        </a:rPr>
-                        <a:t>398,80 TL (383,90 + 14,90)</a:t>
-                      </a:r>
-                    </a:p>
-                  </a:txBody>
-                  <a:tcPr>
-                    <a:solidFill>
-                      <a:srgbClr val="FFFFFF"/>
-                    </a:solidFill>
-                  </a:tcPr>
-                </a:tc>
-              </a:tr>
-              <a:tr h="653142">
-                <a:tc>
-                  <a:txBody>
-                    <a:bodyPr/>
-                    <a:lstStyle/>
-                    <a:p>
-                      <a:r>
-                        <a:rPr sz="1200" b="0">
-                          <a:solidFill>
-                            <a:srgbClr val="12202B"/>
-                          </a:solidFill>
-                          <a:latin typeface="Calibri"/>
-                        </a:rPr>
-                        <a:t>T11</a:t>
-                      </a:r>
-                    </a:p>
-                  </a:txBody>
-                  <a:tcPr>
-                    <a:solidFill>
-                      <a:srgbClr val="DCE8E3"/>
-                    </a:solidFill>
-                  </a:tcPr>
-                </a:tc>
-                <a:tc>
-                  <a:txBody>
-                    <a:bodyPr/>
-                    <a:lstStyle/>
-                    <a:p>
-                      <a:r>
-                        <a:rPr sz="1200" b="0">
-                          <a:solidFill>
-                            <a:srgbClr val="12202B"/>
-                          </a:solidFill>
-                          <a:latin typeface="Calibri"/>
-                        </a:rPr>
-                        <a:t>0555123456</a:t>
-                      </a:r>
-                    </a:p>
-                  </a:txBody>
-                  <a:tcPr>
-                    <a:solidFill>
-                      <a:srgbClr val="DCE8E3"/>
-                    </a:solidFill>
-                  </a:tcPr>
-                </a:tc>
-                <a:tc>
-                  <a:txBody>
-                    <a:bodyPr/>
-                    <a:lstStyle/>
-                    <a:p>
-                      <a:r>
-                        <a:rPr sz="1200" b="0">
-                          <a:solidFill>
-                            <a:srgbClr val="12202B"/>
-                          </a:solidFill>
-                          <a:latin typeface="Calibri"/>
-                        </a:rPr>
-                        <a:t>Sipariş tamamlanır</a:t>
-                      </a:r>
-                    </a:p>
-                  </a:txBody>
-                  <a:tcPr>
-                    <a:solidFill>
-                      <a:srgbClr val="DCE8E3"/>
-                    </a:solidFill>
-                  </a:tcPr>
-                </a:tc>
-              </a:tr>
-              <a:tr h="653142">
-                <a:tc>
-                  <a:txBody>
-                    <a:bodyPr/>
-                    <a:lstStyle/>
-                    <a:p>
-                      <a:r>
-                        <a:rPr sz="1200" b="0">
-                          <a:solidFill>
-                            <a:srgbClr val="12202B"/>
-                          </a:solidFill>
-                          <a:latin typeface="Calibri"/>
-                        </a:rPr>
-                        <a:t>T12</a:t>
-                      </a:r>
-                    </a:p>
-                  </a:txBody>
-                  <a:tcPr>
-                    <a:solidFill>
-                      <a:srgbClr val="FFFFFF"/>
-                    </a:solidFill>
-                  </a:tcPr>
-                </a:tc>
-                <a:tc>
-                  <a:txBody>
-                    <a:bodyPr/>
-                    <a:lstStyle/>
-                    <a:p>
-                      <a:r>
-                        <a:rPr sz="1200" b="0">
-                          <a:solidFill>
-                            <a:srgbClr val="12202B"/>
-                          </a:solidFill>
-                          <a:latin typeface="Calibri"/>
-                        </a:rPr>
-                        <a:t>0 ürün + Teslimata geç</a:t>
-                      </a:r>
-                    </a:p>
-                  </a:txBody>
-                  <a:tcPr>
-                    <a:solidFill>
-                      <a:srgbClr val="FFFFFF"/>
-                    </a:solidFill>
-                  </a:tcPr>
-                </a:tc>
-                <a:tc>
-                  <a:txBody>
-                    <a:bodyPr/>
-                    <a:lstStyle/>
-                    <a:p>
-                      <a:r>
-                        <a:rPr sz="1200" b="0">
-                          <a:solidFill>
-                            <a:srgbClr val="12202B"/>
-                          </a:solidFill>
-                          <a:latin typeface="Calibri"/>
-                        </a:rPr>
-                        <a:t>Sepette kal, uyarı göster</a:t>
-                      </a:r>
-                    </a:p>
-                  </a:txBody>
-                  <a:tcPr>
-                    <a:solidFill>
-                      <a:srgbClr val="FFFFFF"/>
-                    </a:solidFill>
-                  </a:tcPr>
-                </a:tc>
-              </a:tr>
-              <a:tr h="653148">
-                <a:tc>
-                  <a:txBody>
-                    <a:bodyPr/>
-                    <a:lstStyle/>
-                    <a:p>
-                      <a:r>
-                        <a:rPr sz="1200" b="0">
-                          <a:solidFill>
-                            <a:srgbClr val="12202B"/>
-                          </a:solidFill>
-                          <a:latin typeface="Calibri"/>
-                        </a:rPr>
-                        <a:t>T13 / T14</a:t>
-                      </a:r>
-                    </a:p>
-                  </a:txBody>
-                  <a:tcPr>
-                    <a:solidFill>
-                      <a:srgbClr val="DCE8E3"/>
-                    </a:solidFill>
-                  </a:tcPr>
-                </a:tc>
-                <a:tc>
-                  <a:txBody>
-                    <a:bodyPr/>
-                    <a:lstStyle/>
-                    <a:p>
-                      <a:r>
-                        <a:rPr sz="1200" b="0">
-                          <a:solidFill>
-                            <a:srgbClr val="12202B"/>
-                          </a:solidFill>
-                          <a:latin typeface="Calibri"/>
-                        </a:rPr>
-                        <a:t>9 veya 11 hane</a:t>
-                      </a:r>
-                    </a:p>
-                  </a:txBody>
-                  <a:tcPr>
-                    <a:solidFill>
-                      <a:srgbClr val="DCE8E3"/>
-                    </a:solidFill>
-                  </a:tcPr>
-                </a:tc>
-                <a:tc>
-                  <a:txBody>
-                    <a:bodyPr/>
-                    <a:lstStyle/>
-                    <a:p>
-                      <a:r>
-                        <a:rPr sz="1200" b="0">
-                          <a:solidFill>
-                            <a:srgbClr val="12202B"/>
-                          </a:solidFill>
-                          <a:latin typeface="Calibri"/>
-                        </a:rPr>
-                        <a:t>Telefon 10 rakam olmalıdır</a:t>
-                      </a:r>
-                    </a:p>
-                  </a:txBody>
-                  <a:tcPr>
-                    <a:solidFill>
-                      <a:srgbClr val="DCE8E3"/>
-                    </a:solidFill>
-                  </a:tcPr>
-                </a:tc>
-              </a:tr>
-            </a:tbl>
-          </a:graphicData>
-        </a:graphic>
-      </p:graphicFrame>
+      <p:sp>
+        <p:nvSpPr>
+          <p:cNvPr id="9" name="Rounded Rectangle 8"/>
+          <p:cNvSpPr/>
+          <p:nvPr/>
+        </p:nvSpPr>
+        <p:spPr>
+          <a:xfrm>
+            <a:off x="411480" y="1143000"/>
+            <a:ext cx="11338560" cy="3474720"/>
+          </a:xfrm>
+          <a:prstGeom prst="roundRect">
+            <a:avLst>
+              <a:gd name="adj" fmla="val 8000"/>
+            </a:avLst>
+          </a:prstGeom>
+          <a:solidFill>
+            <a:srgbClr val="102029"/>
+          </a:solidFill>
+          <a:ln>
+            <a:noFill/>
+          </a:ln>
+        </p:spPr>
+        <p:style>
+          <a:lnRef idx="1">
+            <a:schemeClr val="accent1"/>
+          </a:lnRef>
+          <a:fillRef idx="3">
+            <a:schemeClr val="accent1"/>
+          </a:fillRef>
+          <a:effectRef idx="2">
+            <a:schemeClr val="accent1"/>
+          </a:effectRef>
+          <a:fontRef idx="minor">
+            <a:schemeClr val="lt1"/>
+          </a:fontRef>
+        </p:style>
+        <p:txBody>
+          <a:bodyPr rtlCol="0" anchor="ctr"/>
+          <a:lstStyle/>
+          <a:p>
+            <a:pPr algn="ctr"/>
+          </a:p>
+        </p:txBody>
+      </p:sp>
+      <p:sp>
+        <p:nvSpPr>
+          <p:cNvPr id="10" name="TextBox 9"/>
+          <p:cNvSpPr txBox="1"/>
+          <p:nvPr/>
+        </p:nvSpPr>
+        <p:spPr>
+          <a:xfrm>
+            <a:off x="594360" y="1271016"/>
+            <a:ext cx="11018520" cy="3255264"/>
+          </a:xfrm>
+          <a:prstGeom prst="rect">
+            <a:avLst/>
+          </a:prstGeom>
+          <a:noFill/>
+        </p:spPr>
+        <p:txBody>
+          <a:bodyPr wrap="square">
+            <a:spAutoFit/>
+          </a:bodyPr>
+          <a:lstStyle/>
+          <a:p>
+            <a:r>
+              <a:rPr sz="1300" b="0">
+                <a:solidFill>
+                  <a:srgbClr val="E7F3EA"/>
+                </a:solidFill>
+                <a:latin typeface="Consolas"/>
+              </a:rPr>
+              <a:t>await page.getByLabel('Kategori').selectOption('kirtasiye');
+await expect(page).toHaveURL(/kategori=kirtasiye/);
+await expect(page.getByTestId('product')).toHaveCount(4);
+await expect(page.getByTestId('product-count'))
+  .toHaveText('4 ürün listeleniyor');</a:t>
+            </a:r>
+          </a:p>
+        </p:txBody>
+      </p:sp>
+      <p:sp>
+        <p:nvSpPr>
+          <p:cNvPr id="11" name="TextBox 10"/>
+          <p:cNvSpPr txBox="1"/>
+          <p:nvPr/>
+        </p:nvSpPr>
+        <p:spPr>
+          <a:xfrm>
+            <a:off x="457200" y="4846320"/>
+            <a:ext cx="10972800" cy="1097280"/>
+          </a:xfrm>
+          <a:prstGeom prst="rect">
+            <a:avLst/>
+          </a:prstGeom>
+          <a:noFill/>
+        </p:spPr>
+        <p:txBody>
+          <a:bodyPr wrap="square">
+            <a:spAutoFit/>
+          </a:bodyPr>
+          <a:lstStyle/>
+          <a:p>
+            <a:pPr algn="l"/>
+            <a:r>
+              <a:rPr sz="1800" b="0">
+                <a:solidFill>
+                  <a:srgbClr val="12202B"/>
+                </a:solidFill>
+                <a:latin typeface="Calibri"/>
+              </a:rPr>
+              <a:t>Filtrenin görünmesi yetmez; ürün sayısı da 4 olmalıdır.</a:t>
+            </a:r>
+          </a:p>
+        </p:txBody>
+      </p:sp>
     </p:spTree>
   </p:cSld>
   <p:clrMapOvr>
@@ -4951,7 +4796,7 @@
                 </a:solidFill>
                 <a:latin typeface="Calibri"/>
               </a:rPr>
-              <a:t>Dinamik test: Playwright siteye nasıl bağlanır?</a:t>
+              <a:t>Telefon: PHP kuralı ve sınır testi</a:t>
             </a:r>
           </a:p>
         </p:txBody>
@@ -5029,7 +4874,7 @@
                 </a:solidFill>
                 <a:latin typeface="Calibri"/>
               </a:rPr>
-              <a:t>Kampüs Kırtasiye  ·  İTÜ BİDB + TechTarget  ·  Rıdvan Çağlar Mutlu</a:t>
+              <a:t>Kampüs Kırtasiye  ·  TechTarget software testing  ·  Rıdvan Çağlar Mutlu</a:t>
             </a:r>
           </a:p>
         </p:txBody>
@@ -5078,7 +4923,7 @@
         <p:spPr>
           <a:xfrm>
             <a:off x="411480" y="1143000"/>
-            <a:ext cx="11338560" cy="4206240"/>
+            <a:ext cx="11338560" cy="3749039"/>
           </a:xfrm>
           <a:prstGeom prst="roundRect">
             <a:avLst>
@@ -5123,7 +4968,7 @@
         <p:spPr>
           <a:xfrm>
             <a:off x="594360" y="1271016"/>
-            <a:ext cx="11018520" cy="3986784"/>
+            <a:ext cx="11018520" cy="3529583"/>
           </a:xfrm>
           <a:prstGeom prst="rect">
             <a:avLst/>
@@ -5143,15 +4988,12 @@
                 </a:solidFill>
                 <a:latin typeface="Consolas"/>
               </a:rPr>
-              <a:t>use: {
-  baseURL: 'http://localhost/kampus-kirtasiye/v2/',
-  viewport: { width: 1366, height: 900 },
-  screenshot: 'only-on-failure',
-  trace: 'retain-on-failure'
+              <a:t>if (!preg_match('/^[0-9]{10}$/D', $telefon)) {
+    $error = 'Telefon numarası 10 rakamdan oluşmalıdır.';
 }
-test.beforeEach(async ({ page }) =&gt; {
-  await page.goto('index.php?sayfa=giris');
-});</a:t>
+await bilgileriGir(page, '05551234567');
+await expect(page.getByTestId('error'))
+  .toHaveText('Telefon numarası 10 rakamdan oluşmalıdır.');</a:t>
             </a:r>
           </a:p>
         </p:txBody>
@@ -5164,8 +5006,8 @@
         </p:nvSpPr>
         <p:spPr>
           <a:xfrm>
-            <a:off x="457200" y="5532120"/>
-            <a:ext cx="10972800" cy="640080"/>
+            <a:off x="457200" y="5120640"/>
+            <a:ext cx="10972800" cy="731520"/>
           </a:xfrm>
           <a:prstGeom prst="rect">
             <a:avLst/>
@@ -5180,13 +5022,13 @@
           <a:p>
             <a:pPr algn="l"/>
             <a:r>
-              <a:rPr sz="1600" b="0">
+              <a:rPr sz="1800" b="1">
                 <a:solidFill>
-                  <a:srgbClr val="4D5C58"/>
+                  <a:srgbClr val="0B6E4F"/>
                 </a:solidFill>
                 <a:latin typeface="Calibri"/>
               </a:rPr>
-              <a:t>Aynı 15 test V1 ve V2’ye, 1 worker ve 0 retry ile koşuldu.</a:t>
+              <a:t>9 hane: ret  /  10 hane: kabul  /  11 hane: ret</a:t>
             </a:r>
           </a:p>
         </p:txBody>
@@ -5368,7 +5210,7 @@
                 </a:solidFill>
                 <a:latin typeface="Calibri"/>
               </a:rPr>
-              <a:t>Kara kutu örneği: tıkla, sonra expect et</a:t>
+              <a:t>Para hesabı: Tam sayı kuruş + teslimat</a:t>
             </a:r>
           </a:p>
         </p:txBody>
@@ -5446,7 +5288,7 @@
                 </a:solidFill>
                 <a:latin typeface="Calibri"/>
               </a:rPr>
-              <a:t>Kampüs Kırtasiye  ·  İTÜ BİDB + TechTarget  ·  Rıdvan Çağlar Mutlu</a:t>
+              <a:t>Kampüs Kırtasiye  ·  TechTarget software testing  ·  Rıdvan Çağlar Mutlu</a:t>
             </a:r>
           </a:p>
         </p:txBody>
@@ -5495,7 +5337,7 @@
         <p:spPr>
           <a:xfrm>
             <a:off x="411480" y="1143000"/>
-            <a:ext cx="11338560" cy="3931920"/>
+            <a:ext cx="11338560" cy="3840480"/>
           </a:xfrm>
           <a:prstGeom prst="roundRect">
             <a:avLst>
@@ -5540,7 +5382,7 @@
         <p:spPr>
           <a:xfrm>
             <a:off x="594360" y="1271016"/>
-            <a:ext cx="11018520" cy="3712464"/>
+            <a:ext cx="11018520" cy="3621024"/>
           </a:xfrm>
           <a:prstGeom prst="rect">
             <a:avLst/>
@@ -5560,12 +5402,13 @@
                 </a:solidFill>
                 <a:latin typeface="Consolas"/>
               </a:rPr>
-              <a:t>test('T02 Yanlis sifre reddedilir', async ({ page }) =&gt; {
-  await giris(page, 'ridvan', 'yanlis123');
-  await expect(page.getByTestId('error'))
-    .toHaveText('Kullanıcı adı veya şifre hatalı.');
-  await expect(page).toHaveURL(/sayfa=giris/);
-});</a:t>
+              <a:t>1 =&gt; ['ad' =&gt; 'A4 Spiralli Defter', 'fiyat' =&gt; 5490],
+4 =&gt; ['ad' =&gt; '64GB USB Bellek', 'fiyat' =&gt; 32900],
+teslimat = 1490
+expect(araToplam).toBe(5490 + 32900);
+expect(teslimat).toBe(1490);
+expect(toplam).toBe(39880);
+await expect(page.getByTestId('total')).toHaveText('398,80 TL');</a:t>
             </a:r>
           </a:p>
         </p:txBody>
@@ -5578,8 +5421,8 @@
         </p:nvSpPr>
         <p:spPr>
           <a:xfrm>
-            <a:off x="457200" y="5257800"/>
-            <a:ext cx="10972800" cy="822960"/>
+            <a:off x="457200" y="5212080"/>
+            <a:ext cx="10972800" cy="640080"/>
           </a:xfrm>
           <a:prstGeom prst="rect">
             <a:avLst/>
@@ -5594,13 +5437,13 @@
           <a:p>
             <a:pPr algn="l"/>
             <a:r>
-              <a:rPr sz="1600" b="0">
+              <a:rPr sz="1800" b="1">
                 <a:solidFill>
-                  <a:srgbClr val="12202B"/>
+                  <a:srgbClr val="0B6E4F"/>
                 </a:solidFill>
                 <a:latin typeface="Calibri"/>
               </a:rPr>
-              <a:t>İşlem tıklamaktır. Doğrulama expect’tir. Kodun içini okumadan dışarıdan sınarız.</a:t>
+              <a:t>5490 + 32900 + 1490 = 39880 kuruş = 398,80 TL</a:t>
             </a:r>
           </a:p>
         </p:txBody>
@@ -5782,7 +5625,7 @@
                 </a:solidFill>
                 <a:latin typeface="Calibri"/>
               </a:rPr>
-              <a:t>V1 dinamik test: beklenen ≠ gözlenen</a:t>
+              <a:t>V1 sonuçları: İki başarısız test</a:t>
             </a:r>
           </a:p>
         </p:txBody>
@@ -5860,7 +5703,7 @@
                 </a:solidFill>
                 <a:latin typeface="Calibri"/>
               </a:rPr>
-              <a:t>Kampüs Kırtasiye  ·  İTÜ BİDB + TechTarget  ·  Rıdvan Çağlar Mutlu</a:t>
+              <a:t>Kampüs Kırtasiye  ·  TechTarget software testing  ·  Rıdvan Çağlar Mutlu</a:t>
             </a:r>
           </a:p>
         </p:txBody>
@@ -5909,7 +5752,7 @@
         <p:spPr>
           <a:xfrm>
             <a:off x="411480" y="1280160"/>
-            <a:ext cx="3566160" cy="2194560"/>
+            <a:ext cx="3566160" cy="2103120"/>
           </a:xfrm>
           <a:prstGeom prst="roundRect">
             <a:avLst>
@@ -5954,7 +5797,7 @@
         <p:spPr>
           <a:xfrm>
             <a:off x="640080" y="1463040"/>
-            <a:ext cx="3200400" cy="822960"/>
+            <a:ext cx="3200400" cy="731520"/>
           </a:xfrm>
           <a:prstGeom prst="rect">
             <a:avLst/>
@@ -5969,13 +5812,13 @@
           <a:p>
             <a:pPr algn="l"/>
             <a:r>
-              <a:rPr sz="2200" b="1">
+              <a:rPr sz="2000" b="1">
                 <a:solidFill>
                   <a:srgbClr val="A61F2B"/>
                 </a:solidFill>
                 <a:latin typeface="Calibri"/>
               </a:rPr>
-              <a:t>13 geçti / 2 kaldı</a:t>
+              <a:t>13 geçti / 2 başarısız</a:t>
             </a:r>
           </a:p>
         </p:txBody>
@@ -5989,7 +5832,7 @@
         <p:spPr>
           <a:xfrm>
             <a:off x="640080" y="2286000"/>
-            <a:ext cx="3200400" cy="914400"/>
+            <a:ext cx="3200400" cy="822960"/>
           </a:xfrm>
           <a:prstGeom prst="rect">
             <a:avLst/>
@@ -6010,8 +5853,7 @@
                 </a:solidFill>
                 <a:latin typeface="Calibri"/>
               </a:rPr>
-              <a:t>T04 ve T12.
-Süre 33,9 sn.</a:t>
+              <a:t>TechTarget: hatayı teslimden önce bul.</a:t>
             </a:r>
           </a:p>
         </p:txBody>
@@ -6050,7 +5892,7 @@
                 </a:solidFill>
                 <a:latin typeface="Calibri"/>
               </a:rPr>
-              <a:t>▸  T04: kirtasiye seçeneği DOM’da yok (bozuk option).</a:t>
+              <a:t>▸  T04: kirtasiye seçeneği tarayıcıda oluşmadı.</a:t>
             </a:r>
           </a:p>
           <a:p>
@@ -6066,7 +5908,7 @@
                 </a:solidFill>
                 <a:latin typeface="Calibri"/>
               </a:rPr>
-              <a:t>▸  T12: boş sepet teslimat sayfasını açtı.</a:t>
+              <a:t>▸  T12: 0 ürünle teslimat formu açıldı.</a:t>
             </a:r>
           </a:p>
           <a:p>
@@ -6082,7 +5924,7 @@
                 </a:solidFill>
                 <a:latin typeface="Calibri"/>
               </a:rPr>
-              <a:t>▸  İTÜ tanımı burada somut: fark bulundu, test durmadı.</a:t>
+              <a:t>▸  Kanıt: hata mesajı, ekran görüntüsü ve trace.</a:t>
             </a:r>
           </a:p>
           <a:p>
@@ -6098,7 +5940,7 @@
                 </a:solidFill>
                 <a:latin typeface="Calibri"/>
               </a:rPr>
-              <a:t>▸  Kanıt: hata metni, ekran görüntüsü, trace.</a:t>
+              <a:t>▸  Süre 33,9 sn; bir bölümü T04 beklemesi.</a:t>
             </a:r>
           </a:p>
         </p:txBody>
@@ -6280,7 +6122,7 @@
                 </a:solidFill>
                 <a:latin typeface="Calibri"/>
               </a:rPr>
-              <a:t>H01: HTML option (beyaz kutu inceleme)</a:t>
+              <a:t>H01: Yanlış kapanan option etiketi</a:t>
             </a:r>
           </a:p>
         </p:txBody>
@@ -6358,7 +6200,7 @@
                 </a:solidFill>
                 <a:latin typeface="Calibri"/>
               </a:rPr>
-              <a:t>Kampüs Kırtasiye  ·  İTÜ BİDB + TechTarget  ·  Rıdvan Çağlar Mutlu</a:t>
+              <a:t>Kampüs Kırtasiye  ·  TechTarget software testing  ·  Rıdvan Çağlar Mutlu</a:t>
             </a:r>
           </a:p>
         </p:txBody>
@@ -6407,7 +6249,7 @@
         <p:spPr>
           <a:xfrm>
             <a:off x="411480" y="1143000"/>
-            <a:ext cx="11338560" cy="4023360"/>
+            <a:ext cx="11338560" cy="3840480"/>
           </a:xfrm>
           <a:prstGeom prst="roundRect">
             <a:avLst>
@@ -6452,7 +6294,7 @@
         <p:spPr>
           <a:xfrm>
             <a:off x="594360" y="1271016"/>
-            <a:ext cx="11018520" cy="3803904"/>
+            <a:ext cx="11018520" cy="3621024"/>
           </a:xfrm>
           <a:prstGeom prst="rect">
             <a:avLst/>
@@ -6472,12 +6314,11 @@
                 </a:solidFill>
                 <a:latin typeface="Consolas"/>
               </a:rPr>
-              <a:t>&lt;!-- V1 --&gt;
+              <a:t>&lt;!-- V1: Yeni seçenek açılmıyor --&gt;
 &lt;/option value="kirtasiye"&gt;Yalnız kırtasiye
-&lt;!-- V2 --&gt;
+&lt;!-- V2: Önceki seçenek kapanıyor, yenisi açılıyor --&gt;
 &lt;option value="kirtasiye"&gt;Yalnız kırtasiye&lt;/option&gt;
-await page.getByLabel('Kategori').selectOption('kirtasiye');
-await expect(page.getByTestId('product')).toHaveCount(4);</a:t>
+await page.getByLabel('Kategori').selectOption('kirtasiye');</a:t>
             </a:r>
           </a:p>
         </p:txBody>
@@ -6490,7 +6331,7 @@
         </p:nvSpPr>
         <p:spPr>
           <a:xfrm>
-            <a:off x="457200" y="5394960"/>
+            <a:off x="457200" y="5212080"/>
             <a:ext cx="10972800" cy="731520"/>
           </a:xfrm>
           <a:prstGeom prst="rect">
@@ -6506,13 +6347,13 @@
           <a:p>
             <a:pPr algn="l"/>
             <a:r>
-              <a:rPr sz="1600" b="0">
+              <a:rPr sz="1800" b="1">
                 <a:solidFill>
-                  <a:srgbClr val="12202B"/>
+                  <a:srgbClr val="0F2A3D"/>
                 </a:solidFill>
                 <a:latin typeface="Calibri"/>
               </a:rPr>
-              <a:t>Kara kutu T04 düştü. Nedeni için HTML’e bakıldı. Düzeltme site kodunda.</a:t>
+              <a:t>V1: T04 başarısız  /  HTML düzeltmesinden sonra V2: T04 geçti</a:t>
             </a:r>
           </a:p>
         </p:txBody>
@@ -6694,7 +6535,7 @@
                 </a:solidFill>
                 <a:latin typeface="Calibri"/>
               </a:rPr>
-              <a:t>H02: Boş sepet — beklenen uyarı, gözlenen form</a:t>
+              <a:t>H02: Boş sepetle teslimat formuna geçiş</a:t>
             </a:r>
           </a:p>
         </p:txBody>
@@ -6772,7 +6613,7 @@
                 </a:solidFill>
                 <a:latin typeface="Calibri"/>
               </a:rPr>
-              <a:t>Kampüs Kırtasiye  ·  İTÜ BİDB + TechTarget  ·  Rıdvan Çağlar Mutlu</a:t>
+              <a:t>Kampüs Kırtasiye  ·  TechTarget software testing  ·  Rıdvan Çağlar Mutlu</a:t>
             </a:r>
           </a:p>
         </p:txBody>
@@ -6890,7 +6731,7 @@
                 </a:solidFill>
                 <a:latin typeface="Calibri"/>
               </a:rPr>
-              <a:t>V1 gözlenen: teslimat açıldı</a:t>
+              <a:t>V1: Teslimat formu açıldı</a:t>
             </a:r>
           </a:p>
         </p:txBody>
@@ -6925,7 +6766,7 @@
                 </a:solidFill>
                 <a:latin typeface="Calibri"/>
               </a:rPr>
-              <a:t>V2 gözlenen: sepet + uyarı</a:t>
+              <a:t>V2: Sepette uyarı çıktı</a:t>
             </a:r>
           </a:p>
         </p:txBody>
@@ -7107,7 +6948,7 @@
                 </a:solidFill>
                 <a:latin typeface="Calibri"/>
               </a:rPr>
-              <a:t>Düzeltme sunucuda: kontrolü düğmeye bırakma</a:t>
+              <a:t>H02 düzeltmesi: PHP tarafında kontrol</a:t>
             </a:r>
           </a:p>
         </p:txBody>
@@ -7185,7 +7026,7 @@
                 </a:solidFill>
                 <a:latin typeface="Calibri"/>
               </a:rPr>
-              <a:t>Kampüs Kırtasiye  ·  İTÜ BİDB + TechTarget  ·  Rıdvan Çağlar Mutlu</a:t>
+              <a:t>Kampüs Kırtasiye  ·  TechTarget software testing  ·  Rıdvan Çağlar Mutlu</a:t>
             </a:r>
           </a:p>
         </p:txBody>
@@ -7234,7 +7075,7 @@
         <p:spPr>
           <a:xfrm>
             <a:off x="411480" y="1143000"/>
-            <a:ext cx="11338560" cy="4023360"/>
+            <a:ext cx="11338560" cy="3840480"/>
           </a:xfrm>
           <a:prstGeom prst="roundRect">
             <a:avLst>
@@ -7279,7 +7120,7 @@
         <p:spPr>
           <a:xfrm>
             <a:off x="594360" y="1271016"/>
-            <a:ext cx="11018520" cy="3803904"/>
+            <a:ext cx="11018520" cy="3621024"/>
           </a:xfrm>
           <a:prstGeom prst="rect">
             <a:avLst/>
@@ -7304,7 +7145,8 @@
     flash('Sepetiniz boş. Teslimata geçmeden önce bir ürün ekleyin.');
     git('sepet');
 }
-// teslimata_gec ve siparis POST’una da aynı kural eklendi.</a:t>
+// Aynı kontrol sipariş POST işlemine de eklendi.
+// Kontrol yalnızca tarayıcı düğmesine bırakılmadı.</a:t>
             </a:r>
           </a:p>
         </p:txBody>
@@ -7317,7 +7159,7 @@
         </p:nvSpPr>
         <p:spPr>
           <a:xfrm>
-            <a:off x="457200" y="5394960"/>
+            <a:off x="457200" y="5212080"/>
             <a:ext cx="10972800" cy="731520"/>
           </a:xfrm>
           <a:prstGeom prst="rect">
@@ -7339,7 +7181,7 @@
                 </a:solidFill>
                 <a:latin typeface="Calibri"/>
               </a:rPr>
-              <a:t>TechTarget: hatayı teslimden önce kapat. İTÜ: dinamik test, hatalar çözülmeden bitmez.</a:t>
+              <a:t>Düzeltme site kodunda yapıldı; testin beklediği sonuç korunarak yeniden çalıştırıldı.</a:t>
             </a:r>
           </a:p>
         </p:txBody>
@@ -7521,7 +7363,7 @@
                 </a:solidFill>
                 <a:latin typeface="Calibri"/>
               </a:rPr>
-              <a:t>Regresyon: aynı 15 test, düzeltilmiş site</a:t>
+              <a:t>T12: Düzeltmeyi aynı testle doğrulama</a:t>
             </a:r>
           </a:p>
         </p:txBody>
@@ -7599,7 +7441,7 @@
                 </a:solidFill>
                 <a:latin typeface="Calibri"/>
               </a:rPr>
-              <a:t>Kampüs Kırtasiye  ·  İTÜ BİDB + TechTarget  ·  Rıdvan Çağlar Mutlu</a:t>
+              <a:t>Kampüs Kırtasiye  ·  TechTarget software testing  ·  Rıdvan Çağlar Mutlu</a:t>
             </a:r>
           </a:p>
         </p:txBody>
@@ -7635,6 +7477,819 @@
                 <a:latin typeface="Calibri"/>
               </a:rPr>
               <a:t>19</a:t>
+            </a:r>
+          </a:p>
+        </p:txBody>
+      </p:sp>
+      <p:sp>
+        <p:nvSpPr>
+          <p:cNvPr id="9" name="Rounded Rectangle 8"/>
+          <p:cNvSpPr/>
+          <p:nvPr/>
+        </p:nvSpPr>
+        <p:spPr>
+          <a:xfrm>
+            <a:off x="411480" y="1143000"/>
+            <a:ext cx="11338560" cy="3931920"/>
+          </a:xfrm>
+          <a:prstGeom prst="roundRect">
+            <a:avLst>
+              <a:gd name="adj" fmla="val 8000"/>
+            </a:avLst>
+          </a:prstGeom>
+          <a:solidFill>
+            <a:srgbClr val="102029"/>
+          </a:solidFill>
+          <a:ln>
+            <a:noFill/>
+          </a:ln>
+        </p:spPr>
+        <p:style>
+          <a:lnRef idx="1">
+            <a:schemeClr val="accent1"/>
+          </a:lnRef>
+          <a:fillRef idx="3">
+            <a:schemeClr val="accent1"/>
+          </a:fillRef>
+          <a:effectRef idx="2">
+            <a:schemeClr val="accent1"/>
+          </a:effectRef>
+          <a:fontRef idx="minor">
+            <a:schemeClr val="lt1"/>
+          </a:fontRef>
+        </p:style>
+        <p:txBody>
+          <a:bodyPr rtlCol="0" anchor="ctr"/>
+          <a:lstStyle/>
+          <a:p>
+            <a:pPr algn="ctr"/>
+          </a:p>
+        </p:txBody>
+      </p:sp>
+      <p:sp>
+        <p:nvSpPr>
+          <p:cNvPr id="10" name="TextBox 9"/>
+          <p:cNvSpPr txBox="1"/>
+          <p:nvPr/>
+        </p:nvSpPr>
+        <p:spPr>
+          <a:xfrm>
+            <a:off x="594360" y="1271016"/>
+            <a:ext cx="11018520" cy="3712464"/>
+          </a:xfrm>
+          <a:prstGeom prst="rect">
+            <a:avLst/>
+          </a:prstGeom>
+          <a:noFill/>
+        </p:spPr>
+        <p:txBody>
+          <a:bodyPr wrap="square">
+            <a:spAutoFit/>
+          </a:bodyPr>
+          <a:lstStyle/>
+          <a:p>
+            <a:r>
+              <a:rPr sz="1300" b="0">
+                <a:solidFill>
+                  <a:srgbClr val="E7F3EA"/>
+                </a:solidFill>
+                <a:latin typeface="Consolas"/>
+              </a:rPr>
+              <a:t>await giris(page);
+await page.getByTestId('cart-link').click();
+await expect(page.getByTestId('cart-item')).toHaveCount(0);
+await page.getByTestId('checkout').click();
+await expect(page).toHaveURL(/sayfa=sepet/);
+await expect(page.getByTestId('error'))
+  .toHaveText('Sepetiniz boş. Teslimata geçmeden önce bir ürün ekleyin.');</a:t>
+            </a:r>
+          </a:p>
+        </p:txBody>
+      </p:sp>
+      <p:sp>
+        <p:nvSpPr>
+          <p:cNvPr id="11" name="TextBox 10"/>
+          <p:cNvSpPr txBox="1"/>
+          <p:nvPr/>
+        </p:nvSpPr>
+        <p:spPr>
+          <a:xfrm>
+            <a:off x="457200" y="5303520"/>
+            <a:ext cx="10972800" cy="640080"/>
+          </a:xfrm>
+          <a:prstGeom prst="rect">
+            <a:avLst/>
+          </a:prstGeom>
+          <a:noFill/>
+        </p:spPr>
+        <p:txBody>
+          <a:bodyPr wrap="square">
+            <a:spAutoFit/>
+          </a:bodyPr>
+          <a:lstStyle/>
+          <a:p>
+            <a:pPr algn="l"/>
+            <a:r>
+              <a:rPr sz="1600" b="1">
+                <a:solidFill>
+                  <a:srgbClr val="0F2A3D"/>
+                </a:solidFill>
+                <a:latin typeface="Calibri"/>
+              </a:rPr>
+              <a:t>Aynı adımlar + aynı beklenti + düzeltilmiş site = başarılı yeniden test</a:t>
+            </a:r>
+          </a:p>
+        </p:txBody>
+      </p:sp>
+    </p:spTree>
+  </p:cSld>
+  <p:clrMapOvr>
+    <a:masterClrMapping/>
+  </p:clrMapOvr>
+</p:sld>
+</file>
+
+<file path=ppt/slides/slide2.xml><?xml version="1.0" encoding="utf-8"?>
+<p:sld xmlns:a="http://schemas.openxmlformats.org/drawingml/2006/main" xmlns:p="http://schemas.openxmlformats.org/presentationml/2006/main" xmlns:r="http://schemas.openxmlformats.org/officeDocument/2006/relationships">
+  <p:cSld>
+    <p:spTree>
+      <p:nvGrpSpPr>
+        <p:cNvPr id="1" name=""/>
+        <p:cNvGrpSpPr/>
+        <p:nvPr/>
+      </p:nvGrpSpPr>
+      <p:grpSpPr/>
+      <p:sp>
+        <p:nvSpPr>
+          <p:cNvPr id="2" name="Rectangle 1"/>
+          <p:cNvSpPr/>
+          <p:nvPr/>
+        </p:nvSpPr>
+        <p:spPr>
+          <a:xfrm>
+            <a:off x="0" y="0"/>
+            <a:ext cx="12191695" cy="6858000"/>
+          </a:xfrm>
+          <a:prstGeom prst="rect">
+            <a:avLst/>
+          </a:prstGeom>
+          <a:solidFill>
+            <a:srgbClr val="EEF3F1"/>
+          </a:solidFill>
+          <a:ln>
+            <a:noFill/>
+          </a:ln>
+        </p:spPr>
+        <p:style>
+          <a:lnRef idx="1">
+            <a:schemeClr val="accent1"/>
+          </a:lnRef>
+          <a:fillRef idx="3">
+            <a:schemeClr val="accent1"/>
+          </a:fillRef>
+          <a:effectRef idx="2">
+            <a:schemeClr val="accent1"/>
+          </a:effectRef>
+          <a:fontRef idx="minor">
+            <a:schemeClr val="lt1"/>
+          </a:fontRef>
+        </p:style>
+        <p:txBody>
+          <a:bodyPr rtlCol="0" anchor="ctr"/>
+          <a:lstStyle/>
+          <a:p>
+            <a:pPr algn="ctr"/>
+          </a:p>
+        </p:txBody>
+      </p:sp>
+      <p:sp>
+        <p:nvSpPr>
+          <p:cNvPr id="3" name="Rectangle 2"/>
+          <p:cNvSpPr/>
+          <p:nvPr/>
+        </p:nvSpPr>
+        <p:spPr>
+          <a:xfrm>
+            <a:off x="0" y="0"/>
+            <a:ext cx="12191695" cy="109728"/>
+          </a:xfrm>
+          <a:prstGeom prst="rect">
+            <a:avLst/>
+          </a:prstGeom>
+          <a:solidFill>
+            <a:srgbClr val="0B6E4F"/>
+          </a:solidFill>
+          <a:ln>
+            <a:noFill/>
+          </a:ln>
+        </p:spPr>
+        <p:style>
+          <a:lnRef idx="1">
+            <a:schemeClr val="accent1"/>
+          </a:lnRef>
+          <a:fillRef idx="3">
+            <a:schemeClr val="accent1"/>
+          </a:fillRef>
+          <a:effectRef idx="2">
+            <a:schemeClr val="accent1"/>
+          </a:effectRef>
+          <a:fontRef idx="minor">
+            <a:schemeClr val="lt1"/>
+          </a:fontRef>
+        </p:style>
+        <p:txBody>
+          <a:bodyPr rtlCol="0" anchor="ctr"/>
+          <a:lstStyle/>
+          <a:p>
+            <a:pPr algn="ctr"/>
+          </a:p>
+        </p:txBody>
+      </p:sp>
+      <p:sp>
+        <p:nvSpPr>
+          <p:cNvPr id="4" name="Rectangle 3"/>
+          <p:cNvSpPr/>
+          <p:nvPr/>
+        </p:nvSpPr>
+        <p:spPr>
+          <a:xfrm>
+            <a:off x="0" y="109728"/>
+            <a:ext cx="12191695" cy="841248"/>
+          </a:xfrm>
+          <a:prstGeom prst="rect">
+            <a:avLst/>
+          </a:prstGeom>
+          <a:solidFill>
+            <a:srgbClr val="0F2A3D"/>
+          </a:solidFill>
+          <a:ln>
+            <a:noFill/>
+          </a:ln>
+        </p:spPr>
+        <p:style>
+          <a:lnRef idx="1">
+            <a:schemeClr val="accent1"/>
+          </a:lnRef>
+          <a:fillRef idx="3">
+            <a:schemeClr val="accent1"/>
+          </a:fillRef>
+          <a:effectRef idx="2">
+            <a:schemeClr val="accent1"/>
+          </a:effectRef>
+          <a:fontRef idx="minor">
+            <a:schemeClr val="lt1"/>
+          </a:fontRef>
+        </p:style>
+        <p:txBody>
+          <a:bodyPr rtlCol="0" anchor="ctr"/>
+          <a:lstStyle/>
+          <a:p>
+            <a:pPr algn="ctr"/>
+          </a:p>
+        </p:txBody>
+      </p:sp>
+      <p:sp>
+        <p:nvSpPr>
+          <p:cNvPr id="5" name="TextBox 4"/>
+          <p:cNvSpPr txBox="1"/>
+          <p:nvPr/>
+        </p:nvSpPr>
+        <p:spPr>
+          <a:xfrm>
+            <a:off x="411480" y="256032"/>
+            <a:ext cx="10972800" cy="548640"/>
+          </a:xfrm>
+          <a:prstGeom prst="rect">
+            <a:avLst/>
+          </a:prstGeom>
+          <a:noFill/>
+        </p:spPr>
+        <p:txBody>
+          <a:bodyPr wrap="square">
+            <a:spAutoFit/>
+          </a:bodyPr>
+          <a:lstStyle/>
+          <a:p>
+            <a:pPr algn="l"/>
+            <a:r>
+              <a:rPr sz="2400" b="1">
+                <a:solidFill>
+                  <a:srgbClr val="FFFFFF"/>
+                </a:solidFill>
+                <a:latin typeface="Calibri"/>
+              </a:rPr>
+              <a:t>Projenin teslim kapsamı</a:t>
+            </a:r>
+          </a:p>
+        </p:txBody>
+      </p:sp>
+      <p:sp>
+        <p:nvSpPr>
+          <p:cNvPr id="6" name="Rectangle 5"/>
+          <p:cNvSpPr/>
+          <p:nvPr/>
+        </p:nvSpPr>
+        <p:spPr>
+          <a:xfrm>
+            <a:off x="0" y="6601968"/>
+            <a:ext cx="12191695" cy="256032"/>
+          </a:xfrm>
+          <a:prstGeom prst="rect">
+            <a:avLst/>
+          </a:prstGeom>
+          <a:solidFill>
+            <a:srgbClr val="0F2A3D"/>
+          </a:solidFill>
+          <a:ln>
+            <a:noFill/>
+          </a:ln>
+        </p:spPr>
+        <p:style>
+          <a:lnRef idx="1">
+            <a:schemeClr val="accent1"/>
+          </a:lnRef>
+          <a:fillRef idx="3">
+            <a:schemeClr val="accent1"/>
+          </a:fillRef>
+          <a:effectRef idx="2">
+            <a:schemeClr val="accent1"/>
+          </a:effectRef>
+          <a:fontRef idx="minor">
+            <a:schemeClr val="lt1"/>
+          </a:fontRef>
+        </p:style>
+        <p:txBody>
+          <a:bodyPr rtlCol="0" anchor="ctr"/>
+          <a:lstStyle/>
+          <a:p>
+            <a:pPr algn="ctr"/>
+          </a:p>
+        </p:txBody>
+      </p:sp>
+      <p:sp>
+        <p:nvSpPr>
+          <p:cNvPr id="7" name="TextBox 6"/>
+          <p:cNvSpPr txBox="1"/>
+          <p:nvPr/>
+        </p:nvSpPr>
+        <p:spPr>
+          <a:xfrm>
+            <a:off x="365760" y="6601968"/>
+            <a:ext cx="9601200" cy="256032"/>
+          </a:xfrm>
+          <a:prstGeom prst="rect">
+            <a:avLst/>
+          </a:prstGeom>
+          <a:noFill/>
+        </p:spPr>
+        <p:txBody>
+          <a:bodyPr wrap="square">
+            <a:spAutoFit/>
+          </a:bodyPr>
+          <a:lstStyle/>
+          <a:p>
+            <a:pPr algn="l"/>
+            <a:r>
+              <a:rPr sz="1100" b="0">
+                <a:solidFill>
+                  <a:srgbClr val="E7F3EA"/>
+                </a:solidFill>
+                <a:latin typeface="Calibri"/>
+              </a:rPr>
+              <a:t>Kampüs Kırtasiye  ·  TechTarget software testing  ·  Rıdvan Çağlar Mutlu</a:t>
+            </a:r>
+          </a:p>
+        </p:txBody>
+      </p:sp>
+      <p:sp>
+        <p:nvSpPr>
+          <p:cNvPr id="8" name="TextBox 7"/>
+          <p:cNvSpPr txBox="1"/>
+          <p:nvPr/>
+        </p:nvSpPr>
+        <p:spPr>
+          <a:xfrm>
+            <a:off x="10607040" y="6601968"/>
+            <a:ext cx="1280160" cy="256032"/>
+          </a:xfrm>
+          <a:prstGeom prst="rect">
+            <a:avLst/>
+          </a:prstGeom>
+          <a:noFill/>
+        </p:spPr>
+        <p:txBody>
+          <a:bodyPr wrap="square">
+            <a:spAutoFit/>
+          </a:bodyPr>
+          <a:lstStyle/>
+          <a:p>
+            <a:pPr algn="r"/>
+            <a:r>
+              <a:rPr sz="1100" b="1">
+                <a:solidFill>
+                  <a:srgbClr val="0B6E4F"/>
+                </a:solidFill>
+                <a:latin typeface="Calibri"/>
+              </a:rPr>
+              <a:t>02</a:t>
+            </a:r>
+          </a:p>
+        </p:txBody>
+      </p:sp>
+      <p:sp>
+        <p:nvSpPr>
+          <p:cNvPr id="9" name="TextBox 8"/>
+          <p:cNvSpPr txBox="1"/>
+          <p:nvPr/>
+        </p:nvSpPr>
+        <p:spPr>
+          <a:xfrm>
+            <a:off x="457200" y="1234440"/>
+            <a:ext cx="11155680" cy="5029200"/>
+          </a:xfrm>
+          <a:prstGeom prst="rect">
+            <a:avLst/>
+          </a:prstGeom>
+          <a:noFill/>
+        </p:spPr>
+        <p:txBody>
+          <a:bodyPr wrap="square">
+            <a:spAutoFit/>
+          </a:bodyPr>
+          <a:lstStyle/>
+          <a:p>
+            <a:pPr>
+              <a:spcAft>
+                <a:spcPts val="900"/>
+              </a:spcAft>
+            </a:pPr>
+            <a:r>
+              <a:rPr sz="2000" b="0">
+                <a:solidFill>
+                  <a:srgbClr val="12202B"/>
+                </a:solidFill>
+                <a:latin typeface="Calibri"/>
+              </a:rPr>
+              <a:t>▸  Bize ait kaynak kod: PHP, HTML ve CSS (Kampüs Kırtasiye, Kampüs Sepeti değil)</a:t>
+            </a:r>
+          </a:p>
+          <a:p>
+            <a:pPr>
+              <a:spcAft>
+                <a:spcPts val="900"/>
+              </a:spcAft>
+            </a:pPr>
+            <a:r>
+              <a:rPr sz="2000" b="0">
+                <a:solidFill>
+                  <a:srgbClr val="12202B"/>
+                </a:solidFill>
+                <a:latin typeface="Calibri"/>
+              </a:rPr>
+              <a:t>▸  Çalışan site: http://localhost/kampus-kirtasiye/v2/</a:t>
+            </a:r>
+          </a:p>
+          <a:p>
+            <a:pPr>
+              <a:spcAft>
+                <a:spcPts val="900"/>
+              </a:spcAft>
+            </a:pPr>
+            <a:r>
+              <a:rPr sz="2000" b="0">
+                <a:solidFill>
+                  <a:srgbClr val="12202B"/>
+                </a:solidFill>
+                <a:latin typeface="Calibri"/>
+              </a:rPr>
+              <a:t>▸  Test uygulaması: http://localhost/kampus-kirtasiye/test-uygulamasi/</a:t>
+            </a:r>
+          </a:p>
+          <a:p>
+            <a:pPr>
+              <a:spcAft>
+                <a:spcPts val="900"/>
+              </a:spcAft>
+            </a:pPr>
+            <a:r>
+              <a:rPr sz="2000" b="0">
+                <a:solidFill>
+                  <a:srgbClr val="12202B"/>
+                </a:solidFill>
+                <a:latin typeface="Calibri"/>
+              </a:rPr>
+              <a:t>▸  Otomasyon: Playwright grafik arayüzü (PLAYWRIGHT_AC.cmd)</a:t>
+            </a:r>
+          </a:p>
+          <a:p>
+            <a:pPr>
+              <a:spcAft>
+                <a:spcPts val="900"/>
+              </a:spcAft>
+            </a:pPr>
+            <a:r>
+              <a:rPr sz="2000" b="0">
+                <a:solidFill>
+                  <a:srgbClr val="12202B"/>
+                </a:solidFill>
+                <a:latin typeface="Calibri"/>
+              </a:rPr>
+              <a:t>▸  Teslim: site, test kodu, V1/V2 sonucu ve bu sunum</a:t>
+            </a:r>
+          </a:p>
+        </p:txBody>
+      </p:sp>
+    </p:spTree>
+  </p:cSld>
+  <p:clrMapOvr>
+    <a:masterClrMapping/>
+  </p:clrMapOvr>
+</p:sld>
+</file>
+
+<file path=ppt/slides/slide20.xml><?xml version="1.0" encoding="utf-8"?>
+<p:sld xmlns:a="http://schemas.openxmlformats.org/drawingml/2006/main" xmlns:p="http://schemas.openxmlformats.org/presentationml/2006/main" xmlns:r="http://schemas.openxmlformats.org/officeDocument/2006/relationships">
+  <p:cSld>
+    <p:spTree>
+      <p:nvGrpSpPr>
+        <p:cNvPr id="1" name=""/>
+        <p:cNvGrpSpPr/>
+        <p:nvPr/>
+      </p:nvGrpSpPr>
+      <p:grpSpPr/>
+      <p:sp>
+        <p:nvSpPr>
+          <p:cNvPr id="2" name="Rectangle 1"/>
+          <p:cNvSpPr/>
+          <p:nvPr/>
+        </p:nvSpPr>
+        <p:spPr>
+          <a:xfrm>
+            <a:off x="0" y="0"/>
+            <a:ext cx="12191695" cy="6858000"/>
+          </a:xfrm>
+          <a:prstGeom prst="rect">
+            <a:avLst/>
+          </a:prstGeom>
+          <a:solidFill>
+            <a:srgbClr val="EEF3F1"/>
+          </a:solidFill>
+          <a:ln>
+            <a:noFill/>
+          </a:ln>
+        </p:spPr>
+        <p:style>
+          <a:lnRef idx="1">
+            <a:schemeClr val="accent1"/>
+          </a:lnRef>
+          <a:fillRef idx="3">
+            <a:schemeClr val="accent1"/>
+          </a:fillRef>
+          <a:effectRef idx="2">
+            <a:schemeClr val="accent1"/>
+          </a:effectRef>
+          <a:fontRef idx="minor">
+            <a:schemeClr val="lt1"/>
+          </a:fontRef>
+        </p:style>
+        <p:txBody>
+          <a:bodyPr rtlCol="0" anchor="ctr"/>
+          <a:lstStyle/>
+          <a:p>
+            <a:pPr algn="ctr"/>
+          </a:p>
+        </p:txBody>
+      </p:sp>
+      <p:sp>
+        <p:nvSpPr>
+          <p:cNvPr id="3" name="Rectangle 2"/>
+          <p:cNvSpPr/>
+          <p:nvPr/>
+        </p:nvSpPr>
+        <p:spPr>
+          <a:xfrm>
+            <a:off x="0" y="0"/>
+            <a:ext cx="12191695" cy="109728"/>
+          </a:xfrm>
+          <a:prstGeom prst="rect">
+            <a:avLst/>
+          </a:prstGeom>
+          <a:solidFill>
+            <a:srgbClr val="0B6E4F"/>
+          </a:solidFill>
+          <a:ln>
+            <a:noFill/>
+          </a:ln>
+        </p:spPr>
+        <p:style>
+          <a:lnRef idx="1">
+            <a:schemeClr val="accent1"/>
+          </a:lnRef>
+          <a:fillRef idx="3">
+            <a:schemeClr val="accent1"/>
+          </a:fillRef>
+          <a:effectRef idx="2">
+            <a:schemeClr val="accent1"/>
+          </a:effectRef>
+          <a:fontRef idx="minor">
+            <a:schemeClr val="lt1"/>
+          </a:fontRef>
+        </p:style>
+        <p:txBody>
+          <a:bodyPr rtlCol="0" anchor="ctr"/>
+          <a:lstStyle/>
+          <a:p>
+            <a:pPr algn="ctr"/>
+          </a:p>
+        </p:txBody>
+      </p:sp>
+      <p:sp>
+        <p:nvSpPr>
+          <p:cNvPr id="4" name="Rectangle 3"/>
+          <p:cNvSpPr/>
+          <p:nvPr/>
+        </p:nvSpPr>
+        <p:spPr>
+          <a:xfrm>
+            <a:off x="0" y="109728"/>
+            <a:ext cx="12191695" cy="841248"/>
+          </a:xfrm>
+          <a:prstGeom prst="rect">
+            <a:avLst/>
+          </a:prstGeom>
+          <a:solidFill>
+            <a:srgbClr val="0F2A3D"/>
+          </a:solidFill>
+          <a:ln>
+            <a:noFill/>
+          </a:ln>
+        </p:spPr>
+        <p:style>
+          <a:lnRef idx="1">
+            <a:schemeClr val="accent1"/>
+          </a:lnRef>
+          <a:fillRef idx="3">
+            <a:schemeClr val="accent1"/>
+          </a:fillRef>
+          <a:effectRef idx="2">
+            <a:schemeClr val="accent1"/>
+          </a:effectRef>
+          <a:fontRef idx="minor">
+            <a:schemeClr val="lt1"/>
+          </a:fontRef>
+        </p:style>
+        <p:txBody>
+          <a:bodyPr rtlCol="0" anchor="ctr"/>
+          <a:lstStyle/>
+          <a:p>
+            <a:pPr algn="ctr"/>
+          </a:p>
+        </p:txBody>
+      </p:sp>
+      <p:sp>
+        <p:nvSpPr>
+          <p:cNvPr id="5" name="TextBox 4"/>
+          <p:cNvSpPr txBox="1"/>
+          <p:nvPr/>
+        </p:nvSpPr>
+        <p:spPr>
+          <a:xfrm>
+            <a:off x="411480" y="256032"/>
+            <a:ext cx="10972800" cy="548640"/>
+          </a:xfrm>
+          <a:prstGeom prst="rect">
+            <a:avLst/>
+          </a:prstGeom>
+          <a:noFill/>
+        </p:spPr>
+        <p:txBody>
+          <a:bodyPr wrap="square">
+            <a:spAutoFit/>
+          </a:bodyPr>
+          <a:lstStyle/>
+          <a:p>
+            <a:pPr algn="l"/>
+            <a:r>
+              <a:rPr sz="2400" b="1">
+                <a:solidFill>
+                  <a:srgbClr val="FFFFFF"/>
+                </a:solidFill>
+                <a:latin typeface="Calibri"/>
+              </a:rPr>
+              <a:t>V2 ve regresyon sonuçları</a:t>
+            </a:r>
+          </a:p>
+        </p:txBody>
+      </p:sp>
+      <p:sp>
+        <p:nvSpPr>
+          <p:cNvPr id="6" name="Rectangle 5"/>
+          <p:cNvSpPr/>
+          <p:nvPr/>
+        </p:nvSpPr>
+        <p:spPr>
+          <a:xfrm>
+            <a:off x="0" y="6601968"/>
+            <a:ext cx="12191695" cy="256032"/>
+          </a:xfrm>
+          <a:prstGeom prst="rect">
+            <a:avLst/>
+          </a:prstGeom>
+          <a:solidFill>
+            <a:srgbClr val="0F2A3D"/>
+          </a:solidFill>
+          <a:ln>
+            <a:noFill/>
+          </a:ln>
+        </p:spPr>
+        <p:style>
+          <a:lnRef idx="1">
+            <a:schemeClr val="accent1"/>
+          </a:lnRef>
+          <a:fillRef idx="3">
+            <a:schemeClr val="accent1"/>
+          </a:fillRef>
+          <a:effectRef idx="2">
+            <a:schemeClr val="accent1"/>
+          </a:effectRef>
+          <a:fontRef idx="minor">
+            <a:schemeClr val="lt1"/>
+          </a:fontRef>
+        </p:style>
+        <p:txBody>
+          <a:bodyPr rtlCol="0" anchor="ctr"/>
+          <a:lstStyle/>
+          <a:p>
+            <a:pPr algn="ctr"/>
+          </a:p>
+        </p:txBody>
+      </p:sp>
+      <p:sp>
+        <p:nvSpPr>
+          <p:cNvPr id="7" name="TextBox 6"/>
+          <p:cNvSpPr txBox="1"/>
+          <p:nvPr/>
+        </p:nvSpPr>
+        <p:spPr>
+          <a:xfrm>
+            <a:off x="365760" y="6601968"/>
+            <a:ext cx="9601200" cy="256032"/>
+          </a:xfrm>
+          <a:prstGeom prst="rect">
+            <a:avLst/>
+          </a:prstGeom>
+          <a:noFill/>
+        </p:spPr>
+        <p:txBody>
+          <a:bodyPr wrap="square">
+            <a:spAutoFit/>
+          </a:bodyPr>
+          <a:lstStyle/>
+          <a:p>
+            <a:pPr algn="l"/>
+            <a:r>
+              <a:rPr sz="1100" b="0">
+                <a:solidFill>
+                  <a:srgbClr val="E7F3EA"/>
+                </a:solidFill>
+                <a:latin typeface="Calibri"/>
+              </a:rPr>
+              <a:t>Kampüs Kırtasiye  ·  TechTarget software testing  ·  Rıdvan Çağlar Mutlu</a:t>
+            </a:r>
+          </a:p>
+        </p:txBody>
+      </p:sp>
+      <p:sp>
+        <p:nvSpPr>
+          <p:cNvPr id="8" name="TextBox 7"/>
+          <p:cNvSpPr txBox="1"/>
+          <p:nvPr/>
+        </p:nvSpPr>
+        <p:spPr>
+          <a:xfrm>
+            <a:off x="10607040" y="6601968"/>
+            <a:ext cx="1280160" cy="256032"/>
+          </a:xfrm>
+          <a:prstGeom prst="rect">
+            <a:avLst/>
+          </a:prstGeom>
+          <a:noFill/>
+        </p:spPr>
+        <p:txBody>
+          <a:bodyPr wrap="square">
+            <a:spAutoFit/>
+          </a:bodyPr>
+          <a:lstStyle/>
+          <a:p>
+            <a:pPr algn="r"/>
+            <a:r>
+              <a:rPr sz="1100" b="1">
+                <a:solidFill>
+                  <a:srgbClr val="0B6E4F"/>
+                </a:solidFill>
+                <a:latin typeface="Calibri"/>
+              </a:rPr>
+              <a:t>20</a:t>
             </a:r>
           </a:p>
         </p:txBody>
@@ -7720,7 +8375,7 @@
                           </a:solidFill>
                           <a:latin typeface="Calibri"/>
                         </a:rPr>
-                        <a:t>Kaldı</a:t>
+                        <a:t>Başarısız</a:t>
                       </a:r>
                     </a:p>
                   </a:txBody>
@@ -7766,7 +8421,7 @@
                           </a:solidFill>
                           <a:latin typeface="Calibri"/>
                         </a:rPr>
-                        <a:t>V1 dinamik test</a:t>
+                        <a:t>V1 ilk sürüm</a:t>
                       </a:r>
                     </a:p>
                   </a:txBody>
@@ -7856,7 +8511,7 @@
                           </a:solidFill>
                           <a:latin typeface="Calibri"/>
                         </a:rPr>
-                        <a:t>V2 regresyon</a:t>
+                        <a:t>V2 düzeltilmiş sürüm</a:t>
                       </a:r>
                     </a:p>
                   </a:txBody>
@@ -7946,7 +8601,7 @@
                           </a:solidFill>
                           <a:latin typeface="Calibri"/>
                         </a:rPr>
-                        <a:t>Sonlandırma ölçütü</a:t>
+                        <a:t>Playwright UI teyidi</a:t>
                       </a:r>
                     </a:p>
                   </a:txBody>
@@ -7968,7 +8623,7 @@
                           </a:solidFill>
                           <a:latin typeface="Calibri"/>
                         </a:rPr>
-                        <a:t>15/15</a:t>
+                        <a:t>15</a:t>
                       </a:r>
                     </a:p>
                   </a:txBody>
@@ -7990,7 +8645,7 @@
                           </a:solidFill>
                           <a:latin typeface="Calibri"/>
                         </a:rPr>
-                        <a:t>sağlandı</a:t>
+                        <a:t>0</a:t>
                       </a:r>
                     </a:p>
                   </a:txBody>
@@ -8012,7 +8667,7 @@
                           </a:solidFill>
                           <a:latin typeface="Calibri"/>
                         </a:rPr>
-                        <a:t>V2 teslim</a:t>
+                        <a:t>Ayrı koşu</a:t>
                       </a:r>
                     </a:p>
                   </a:txBody>
@@ -8036,7 +8691,7 @@
         <p:spPr>
           <a:xfrm>
             <a:off x="457200" y="4297680"/>
-            <a:ext cx="11247120" cy="1645920"/>
+            <a:ext cx="11247120" cy="1463040"/>
           </a:xfrm>
           <a:prstGeom prst="rect">
             <a:avLst/>
@@ -8057,971 +8712,12 @@
                 </a:solidFill>
                 <a:latin typeface="Calibri"/>
               </a:rPr>
-              <a:t>Süre farkı performans testi değildir. V1, T04’te olmayan seçeneği bekler.
-Regresyonun anlamı: T04 ve T12 kapandı, diğer 13 senaryo bozulmadı.</a:t>
-            </a:r>
-          </a:p>
-        </p:txBody>
-      </p:sp>
-    </p:spTree>
-  </p:cSld>
-  <p:clrMapOvr>
-    <a:masterClrMapping/>
-  </p:clrMapOvr>
-</p:sld>
-</file>
-
-<file path=ppt/slides/slide2.xml><?xml version="1.0" encoding="utf-8"?>
-<p:sld xmlns:a="http://schemas.openxmlformats.org/drawingml/2006/main" xmlns:p="http://schemas.openxmlformats.org/presentationml/2006/main" xmlns:r="http://schemas.openxmlformats.org/officeDocument/2006/relationships">
-  <p:cSld>
-    <p:spTree>
-      <p:nvGrpSpPr>
-        <p:cNvPr id="1" name=""/>
-        <p:cNvGrpSpPr/>
-        <p:nvPr/>
-      </p:nvGrpSpPr>
-      <p:grpSpPr/>
-      <p:sp>
-        <p:nvSpPr>
-          <p:cNvPr id="2" name="Rectangle 1"/>
-          <p:cNvSpPr/>
-          <p:nvPr/>
-        </p:nvSpPr>
-        <p:spPr>
-          <a:xfrm>
-            <a:off x="0" y="0"/>
-            <a:ext cx="12191695" cy="6858000"/>
-          </a:xfrm>
-          <a:prstGeom prst="rect">
-            <a:avLst/>
-          </a:prstGeom>
-          <a:solidFill>
-            <a:srgbClr val="EEF3F1"/>
-          </a:solidFill>
-          <a:ln>
-            <a:noFill/>
-          </a:ln>
-        </p:spPr>
-        <p:style>
-          <a:lnRef idx="1">
-            <a:schemeClr val="accent1"/>
-          </a:lnRef>
-          <a:fillRef idx="3">
-            <a:schemeClr val="accent1"/>
-          </a:fillRef>
-          <a:effectRef idx="2">
-            <a:schemeClr val="accent1"/>
-          </a:effectRef>
-          <a:fontRef idx="minor">
-            <a:schemeClr val="lt1"/>
-          </a:fontRef>
-        </p:style>
-        <p:txBody>
-          <a:bodyPr rtlCol="0" anchor="ctr"/>
-          <a:lstStyle/>
-          <a:p>
-            <a:pPr algn="ctr"/>
-          </a:p>
-        </p:txBody>
-      </p:sp>
-      <p:sp>
-        <p:nvSpPr>
-          <p:cNvPr id="3" name="Rectangle 2"/>
-          <p:cNvSpPr/>
-          <p:nvPr/>
-        </p:nvSpPr>
-        <p:spPr>
-          <a:xfrm>
-            <a:off x="0" y="0"/>
-            <a:ext cx="12191695" cy="109728"/>
-          </a:xfrm>
-          <a:prstGeom prst="rect">
-            <a:avLst/>
-          </a:prstGeom>
-          <a:solidFill>
-            <a:srgbClr val="0B6E4F"/>
-          </a:solidFill>
-          <a:ln>
-            <a:noFill/>
-          </a:ln>
-        </p:spPr>
-        <p:style>
-          <a:lnRef idx="1">
-            <a:schemeClr val="accent1"/>
-          </a:lnRef>
-          <a:fillRef idx="3">
-            <a:schemeClr val="accent1"/>
-          </a:fillRef>
-          <a:effectRef idx="2">
-            <a:schemeClr val="accent1"/>
-          </a:effectRef>
-          <a:fontRef idx="minor">
-            <a:schemeClr val="lt1"/>
-          </a:fontRef>
-        </p:style>
-        <p:txBody>
-          <a:bodyPr rtlCol="0" anchor="ctr"/>
-          <a:lstStyle/>
-          <a:p>
-            <a:pPr algn="ctr"/>
-          </a:p>
-        </p:txBody>
-      </p:sp>
-      <p:sp>
-        <p:nvSpPr>
-          <p:cNvPr id="4" name="Rectangle 3"/>
-          <p:cNvSpPr/>
-          <p:nvPr/>
-        </p:nvSpPr>
-        <p:spPr>
-          <a:xfrm>
-            <a:off x="0" y="109728"/>
-            <a:ext cx="12191695" cy="841248"/>
-          </a:xfrm>
-          <a:prstGeom prst="rect">
-            <a:avLst/>
-          </a:prstGeom>
-          <a:solidFill>
-            <a:srgbClr val="0F2A3D"/>
-          </a:solidFill>
-          <a:ln>
-            <a:noFill/>
-          </a:ln>
-        </p:spPr>
-        <p:style>
-          <a:lnRef idx="1">
-            <a:schemeClr val="accent1"/>
-          </a:lnRef>
-          <a:fillRef idx="3">
-            <a:schemeClr val="accent1"/>
-          </a:fillRef>
-          <a:effectRef idx="2">
-            <a:schemeClr val="accent1"/>
-          </a:effectRef>
-          <a:fontRef idx="minor">
-            <a:schemeClr val="lt1"/>
-          </a:fontRef>
-        </p:style>
-        <p:txBody>
-          <a:bodyPr rtlCol="0" anchor="ctr"/>
-          <a:lstStyle/>
-          <a:p>
-            <a:pPr algn="ctr"/>
-          </a:p>
-        </p:txBody>
-      </p:sp>
-      <p:sp>
-        <p:nvSpPr>
-          <p:cNvPr id="5" name="TextBox 4"/>
-          <p:cNvSpPr txBox="1"/>
-          <p:nvPr/>
-        </p:nvSpPr>
-        <p:spPr>
-          <a:xfrm>
-            <a:off x="411480" y="256032"/>
-            <a:ext cx="10972800" cy="548640"/>
-          </a:xfrm>
-          <a:prstGeom prst="rect">
-            <a:avLst/>
-          </a:prstGeom>
-          <a:noFill/>
-        </p:spPr>
-        <p:txBody>
-          <a:bodyPr wrap="square">
-            <a:spAutoFit/>
-          </a:bodyPr>
-          <a:lstStyle/>
-          <a:p>
-            <a:pPr algn="l"/>
-            <a:r>
-              <a:rPr sz="2400" b="1">
-                <a:solidFill>
-                  <a:srgbClr val="FFFFFF"/>
-                </a:solidFill>
-                <a:latin typeface="Calibri"/>
-              </a:rPr>
-              <a:t>Teslim neyden oluşur?</a:t>
-            </a:r>
-          </a:p>
-        </p:txBody>
-      </p:sp>
-      <p:sp>
-        <p:nvSpPr>
-          <p:cNvPr id="6" name="Rectangle 5"/>
-          <p:cNvSpPr/>
-          <p:nvPr/>
-        </p:nvSpPr>
-        <p:spPr>
-          <a:xfrm>
-            <a:off x="0" y="6601968"/>
-            <a:ext cx="12191695" cy="256032"/>
-          </a:xfrm>
-          <a:prstGeom prst="rect">
-            <a:avLst/>
-          </a:prstGeom>
-          <a:solidFill>
-            <a:srgbClr val="0F2A3D"/>
-          </a:solidFill>
-          <a:ln>
-            <a:noFill/>
-          </a:ln>
-        </p:spPr>
-        <p:style>
-          <a:lnRef idx="1">
-            <a:schemeClr val="accent1"/>
-          </a:lnRef>
-          <a:fillRef idx="3">
-            <a:schemeClr val="accent1"/>
-          </a:fillRef>
-          <a:effectRef idx="2">
-            <a:schemeClr val="accent1"/>
-          </a:effectRef>
-          <a:fontRef idx="minor">
-            <a:schemeClr val="lt1"/>
-          </a:fontRef>
-        </p:style>
-        <p:txBody>
-          <a:bodyPr rtlCol="0" anchor="ctr"/>
-          <a:lstStyle/>
-          <a:p>
-            <a:pPr algn="ctr"/>
-          </a:p>
-        </p:txBody>
-      </p:sp>
-      <p:sp>
-        <p:nvSpPr>
-          <p:cNvPr id="7" name="TextBox 6"/>
-          <p:cNvSpPr txBox="1"/>
-          <p:nvPr/>
-        </p:nvSpPr>
-        <p:spPr>
-          <a:xfrm>
-            <a:off x="365760" y="6601968"/>
-            <a:ext cx="9601200" cy="256032"/>
-          </a:xfrm>
-          <a:prstGeom prst="rect">
-            <a:avLst/>
-          </a:prstGeom>
-          <a:noFill/>
-        </p:spPr>
-        <p:txBody>
-          <a:bodyPr wrap="square">
-            <a:spAutoFit/>
-          </a:bodyPr>
-          <a:lstStyle/>
-          <a:p>
-            <a:pPr algn="l"/>
-            <a:r>
-              <a:rPr sz="1100" b="0">
-                <a:solidFill>
-                  <a:srgbClr val="E7F3EA"/>
-                </a:solidFill>
-                <a:latin typeface="Calibri"/>
-              </a:rPr>
-              <a:t>Kampüs Kırtasiye  ·  İTÜ BİDB + TechTarget  ·  Rıdvan Çağlar Mutlu</a:t>
-            </a:r>
-          </a:p>
-        </p:txBody>
-      </p:sp>
-      <p:sp>
-        <p:nvSpPr>
-          <p:cNvPr id="8" name="TextBox 7"/>
-          <p:cNvSpPr txBox="1"/>
-          <p:nvPr/>
-        </p:nvSpPr>
-        <p:spPr>
-          <a:xfrm>
-            <a:off x="10607040" y="6601968"/>
-            <a:ext cx="1280160" cy="256032"/>
-          </a:xfrm>
-          <a:prstGeom prst="rect">
-            <a:avLst/>
-          </a:prstGeom>
-          <a:noFill/>
-        </p:spPr>
-        <p:txBody>
-          <a:bodyPr wrap="square">
-            <a:spAutoFit/>
-          </a:bodyPr>
-          <a:lstStyle/>
-          <a:p>
-            <a:pPr algn="r"/>
-            <a:r>
-              <a:rPr sz="1100" b="1">
-                <a:solidFill>
-                  <a:srgbClr val="0B6E4F"/>
-                </a:solidFill>
-                <a:latin typeface="Calibri"/>
-              </a:rPr>
-              <a:t>02</a:t>
-            </a:r>
-          </a:p>
-        </p:txBody>
-      </p:sp>
-      <p:sp>
-        <p:nvSpPr>
-          <p:cNvPr id="9" name="Rounded Rectangle 8"/>
-          <p:cNvSpPr/>
-          <p:nvPr/>
-        </p:nvSpPr>
-        <p:spPr>
-          <a:xfrm>
-            <a:off x="457200" y="1188720"/>
-            <a:ext cx="11247120" cy="1463040"/>
-          </a:xfrm>
-          <a:prstGeom prst="roundRect">
-            <a:avLst>
-              <a:gd name="adj" fmla="val 8000"/>
-            </a:avLst>
-          </a:prstGeom>
-          <a:solidFill>
-            <a:srgbClr val="FFFFFF"/>
-          </a:solidFill>
-          <a:ln>
-            <a:noFill/>
-          </a:ln>
-        </p:spPr>
-        <p:style>
-          <a:lnRef idx="1">
-            <a:schemeClr val="accent1"/>
-          </a:lnRef>
-          <a:fillRef idx="3">
-            <a:schemeClr val="accent1"/>
-          </a:fillRef>
-          <a:effectRef idx="2">
-            <a:schemeClr val="accent1"/>
-          </a:effectRef>
-          <a:fontRef idx="minor">
-            <a:schemeClr val="lt1"/>
-          </a:fontRef>
-        </p:style>
-        <p:txBody>
-          <a:bodyPr rtlCol="0" anchor="ctr"/>
-          <a:lstStyle/>
-          <a:p>
-            <a:pPr algn="ctr"/>
-          </a:p>
-        </p:txBody>
-      </p:sp>
-      <p:sp>
-        <p:nvSpPr>
-          <p:cNvPr id="10" name="TextBox 9"/>
-          <p:cNvSpPr txBox="1"/>
-          <p:nvPr/>
-        </p:nvSpPr>
-        <p:spPr>
-          <a:xfrm>
-            <a:off x="685800" y="1371600"/>
-            <a:ext cx="10789920" cy="411480"/>
-          </a:xfrm>
-          <a:prstGeom prst="rect">
-            <a:avLst/>
-          </a:prstGeom>
-          <a:noFill/>
-        </p:spPr>
-        <p:txBody>
-          <a:bodyPr wrap="square">
-            <a:spAutoFit/>
-          </a:bodyPr>
-          <a:lstStyle/>
-          <a:p>
-            <a:pPr algn="l"/>
-            <a:r>
-              <a:rPr sz="2200" b="1">
-                <a:solidFill>
-                  <a:srgbClr val="0F2A3D"/>
-                </a:solidFill>
-                <a:latin typeface="Calibri"/>
-              </a:rPr>
-              <a:t>1. Web sitesi</a:t>
-            </a:r>
-          </a:p>
-        </p:txBody>
-      </p:sp>
-      <p:sp>
-        <p:nvSpPr>
-          <p:cNvPr id="11" name="TextBox 10"/>
-          <p:cNvSpPr txBox="1"/>
-          <p:nvPr/>
-        </p:nvSpPr>
-        <p:spPr>
-          <a:xfrm>
-            <a:off x="685800" y="1828800"/>
-            <a:ext cx="10789920" cy="640080"/>
-          </a:xfrm>
-          <a:prstGeom prst="rect">
-            <a:avLst/>
-          </a:prstGeom>
-          <a:noFill/>
-        </p:spPr>
-        <p:txBody>
-          <a:bodyPr wrap="square">
-            <a:spAutoFit/>
-          </a:bodyPr>
-          <a:lstStyle/>
-          <a:p>
-            <a:pPr algn="l"/>
-            <a:r>
-              <a:rPr sz="1600" b="0">
-                <a:solidFill>
-                  <a:srgbClr val="4D5C58"/>
-                </a:solidFill>
-                <a:latin typeface="Calibri"/>
-              </a:rPr>
-              <a:t>Kampüs Kırtasiye: giriş, 6 ürün, sepet, 10 haneli telefon, demo sipariş. V2 teslim, V1 hata kanıtı.</a:t>
-            </a:r>
-          </a:p>
-        </p:txBody>
-      </p:sp>
-      <p:sp>
-        <p:nvSpPr>
-          <p:cNvPr id="12" name="Rounded Rectangle 11"/>
-          <p:cNvSpPr/>
-          <p:nvPr/>
-        </p:nvSpPr>
-        <p:spPr>
-          <a:xfrm>
-            <a:off x="457200" y="2834640"/>
-            <a:ext cx="11247120" cy="1463040"/>
-          </a:xfrm>
-          <a:prstGeom prst="roundRect">
-            <a:avLst>
-              <a:gd name="adj" fmla="val 8000"/>
-            </a:avLst>
-          </a:prstGeom>
-          <a:solidFill>
-            <a:srgbClr val="FFFFFF"/>
-          </a:solidFill>
-          <a:ln>
-            <a:noFill/>
-          </a:ln>
-        </p:spPr>
-        <p:style>
-          <a:lnRef idx="1">
-            <a:schemeClr val="accent1"/>
-          </a:lnRef>
-          <a:fillRef idx="3">
-            <a:schemeClr val="accent1"/>
-          </a:fillRef>
-          <a:effectRef idx="2">
-            <a:schemeClr val="accent1"/>
-          </a:effectRef>
-          <a:fontRef idx="minor">
-            <a:schemeClr val="lt1"/>
-          </a:fontRef>
-        </p:style>
-        <p:txBody>
-          <a:bodyPr rtlCol="0" anchor="ctr"/>
-          <a:lstStyle/>
-          <a:p>
-            <a:pPr algn="ctr"/>
-          </a:p>
-        </p:txBody>
-      </p:sp>
-      <p:sp>
-        <p:nvSpPr>
-          <p:cNvPr id="13" name="TextBox 12"/>
-          <p:cNvSpPr txBox="1"/>
-          <p:nvPr/>
-        </p:nvSpPr>
-        <p:spPr>
-          <a:xfrm>
-            <a:off x="685800" y="3017520"/>
-            <a:ext cx="10789920" cy="411480"/>
-          </a:xfrm>
-          <a:prstGeom prst="rect">
-            <a:avLst/>
-          </a:prstGeom>
-          <a:noFill/>
-        </p:spPr>
-        <p:txBody>
-          <a:bodyPr wrap="square">
-            <a:spAutoFit/>
-          </a:bodyPr>
-          <a:lstStyle/>
-          <a:p>
-            <a:pPr algn="l"/>
-            <a:r>
-              <a:rPr sz="2200" b="1">
-                <a:solidFill>
-                  <a:srgbClr val="0F2A3D"/>
-                </a:solidFill>
-                <a:latin typeface="Calibri"/>
-              </a:rPr>
-              <a:t>2. Test uygulaması</a:t>
-            </a:r>
-          </a:p>
-        </p:txBody>
-      </p:sp>
-      <p:sp>
-        <p:nvSpPr>
-          <p:cNvPr id="14" name="TextBox 13"/>
-          <p:cNvSpPr txBox="1"/>
-          <p:nvPr/>
-        </p:nvSpPr>
-        <p:spPr>
-          <a:xfrm>
-            <a:off x="685800" y="3474720"/>
-            <a:ext cx="10789920" cy="640080"/>
-          </a:xfrm>
-          <a:prstGeom prst="rect">
-            <a:avLst/>
-          </a:prstGeom>
-          <a:noFill/>
-        </p:spPr>
-        <p:txBody>
-          <a:bodyPr wrap="square">
-            <a:spAutoFit/>
-          </a:bodyPr>
-          <a:lstStyle/>
-          <a:p>
-            <a:pPr algn="l"/>
-            <a:r>
-              <a:rPr sz="1600" b="0">
-                <a:solidFill>
-                  <a:srgbClr val="4D5C58"/>
-                </a:solidFill>
-                <a:latin typeface="Calibri"/>
-              </a:rPr>
-              <a:t>Hazırlık, 15 senaryo, V1/V2 sonuç, Playwright otomasyonu. Siteyi tarayıcıdan dener.</a:t>
-            </a:r>
-          </a:p>
-        </p:txBody>
-      </p:sp>
-      <p:sp>
-        <p:nvSpPr>
-          <p:cNvPr id="15" name="Rounded Rectangle 14"/>
-          <p:cNvSpPr/>
-          <p:nvPr/>
-        </p:nvSpPr>
-        <p:spPr>
-          <a:xfrm>
-            <a:off x="457200" y="4480560"/>
-            <a:ext cx="11247120" cy="1463040"/>
-          </a:xfrm>
-          <a:prstGeom prst="roundRect">
-            <a:avLst>
-              <a:gd name="adj" fmla="val 8000"/>
-            </a:avLst>
-          </a:prstGeom>
-          <a:solidFill>
-            <a:srgbClr val="FFFFFF"/>
-          </a:solidFill>
-          <a:ln>
-            <a:noFill/>
-          </a:ln>
-        </p:spPr>
-        <p:style>
-          <a:lnRef idx="1">
-            <a:schemeClr val="accent1"/>
-          </a:lnRef>
-          <a:fillRef idx="3">
-            <a:schemeClr val="accent1"/>
-          </a:fillRef>
-          <a:effectRef idx="2">
-            <a:schemeClr val="accent1"/>
-          </a:effectRef>
-          <a:fontRef idx="minor">
-            <a:schemeClr val="lt1"/>
-          </a:fontRef>
-        </p:style>
-        <p:txBody>
-          <a:bodyPr rtlCol="0" anchor="ctr"/>
-          <a:lstStyle/>
-          <a:p>
-            <a:pPr algn="ctr"/>
-          </a:p>
-        </p:txBody>
-      </p:sp>
-      <p:sp>
-        <p:nvSpPr>
-          <p:cNvPr id="16" name="TextBox 15"/>
-          <p:cNvSpPr txBox="1"/>
-          <p:nvPr/>
-        </p:nvSpPr>
-        <p:spPr>
-          <a:xfrm>
-            <a:off x="685800" y="4663440"/>
-            <a:ext cx="10789920" cy="411480"/>
-          </a:xfrm>
-          <a:prstGeom prst="rect">
-            <a:avLst/>
-          </a:prstGeom>
-          <a:noFill/>
-        </p:spPr>
-        <p:txBody>
-          <a:bodyPr wrap="square">
-            <a:spAutoFit/>
-          </a:bodyPr>
-          <a:lstStyle/>
-          <a:p>
-            <a:pPr algn="l"/>
-            <a:r>
-              <a:rPr sz="2200" b="1">
-                <a:solidFill>
-                  <a:srgbClr val="0F2A3D"/>
-                </a:solidFill>
-                <a:latin typeface="Calibri"/>
-              </a:rPr>
-              <a:t>3. Bu sunum</a:t>
-            </a:r>
-          </a:p>
-        </p:txBody>
-      </p:sp>
-      <p:sp>
-        <p:nvSpPr>
-          <p:cNvPr id="17" name="TextBox 16"/>
-          <p:cNvSpPr txBox="1"/>
-          <p:nvPr/>
-        </p:nvSpPr>
-        <p:spPr>
-          <a:xfrm>
-            <a:off x="685800" y="5120640"/>
-            <a:ext cx="10789920" cy="640080"/>
-          </a:xfrm>
-          <a:prstGeom prst="rect">
-            <a:avLst/>
-          </a:prstGeom>
-          <a:noFill/>
-        </p:spPr>
-        <p:txBody>
-          <a:bodyPr wrap="square">
-            <a:spAutoFit/>
-          </a:bodyPr>
-          <a:lstStyle/>
-          <a:p>
-            <a:pPr algn="l"/>
-            <a:r>
-              <a:rPr sz="1600" b="0">
-                <a:solidFill>
-                  <a:srgbClr val="4D5C58"/>
-                </a:solidFill>
-                <a:latin typeface="Calibri"/>
-              </a:rPr>
-              <a:t>İTÜ sürecini (hazırlık → dinamik test → sonlandırma) kendi sitemize bağlar.</a:t>
-            </a:r>
-          </a:p>
-        </p:txBody>
-      </p:sp>
-    </p:spTree>
-  </p:cSld>
-  <p:clrMapOvr>
-    <a:masterClrMapping/>
-  </p:clrMapOvr>
-</p:sld>
-</file>
-
-<file path=ppt/slides/slide20.xml><?xml version="1.0" encoding="utf-8"?>
-<p:sld xmlns:a="http://schemas.openxmlformats.org/drawingml/2006/main" xmlns:p="http://schemas.openxmlformats.org/presentationml/2006/main" xmlns:r="http://schemas.openxmlformats.org/officeDocument/2006/relationships">
-  <p:cSld>
-    <p:spTree>
-      <p:nvGrpSpPr>
-        <p:cNvPr id="1" name=""/>
-        <p:cNvGrpSpPr/>
-        <p:nvPr/>
-      </p:nvGrpSpPr>
-      <p:grpSpPr/>
-      <p:sp>
-        <p:nvSpPr>
-          <p:cNvPr id="2" name="Rectangle 1"/>
-          <p:cNvSpPr/>
-          <p:nvPr/>
-        </p:nvSpPr>
-        <p:spPr>
-          <a:xfrm>
-            <a:off x="0" y="0"/>
-            <a:ext cx="12191695" cy="6858000"/>
-          </a:xfrm>
-          <a:prstGeom prst="rect">
-            <a:avLst/>
-          </a:prstGeom>
-          <a:solidFill>
-            <a:srgbClr val="EEF3F1"/>
-          </a:solidFill>
-          <a:ln>
-            <a:noFill/>
-          </a:ln>
-        </p:spPr>
-        <p:style>
-          <a:lnRef idx="1">
-            <a:schemeClr val="accent1"/>
-          </a:lnRef>
-          <a:fillRef idx="3">
-            <a:schemeClr val="accent1"/>
-          </a:fillRef>
-          <a:effectRef idx="2">
-            <a:schemeClr val="accent1"/>
-          </a:effectRef>
-          <a:fontRef idx="minor">
-            <a:schemeClr val="lt1"/>
-          </a:fontRef>
-        </p:style>
-        <p:txBody>
-          <a:bodyPr rtlCol="0" anchor="ctr"/>
-          <a:lstStyle/>
-          <a:p>
-            <a:pPr algn="ctr"/>
-          </a:p>
-        </p:txBody>
-      </p:sp>
-      <p:sp>
-        <p:nvSpPr>
-          <p:cNvPr id="3" name="Rectangle 2"/>
-          <p:cNvSpPr/>
-          <p:nvPr/>
-        </p:nvSpPr>
-        <p:spPr>
-          <a:xfrm>
-            <a:off x="0" y="0"/>
-            <a:ext cx="12191695" cy="109728"/>
-          </a:xfrm>
-          <a:prstGeom prst="rect">
-            <a:avLst/>
-          </a:prstGeom>
-          <a:solidFill>
-            <a:srgbClr val="0B6E4F"/>
-          </a:solidFill>
-          <a:ln>
-            <a:noFill/>
-          </a:ln>
-        </p:spPr>
-        <p:style>
-          <a:lnRef idx="1">
-            <a:schemeClr val="accent1"/>
-          </a:lnRef>
-          <a:fillRef idx="3">
-            <a:schemeClr val="accent1"/>
-          </a:fillRef>
-          <a:effectRef idx="2">
-            <a:schemeClr val="accent1"/>
-          </a:effectRef>
-          <a:fontRef idx="minor">
-            <a:schemeClr val="lt1"/>
-          </a:fontRef>
-        </p:style>
-        <p:txBody>
-          <a:bodyPr rtlCol="0" anchor="ctr"/>
-          <a:lstStyle/>
-          <a:p>
-            <a:pPr algn="ctr"/>
-          </a:p>
-        </p:txBody>
-      </p:sp>
-      <p:sp>
-        <p:nvSpPr>
-          <p:cNvPr id="4" name="Rectangle 3"/>
-          <p:cNvSpPr/>
-          <p:nvPr/>
-        </p:nvSpPr>
-        <p:spPr>
-          <a:xfrm>
-            <a:off x="0" y="109728"/>
-            <a:ext cx="12191695" cy="841248"/>
-          </a:xfrm>
-          <a:prstGeom prst="rect">
-            <a:avLst/>
-          </a:prstGeom>
-          <a:solidFill>
-            <a:srgbClr val="0F2A3D"/>
-          </a:solidFill>
-          <a:ln>
-            <a:noFill/>
-          </a:ln>
-        </p:spPr>
-        <p:style>
-          <a:lnRef idx="1">
-            <a:schemeClr val="accent1"/>
-          </a:lnRef>
-          <a:fillRef idx="3">
-            <a:schemeClr val="accent1"/>
-          </a:fillRef>
-          <a:effectRef idx="2">
-            <a:schemeClr val="accent1"/>
-          </a:effectRef>
-          <a:fontRef idx="minor">
-            <a:schemeClr val="lt1"/>
-          </a:fontRef>
-        </p:style>
-        <p:txBody>
-          <a:bodyPr rtlCol="0" anchor="ctr"/>
-          <a:lstStyle/>
-          <a:p>
-            <a:pPr algn="ctr"/>
-          </a:p>
-        </p:txBody>
-      </p:sp>
-      <p:sp>
-        <p:nvSpPr>
-          <p:cNvPr id="5" name="TextBox 4"/>
-          <p:cNvSpPr txBox="1"/>
-          <p:nvPr/>
-        </p:nvSpPr>
-        <p:spPr>
-          <a:xfrm>
-            <a:off x="411480" y="256032"/>
-            <a:ext cx="10972800" cy="548640"/>
-          </a:xfrm>
-          <a:prstGeom prst="rect">
-            <a:avLst/>
-          </a:prstGeom>
-          <a:noFill/>
-        </p:spPr>
-        <p:txBody>
-          <a:bodyPr wrap="square">
-            <a:spAutoFit/>
-          </a:bodyPr>
-          <a:lstStyle/>
-          <a:p>
-            <a:pPr algn="l"/>
-            <a:r>
-              <a:rPr sz="2400" b="1">
-                <a:solidFill>
-                  <a:srgbClr val="FFFFFF"/>
-                </a:solidFill>
-                <a:latin typeface="Calibri"/>
-              </a:rPr>
-              <a:t>Test uygulamasındaki sonuç ekranı</a:t>
-            </a:r>
-          </a:p>
-        </p:txBody>
-      </p:sp>
-      <p:sp>
-        <p:nvSpPr>
-          <p:cNvPr id="6" name="Rectangle 5"/>
-          <p:cNvSpPr/>
-          <p:nvPr/>
-        </p:nvSpPr>
-        <p:spPr>
-          <a:xfrm>
-            <a:off x="0" y="6601968"/>
-            <a:ext cx="12191695" cy="256032"/>
-          </a:xfrm>
-          <a:prstGeom prst="rect">
-            <a:avLst/>
-          </a:prstGeom>
-          <a:solidFill>
-            <a:srgbClr val="0F2A3D"/>
-          </a:solidFill>
-          <a:ln>
-            <a:noFill/>
-          </a:ln>
-        </p:spPr>
-        <p:style>
-          <a:lnRef idx="1">
-            <a:schemeClr val="accent1"/>
-          </a:lnRef>
-          <a:fillRef idx="3">
-            <a:schemeClr val="accent1"/>
-          </a:fillRef>
-          <a:effectRef idx="2">
-            <a:schemeClr val="accent1"/>
-          </a:effectRef>
-          <a:fontRef idx="minor">
-            <a:schemeClr val="lt1"/>
-          </a:fontRef>
-        </p:style>
-        <p:txBody>
-          <a:bodyPr rtlCol="0" anchor="ctr"/>
-          <a:lstStyle/>
-          <a:p>
-            <a:pPr algn="ctr"/>
-          </a:p>
-        </p:txBody>
-      </p:sp>
-      <p:sp>
-        <p:nvSpPr>
-          <p:cNvPr id="7" name="TextBox 6"/>
-          <p:cNvSpPr txBox="1"/>
-          <p:nvPr/>
-        </p:nvSpPr>
-        <p:spPr>
-          <a:xfrm>
-            <a:off x="365760" y="6601968"/>
-            <a:ext cx="9601200" cy="256032"/>
-          </a:xfrm>
-          <a:prstGeom prst="rect">
-            <a:avLst/>
-          </a:prstGeom>
-          <a:noFill/>
-        </p:spPr>
-        <p:txBody>
-          <a:bodyPr wrap="square">
-            <a:spAutoFit/>
-          </a:bodyPr>
-          <a:lstStyle/>
-          <a:p>
-            <a:pPr algn="l"/>
-            <a:r>
-              <a:rPr sz="1100" b="0">
-                <a:solidFill>
-                  <a:srgbClr val="E7F3EA"/>
-                </a:solidFill>
-                <a:latin typeface="Calibri"/>
-              </a:rPr>
-              <a:t>Kampüs Kırtasiye  ·  İTÜ BİDB + TechTarget  ·  Rıdvan Çağlar Mutlu</a:t>
-            </a:r>
-          </a:p>
-        </p:txBody>
-      </p:sp>
-      <p:sp>
-        <p:nvSpPr>
-          <p:cNvPr id="8" name="TextBox 7"/>
-          <p:cNvSpPr txBox="1"/>
-          <p:nvPr/>
-        </p:nvSpPr>
-        <p:spPr>
-          <a:xfrm>
-            <a:off x="10607040" y="6601968"/>
-            <a:ext cx="1280160" cy="256032"/>
-          </a:xfrm>
-          <a:prstGeom prst="rect">
-            <a:avLst/>
-          </a:prstGeom>
-          <a:noFill/>
-        </p:spPr>
-        <p:txBody>
-          <a:bodyPr wrap="square">
-            <a:spAutoFit/>
-          </a:bodyPr>
-          <a:lstStyle/>
-          <a:p>
-            <a:pPr algn="r"/>
-            <a:r>
-              <a:rPr sz="1100" b="1">
-                <a:solidFill>
-                  <a:srgbClr val="0B6E4F"/>
-                </a:solidFill>
-                <a:latin typeface="Calibri"/>
-              </a:rPr>
-              <a:t>20</a:t>
-            </a:r>
-          </a:p>
-        </p:txBody>
-      </p:sp>
-      <p:pic>
-        <p:nvPicPr>
-          <p:cNvPr id="9" name="Picture 8" descr="test-sonuc.png"/>
-          <p:cNvPicPr>
-            <a:picLocks noChangeAspect="1"/>
-          </p:cNvPicPr>
-          <p:nvPr/>
-        </p:nvPicPr>
-        <p:blipFill>
-          <a:blip r:embed="rId2"/>
-          <a:stretch>
-            <a:fillRect/>
-          </a:stretch>
-        </p:blipFill>
-        <p:spPr>
-          <a:xfrm>
-            <a:off x="320040" y="1051560"/>
-            <a:ext cx="11521440" cy="5303520"/>
-          </a:xfrm>
-          <a:prstGeom prst="rect">
-            <a:avLst/>
-          </a:prstGeom>
-        </p:spPr>
-      </p:pic>
+              <a:t>TechTarget: regresyon atlanmamalı. Süre farkı performans testi değildir;
+V1 hata bekleme süresi içerir.</a:t>
+            </a:r>
+          </a:p>
+        </p:txBody>
+      </p:sp>
     </p:spTree>
   </p:cSld>
   <p:clrMapOvr>
@@ -9199,7 +8895,7 @@
                 </a:solidFill>
                 <a:latin typeface="Calibri"/>
               </a:rPr>
-              <a:t>Derste canlı sıra</a:t>
+              <a:t>Test uygulamasındaki sonuç kanıtı</a:t>
             </a:r>
           </a:p>
         </p:txBody>
@@ -9277,7 +8973,7 @@
                 </a:solidFill>
                 <a:latin typeface="Calibri"/>
               </a:rPr>
-              <a:t>Kampüs Kırtasiye  ·  İTÜ BİDB + TechTarget  ·  Rıdvan Çağlar Mutlu</a:t>
+              <a:t>Kampüs Kırtasiye  ·  TechTarget software testing  ·  Rıdvan Çağlar Mutlu</a:t>
             </a:r>
           </a:p>
         </p:txBody>
@@ -9317,326 +9013,54 @@
           </a:p>
         </p:txBody>
       </p:sp>
-      <p:sp>
-        <p:nvSpPr>
-          <p:cNvPr id="9" name="Rounded Rectangle 8"/>
-          <p:cNvSpPr/>
-          <p:nvPr/>
-        </p:nvSpPr>
-        <p:spPr>
-          <a:xfrm>
-            <a:off x="457200" y="1234440"/>
-            <a:ext cx="11247120" cy="1005840"/>
-          </a:xfrm>
-          <a:prstGeom prst="roundRect">
-            <a:avLst>
-              <a:gd name="adj" fmla="val 8000"/>
-            </a:avLst>
-          </a:prstGeom>
-          <a:solidFill>
-            <a:srgbClr val="FFFFFF"/>
-          </a:solidFill>
-          <a:ln>
-            <a:noFill/>
-          </a:ln>
-        </p:spPr>
-        <p:style>
-          <a:lnRef idx="1">
-            <a:schemeClr val="accent1"/>
-          </a:lnRef>
-          <a:fillRef idx="3">
-            <a:schemeClr val="accent1"/>
-          </a:fillRef>
-          <a:effectRef idx="2">
-            <a:schemeClr val="accent1"/>
-          </a:effectRef>
-          <a:fontRef idx="minor">
-            <a:schemeClr val="lt1"/>
-          </a:fontRef>
-        </p:style>
-        <p:txBody>
-          <a:bodyPr rtlCol="0" anchor="ctr"/>
-          <a:lstStyle/>
-          <a:p>
-            <a:pPr algn="ctr"/>
-          </a:p>
-        </p:txBody>
-      </p:sp>
-      <p:sp>
-        <p:nvSpPr>
-          <p:cNvPr id="10" name="TextBox 9"/>
-          <p:cNvSpPr txBox="1"/>
-          <p:nvPr/>
-        </p:nvSpPr>
-        <p:spPr>
-          <a:xfrm>
-            <a:off x="685800" y="1417320"/>
-            <a:ext cx="10789920" cy="640080"/>
-          </a:xfrm>
-          <a:prstGeom prst="rect">
-            <a:avLst/>
-          </a:prstGeom>
-          <a:noFill/>
-        </p:spPr>
-        <p:txBody>
-          <a:bodyPr wrap="square">
-            <a:spAutoFit/>
-          </a:bodyPr>
-          <a:lstStyle/>
-          <a:p>
-            <a:pPr algn="l"/>
-            <a:r>
-              <a:rPr sz="2000" b="0">
-                <a:solidFill>
-                  <a:srgbClr val="12202B"/>
-                </a:solidFill>
-                <a:latin typeface="Calibri"/>
-              </a:rPr>
-              <a:t>1. http://localhost/kampus-kirtasiye/  → iki parçayı göster</a:t>
-            </a:r>
-          </a:p>
-        </p:txBody>
-      </p:sp>
-      <p:sp>
-        <p:nvSpPr>
-          <p:cNvPr id="11" name="Rounded Rectangle 10"/>
-          <p:cNvSpPr/>
-          <p:nvPr/>
-        </p:nvSpPr>
-        <p:spPr>
-          <a:xfrm>
-            <a:off x="457200" y="2423160"/>
-            <a:ext cx="11247120" cy="1005840"/>
-          </a:xfrm>
-          <a:prstGeom prst="roundRect">
-            <a:avLst>
-              <a:gd name="adj" fmla="val 8000"/>
-            </a:avLst>
-          </a:prstGeom>
-          <a:solidFill>
-            <a:srgbClr val="FFFFFF"/>
-          </a:solidFill>
-          <a:ln>
-            <a:noFill/>
-          </a:ln>
-        </p:spPr>
-        <p:style>
-          <a:lnRef idx="1">
-            <a:schemeClr val="accent1"/>
-          </a:lnRef>
-          <a:fillRef idx="3">
-            <a:schemeClr val="accent1"/>
-          </a:fillRef>
-          <a:effectRef idx="2">
-            <a:schemeClr val="accent1"/>
-          </a:effectRef>
-          <a:fontRef idx="minor">
-            <a:schemeClr val="lt1"/>
-          </a:fontRef>
-        </p:style>
-        <p:txBody>
-          <a:bodyPr rtlCol="0" anchor="ctr"/>
-          <a:lstStyle/>
-          <a:p>
-            <a:pPr algn="ctr"/>
-          </a:p>
-        </p:txBody>
-      </p:sp>
-      <p:sp>
-        <p:nvSpPr>
-          <p:cNvPr id="12" name="TextBox 11"/>
-          <p:cNvSpPr txBox="1"/>
-          <p:nvPr/>
-        </p:nvSpPr>
-        <p:spPr>
-          <a:xfrm>
-            <a:off x="685800" y="2606040"/>
-            <a:ext cx="10789920" cy="640080"/>
-          </a:xfrm>
-          <a:prstGeom prst="rect">
-            <a:avLst/>
-          </a:prstGeom>
-          <a:noFill/>
-        </p:spPr>
-        <p:txBody>
-          <a:bodyPr wrap="square">
-            <a:spAutoFit/>
-          </a:bodyPr>
-          <a:lstStyle/>
-          <a:p>
-            <a:pPr algn="l"/>
-            <a:r>
-              <a:rPr sz="2000" b="0">
-                <a:solidFill>
-                  <a:srgbClr val="12202B"/>
-                </a:solidFill>
-                <a:latin typeface="Calibri"/>
-              </a:rPr>
-              <a:t>2. Web sitesi V2: giriş, defter ekle, 398,80 TL, 10 haneli telefon</a:t>
-            </a:r>
-          </a:p>
-        </p:txBody>
-      </p:sp>
-      <p:sp>
-        <p:nvSpPr>
-          <p:cNvPr id="13" name="Rounded Rectangle 12"/>
-          <p:cNvSpPr/>
-          <p:nvPr/>
-        </p:nvSpPr>
-        <p:spPr>
-          <a:xfrm>
-            <a:off x="457200" y="3611880"/>
-            <a:ext cx="11247120" cy="1005840"/>
-          </a:xfrm>
-          <a:prstGeom prst="roundRect">
-            <a:avLst>
-              <a:gd name="adj" fmla="val 8000"/>
-            </a:avLst>
-          </a:prstGeom>
-          <a:solidFill>
-            <a:srgbClr val="FFFFFF"/>
-          </a:solidFill>
-          <a:ln>
-            <a:noFill/>
-          </a:ln>
-        </p:spPr>
-        <p:style>
-          <a:lnRef idx="1">
-            <a:schemeClr val="accent1"/>
-          </a:lnRef>
-          <a:fillRef idx="3">
-            <a:schemeClr val="accent1"/>
-          </a:fillRef>
-          <a:effectRef idx="2">
-            <a:schemeClr val="accent1"/>
-          </a:effectRef>
-          <a:fontRef idx="minor">
-            <a:schemeClr val="lt1"/>
-          </a:fontRef>
-        </p:style>
-        <p:txBody>
-          <a:bodyPr rtlCol="0" anchor="ctr"/>
-          <a:lstStyle/>
-          <a:p>
-            <a:pPr algn="ctr"/>
-          </a:p>
-        </p:txBody>
-      </p:sp>
-      <p:sp>
-        <p:nvSpPr>
-          <p:cNvPr id="14" name="TextBox 13"/>
-          <p:cNvSpPr txBox="1"/>
-          <p:nvPr/>
-        </p:nvSpPr>
-        <p:spPr>
-          <a:xfrm>
-            <a:off x="685800" y="3794760"/>
-            <a:ext cx="10789920" cy="640080"/>
-          </a:xfrm>
-          <a:prstGeom prst="rect">
-            <a:avLst/>
-          </a:prstGeom>
-          <a:noFill/>
-        </p:spPr>
-        <p:txBody>
-          <a:bodyPr wrap="square">
-            <a:spAutoFit/>
-          </a:bodyPr>
-          <a:lstStyle/>
-          <a:p>
-            <a:pPr algn="l"/>
-            <a:r>
-              <a:rPr sz="2000" b="0">
-                <a:solidFill>
-                  <a:srgbClr val="12202B"/>
-                </a:solidFill>
-                <a:latin typeface="Calibri"/>
-              </a:rPr>
-              <a:t>3. Test uygulaması: süreç, senaryo tablosu, V1/V2 sonuç</a:t>
-            </a:r>
-          </a:p>
-        </p:txBody>
-      </p:sp>
-      <p:sp>
-        <p:nvSpPr>
-          <p:cNvPr id="15" name="Rounded Rectangle 14"/>
-          <p:cNvSpPr/>
-          <p:nvPr/>
-        </p:nvSpPr>
-        <p:spPr>
-          <a:xfrm>
-            <a:off x="457200" y="4800600"/>
-            <a:ext cx="11247120" cy="1005840"/>
-          </a:xfrm>
-          <a:prstGeom prst="roundRect">
-            <a:avLst>
-              <a:gd name="adj" fmla="val 8000"/>
-            </a:avLst>
-          </a:prstGeom>
-          <a:solidFill>
-            <a:srgbClr val="FFFFFF"/>
-          </a:solidFill>
-          <a:ln>
-            <a:noFill/>
-          </a:ln>
-        </p:spPr>
-        <p:style>
-          <a:lnRef idx="1">
-            <a:schemeClr val="accent1"/>
-          </a:lnRef>
-          <a:fillRef idx="3">
-            <a:schemeClr val="accent1"/>
-          </a:fillRef>
-          <a:effectRef idx="2">
-            <a:schemeClr val="accent1"/>
-          </a:effectRef>
-          <a:fontRef idx="minor">
-            <a:schemeClr val="lt1"/>
-          </a:fontRef>
-        </p:style>
-        <p:txBody>
-          <a:bodyPr rtlCol="0" anchor="ctr"/>
-          <a:lstStyle/>
-          <a:p>
-            <a:pPr algn="ctr"/>
-          </a:p>
-        </p:txBody>
-      </p:sp>
-      <p:sp>
-        <p:nvSpPr>
-          <p:cNvPr id="16" name="TextBox 15"/>
-          <p:cNvSpPr txBox="1"/>
-          <p:nvPr/>
-        </p:nvSpPr>
-        <p:spPr>
-          <a:xfrm>
-            <a:off x="685800" y="4983480"/>
-            <a:ext cx="10789920" cy="640080"/>
-          </a:xfrm>
-          <a:prstGeom prst="rect">
-            <a:avLst/>
-          </a:prstGeom>
-          <a:noFill/>
-        </p:spPr>
-        <p:txBody>
-          <a:bodyPr wrap="square">
-            <a:spAutoFit/>
-          </a:bodyPr>
-          <a:lstStyle/>
-          <a:p>
-            <a:pPr algn="l"/>
-            <a:r>
-              <a:rPr sz="2000" b="0">
-                <a:solidFill>
-                  <a:srgbClr val="12202B"/>
-                </a:solidFill>
-                <a:latin typeface="Calibri"/>
-              </a:rPr>
-              <a:t>4. PLAYWRIGHT_AC.cmd: V1’de T04/T12, V2’de 15/15</a:t>
-            </a:r>
-          </a:p>
-        </p:txBody>
-      </p:sp>
+      <p:pic>
+        <p:nvPicPr>
+          <p:cNvPr id="9" name="Picture 8" descr="test-sonuc.png"/>
+          <p:cNvPicPr>
+            <a:picLocks noChangeAspect="1"/>
+          </p:cNvPicPr>
+          <p:nvPr/>
+        </p:nvPicPr>
+        <p:blipFill>
+          <a:blip r:embed="rId2"/>
+          <a:stretch>
+            <a:fillRect/>
+          </a:stretch>
+        </p:blipFill>
+        <p:spPr>
+          <a:xfrm>
+            <a:off x="274320" y="1051560"/>
+            <a:ext cx="6766560" cy="5212080"/>
+          </a:xfrm>
+          <a:prstGeom prst="rect">
+            <a:avLst/>
+          </a:prstGeom>
+        </p:spPr>
+      </p:pic>
+      <p:pic>
+        <p:nvPicPr>
+          <p:cNvPr id="10" name="Picture 9" descr="raf.png"/>
+          <p:cNvPicPr>
+            <a:picLocks noChangeAspect="1"/>
+          </p:cNvPicPr>
+          <p:nvPr/>
+        </p:nvPicPr>
+        <p:blipFill>
+          <a:blip r:embed="rId3"/>
+          <a:stretch>
+            <a:fillRect/>
+          </a:stretch>
+        </p:blipFill>
+        <p:spPr>
+          <a:xfrm>
+            <a:off x="7178040" y="1051560"/>
+            <a:ext cx="4709160" cy="5212080"/>
+          </a:xfrm>
+          <a:prstGeom prst="rect">
+            <a:avLst/>
+          </a:prstGeom>
+        </p:spPr>
+      </p:pic>
     </p:spTree>
   </p:cSld>
   <p:clrMapOvr>
@@ -9814,7 +9238,7 @@
                 </a:solidFill>
                 <a:latin typeface="Calibri"/>
               </a:rPr>
-              <a:t>Sonlandırma, sınır ve kaynaklar</a:t>
+              <a:t>Derste canlı gösterim sırası</a:t>
             </a:r>
           </a:p>
         </p:txBody>
@@ -9892,7 +9316,7 @@
                 </a:solidFill>
                 <a:latin typeface="Calibri"/>
               </a:rPr>
-              <a:t>Kampüs Kırtasiye  ·  İTÜ BİDB + TechTarget  ·  Rıdvan Çağlar Mutlu</a:t>
+              <a:t>Kampüs Kırtasiye  ·  TechTarget software testing  ·  Rıdvan Çağlar Mutlu</a:t>
             </a:r>
           </a:p>
         </p:txBody>
@@ -9934,6 +9358,621 @@
       </p:sp>
       <p:sp>
         <p:nvSpPr>
+          <p:cNvPr id="9" name="Rounded Rectangle 8"/>
+          <p:cNvSpPr/>
+          <p:nvPr/>
+        </p:nvSpPr>
+        <p:spPr>
+          <a:xfrm>
+            <a:off x="457200" y="1234440"/>
+            <a:ext cx="11247120" cy="1005840"/>
+          </a:xfrm>
+          <a:prstGeom prst="roundRect">
+            <a:avLst>
+              <a:gd name="adj" fmla="val 8000"/>
+            </a:avLst>
+          </a:prstGeom>
+          <a:solidFill>
+            <a:srgbClr val="FFFFFF"/>
+          </a:solidFill>
+          <a:ln>
+            <a:noFill/>
+          </a:ln>
+        </p:spPr>
+        <p:style>
+          <a:lnRef idx="1">
+            <a:schemeClr val="accent1"/>
+          </a:lnRef>
+          <a:fillRef idx="3">
+            <a:schemeClr val="accent1"/>
+          </a:fillRef>
+          <a:effectRef idx="2">
+            <a:schemeClr val="accent1"/>
+          </a:effectRef>
+          <a:fontRef idx="minor">
+            <a:schemeClr val="lt1"/>
+          </a:fontRef>
+        </p:style>
+        <p:txBody>
+          <a:bodyPr rtlCol="0" anchor="ctr"/>
+          <a:lstStyle/>
+          <a:p>
+            <a:pPr algn="ctr"/>
+          </a:p>
+        </p:txBody>
+      </p:sp>
+      <p:sp>
+        <p:nvSpPr>
+          <p:cNvPr id="10" name="TextBox 9"/>
+          <p:cNvSpPr txBox="1"/>
+          <p:nvPr/>
+        </p:nvSpPr>
+        <p:spPr>
+          <a:xfrm>
+            <a:off x="685800" y="1417320"/>
+            <a:ext cx="10789920" cy="640080"/>
+          </a:xfrm>
+          <a:prstGeom prst="rect">
+            <a:avLst/>
+          </a:prstGeom>
+          <a:noFill/>
+        </p:spPr>
+        <p:txBody>
+          <a:bodyPr wrap="square">
+            <a:spAutoFit/>
+          </a:bodyPr>
+          <a:lstStyle/>
+          <a:p>
+            <a:pPr algn="l"/>
+            <a:r>
+              <a:rPr sz="2000" b="0">
+                <a:solidFill>
+                  <a:srgbClr val="12202B"/>
+                </a:solidFill>
+                <a:latin typeface="Calibri"/>
+              </a:rPr>
+              <a:t>1. XAMPP: Apache açık, localhost/kampus-kirtasiye sitesine giriş</a:t>
+            </a:r>
+          </a:p>
+        </p:txBody>
+      </p:sp>
+      <p:sp>
+        <p:nvSpPr>
+          <p:cNvPr id="11" name="Rounded Rectangle 10"/>
+          <p:cNvSpPr/>
+          <p:nvPr/>
+        </p:nvSpPr>
+        <p:spPr>
+          <a:xfrm>
+            <a:off x="457200" y="2423160"/>
+            <a:ext cx="11247120" cy="1005840"/>
+          </a:xfrm>
+          <a:prstGeom prst="roundRect">
+            <a:avLst>
+              <a:gd name="adj" fmla="val 8000"/>
+            </a:avLst>
+          </a:prstGeom>
+          <a:solidFill>
+            <a:srgbClr val="FFFFFF"/>
+          </a:solidFill>
+          <a:ln>
+            <a:noFill/>
+          </a:ln>
+        </p:spPr>
+        <p:style>
+          <a:lnRef idx="1">
+            <a:schemeClr val="accent1"/>
+          </a:lnRef>
+          <a:fillRef idx="3">
+            <a:schemeClr val="accent1"/>
+          </a:fillRef>
+          <a:effectRef idx="2">
+            <a:schemeClr val="accent1"/>
+          </a:effectRef>
+          <a:fontRef idx="minor">
+            <a:schemeClr val="lt1"/>
+          </a:fontRef>
+        </p:style>
+        <p:txBody>
+          <a:bodyPr rtlCol="0" anchor="ctr"/>
+          <a:lstStyle/>
+          <a:p>
+            <a:pPr algn="ctr"/>
+          </a:p>
+        </p:txBody>
+      </p:sp>
+      <p:sp>
+        <p:nvSpPr>
+          <p:cNvPr id="12" name="TextBox 11"/>
+          <p:cNvSpPr txBox="1"/>
+          <p:nvPr/>
+        </p:nvSpPr>
+        <p:spPr>
+          <a:xfrm>
+            <a:off x="685800" y="2606040"/>
+            <a:ext cx="10789920" cy="640080"/>
+          </a:xfrm>
+          <a:prstGeom prst="rect">
+            <a:avLst/>
+          </a:prstGeom>
+          <a:noFill/>
+        </p:spPr>
+        <p:txBody>
+          <a:bodyPr wrap="square">
+            <a:spAutoFit/>
+          </a:bodyPr>
+          <a:lstStyle/>
+          <a:p>
+            <a:pPr algn="l"/>
+            <a:r>
+              <a:rPr sz="2000" b="0">
+                <a:solidFill>
+                  <a:srgbClr val="12202B"/>
+                </a:solidFill>
+                <a:latin typeface="Calibri"/>
+              </a:rPr>
+              <a:t>2. PLAYWRIGHT_AC.cmd: Run all ile testleri başlat</a:t>
+            </a:r>
+          </a:p>
+        </p:txBody>
+      </p:sp>
+      <p:sp>
+        <p:nvSpPr>
+          <p:cNvPr id="13" name="Rounded Rectangle 12"/>
+          <p:cNvSpPr/>
+          <p:nvPr/>
+        </p:nvSpPr>
+        <p:spPr>
+          <a:xfrm>
+            <a:off x="457200" y="3611880"/>
+            <a:ext cx="11247120" cy="1005840"/>
+          </a:xfrm>
+          <a:prstGeom prst="roundRect">
+            <a:avLst>
+              <a:gd name="adj" fmla="val 8000"/>
+            </a:avLst>
+          </a:prstGeom>
+          <a:solidFill>
+            <a:srgbClr val="FFFFFF"/>
+          </a:solidFill>
+          <a:ln>
+            <a:noFill/>
+          </a:ln>
+        </p:spPr>
+        <p:style>
+          <a:lnRef idx="1">
+            <a:schemeClr val="accent1"/>
+          </a:lnRef>
+          <a:fillRef idx="3">
+            <a:schemeClr val="accent1"/>
+          </a:fillRef>
+          <a:effectRef idx="2">
+            <a:schemeClr val="accent1"/>
+          </a:effectRef>
+          <a:fontRef idx="minor">
+            <a:schemeClr val="lt1"/>
+          </a:fontRef>
+        </p:style>
+        <p:txBody>
+          <a:bodyPr rtlCol="0" anchor="ctr"/>
+          <a:lstStyle/>
+          <a:p>
+            <a:pPr algn="ctr"/>
+          </a:p>
+        </p:txBody>
+      </p:sp>
+      <p:sp>
+        <p:nvSpPr>
+          <p:cNvPr id="14" name="TextBox 13"/>
+          <p:cNvSpPr txBox="1"/>
+          <p:nvPr/>
+        </p:nvSpPr>
+        <p:spPr>
+          <a:xfrm>
+            <a:off x="685800" y="3794760"/>
+            <a:ext cx="10789920" cy="640080"/>
+          </a:xfrm>
+          <a:prstGeom prst="rect">
+            <a:avLst/>
+          </a:prstGeom>
+          <a:noFill/>
+        </p:spPr>
+        <p:txBody>
+          <a:bodyPr wrap="square">
+            <a:spAutoFit/>
+          </a:bodyPr>
+          <a:lstStyle/>
+          <a:p>
+            <a:pPr algn="l"/>
+            <a:r>
+              <a:rPr sz="2000" b="0">
+                <a:solidFill>
+                  <a:srgbClr val="12202B"/>
+                </a:solidFill>
+                <a:latin typeface="Calibri"/>
+              </a:rPr>
+              <a:t>3. İlk rapor (V1): T04 ve T12 başarısızlığını göster</a:t>
+            </a:r>
+          </a:p>
+        </p:txBody>
+      </p:sp>
+      <p:sp>
+        <p:nvSpPr>
+          <p:cNvPr id="15" name="Rounded Rectangle 14"/>
+          <p:cNvSpPr/>
+          <p:nvPr/>
+        </p:nvSpPr>
+        <p:spPr>
+          <a:xfrm>
+            <a:off x="457200" y="4800600"/>
+            <a:ext cx="11247120" cy="1005840"/>
+          </a:xfrm>
+          <a:prstGeom prst="roundRect">
+            <a:avLst>
+              <a:gd name="adj" fmla="val 8000"/>
+            </a:avLst>
+          </a:prstGeom>
+          <a:solidFill>
+            <a:srgbClr val="FFFFFF"/>
+          </a:solidFill>
+          <a:ln>
+            <a:noFill/>
+          </a:ln>
+        </p:spPr>
+        <p:style>
+          <a:lnRef idx="1">
+            <a:schemeClr val="accent1"/>
+          </a:lnRef>
+          <a:fillRef idx="3">
+            <a:schemeClr val="accent1"/>
+          </a:fillRef>
+          <a:effectRef idx="2">
+            <a:schemeClr val="accent1"/>
+          </a:effectRef>
+          <a:fontRef idx="minor">
+            <a:schemeClr val="lt1"/>
+          </a:fontRef>
+        </p:style>
+        <p:txBody>
+          <a:bodyPr rtlCol="0" anchor="ctr"/>
+          <a:lstStyle/>
+          <a:p>
+            <a:pPr algn="ctr"/>
+          </a:p>
+        </p:txBody>
+      </p:sp>
+      <p:sp>
+        <p:nvSpPr>
+          <p:cNvPr id="16" name="TextBox 15"/>
+          <p:cNvSpPr txBox="1"/>
+          <p:nvPr/>
+        </p:nvSpPr>
+        <p:spPr>
+          <a:xfrm>
+            <a:off x="685800" y="4983480"/>
+            <a:ext cx="10789920" cy="640080"/>
+          </a:xfrm>
+          <a:prstGeom prst="rect">
+            <a:avLst/>
+          </a:prstGeom>
+          <a:noFill/>
+        </p:spPr>
+        <p:txBody>
+          <a:bodyPr wrap="square">
+            <a:spAutoFit/>
+          </a:bodyPr>
+          <a:lstStyle/>
+          <a:p>
+            <a:pPr algn="l"/>
+            <a:r>
+              <a:rPr sz="2000" b="0">
+                <a:solidFill>
+                  <a:srgbClr val="12202B"/>
+                </a:solidFill>
+                <a:latin typeface="Calibri"/>
+              </a:rPr>
+              <a:t>4. Son rapor ve kod: Düzeltmeyi açıklayıp karşılaştır</a:t>
+            </a:r>
+          </a:p>
+        </p:txBody>
+      </p:sp>
+    </p:spTree>
+  </p:cSld>
+  <p:clrMapOvr>
+    <a:masterClrMapping/>
+  </p:clrMapOvr>
+</p:sld>
+</file>
+
+<file path=ppt/slides/slide23.xml><?xml version="1.0" encoding="utf-8"?>
+<p:sld xmlns:a="http://schemas.openxmlformats.org/drawingml/2006/main" xmlns:p="http://schemas.openxmlformats.org/presentationml/2006/main" xmlns:r="http://schemas.openxmlformats.org/officeDocument/2006/relationships">
+  <p:cSld>
+    <p:spTree>
+      <p:nvGrpSpPr>
+        <p:cNvPr id="1" name=""/>
+        <p:cNvGrpSpPr/>
+        <p:nvPr/>
+      </p:nvGrpSpPr>
+      <p:grpSpPr/>
+      <p:sp>
+        <p:nvSpPr>
+          <p:cNvPr id="2" name="Rectangle 1"/>
+          <p:cNvSpPr/>
+          <p:nvPr/>
+        </p:nvSpPr>
+        <p:spPr>
+          <a:xfrm>
+            <a:off x="0" y="0"/>
+            <a:ext cx="12191695" cy="6858000"/>
+          </a:xfrm>
+          <a:prstGeom prst="rect">
+            <a:avLst/>
+          </a:prstGeom>
+          <a:solidFill>
+            <a:srgbClr val="EEF3F1"/>
+          </a:solidFill>
+          <a:ln>
+            <a:noFill/>
+          </a:ln>
+        </p:spPr>
+        <p:style>
+          <a:lnRef idx="1">
+            <a:schemeClr val="accent1"/>
+          </a:lnRef>
+          <a:fillRef idx="3">
+            <a:schemeClr val="accent1"/>
+          </a:fillRef>
+          <a:effectRef idx="2">
+            <a:schemeClr val="accent1"/>
+          </a:effectRef>
+          <a:fontRef idx="minor">
+            <a:schemeClr val="lt1"/>
+          </a:fontRef>
+        </p:style>
+        <p:txBody>
+          <a:bodyPr rtlCol="0" anchor="ctr"/>
+          <a:lstStyle/>
+          <a:p>
+            <a:pPr algn="ctr"/>
+          </a:p>
+        </p:txBody>
+      </p:sp>
+      <p:sp>
+        <p:nvSpPr>
+          <p:cNvPr id="3" name="Rectangle 2"/>
+          <p:cNvSpPr/>
+          <p:nvPr/>
+        </p:nvSpPr>
+        <p:spPr>
+          <a:xfrm>
+            <a:off x="0" y="0"/>
+            <a:ext cx="12191695" cy="109728"/>
+          </a:xfrm>
+          <a:prstGeom prst="rect">
+            <a:avLst/>
+          </a:prstGeom>
+          <a:solidFill>
+            <a:srgbClr val="0B6E4F"/>
+          </a:solidFill>
+          <a:ln>
+            <a:noFill/>
+          </a:ln>
+        </p:spPr>
+        <p:style>
+          <a:lnRef idx="1">
+            <a:schemeClr val="accent1"/>
+          </a:lnRef>
+          <a:fillRef idx="3">
+            <a:schemeClr val="accent1"/>
+          </a:fillRef>
+          <a:effectRef idx="2">
+            <a:schemeClr val="accent1"/>
+          </a:effectRef>
+          <a:fontRef idx="minor">
+            <a:schemeClr val="lt1"/>
+          </a:fontRef>
+        </p:style>
+        <p:txBody>
+          <a:bodyPr rtlCol="0" anchor="ctr"/>
+          <a:lstStyle/>
+          <a:p>
+            <a:pPr algn="ctr"/>
+          </a:p>
+        </p:txBody>
+      </p:sp>
+      <p:sp>
+        <p:nvSpPr>
+          <p:cNvPr id="4" name="Rectangle 3"/>
+          <p:cNvSpPr/>
+          <p:nvPr/>
+        </p:nvSpPr>
+        <p:spPr>
+          <a:xfrm>
+            <a:off x="0" y="109728"/>
+            <a:ext cx="12191695" cy="841248"/>
+          </a:xfrm>
+          <a:prstGeom prst="rect">
+            <a:avLst/>
+          </a:prstGeom>
+          <a:solidFill>
+            <a:srgbClr val="0F2A3D"/>
+          </a:solidFill>
+          <a:ln>
+            <a:noFill/>
+          </a:ln>
+        </p:spPr>
+        <p:style>
+          <a:lnRef idx="1">
+            <a:schemeClr val="accent1"/>
+          </a:lnRef>
+          <a:fillRef idx="3">
+            <a:schemeClr val="accent1"/>
+          </a:fillRef>
+          <a:effectRef idx="2">
+            <a:schemeClr val="accent1"/>
+          </a:effectRef>
+          <a:fontRef idx="minor">
+            <a:schemeClr val="lt1"/>
+          </a:fontRef>
+        </p:style>
+        <p:txBody>
+          <a:bodyPr rtlCol="0" anchor="ctr"/>
+          <a:lstStyle/>
+          <a:p>
+            <a:pPr algn="ctr"/>
+          </a:p>
+        </p:txBody>
+      </p:sp>
+      <p:sp>
+        <p:nvSpPr>
+          <p:cNvPr id="5" name="TextBox 4"/>
+          <p:cNvSpPr txBox="1"/>
+          <p:nvPr/>
+        </p:nvSpPr>
+        <p:spPr>
+          <a:xfrm>
+            <a:off x="411480" y="256032"/>
+            <a:ext cx="10972800" cy="548640"/>
+          </a:xfrm>
+          <a:prstGeom prst="rect">
+            <a:avLst/>
+          </a:prstGeom>
+          <a:noFill/>
+        </p:spPr>
+        <p:txBody>
+          <a:bodyPr wrap="square">
+            <a:spAutoFit/>
+          </a:bodyPr>
+          <a:lstStyle/>
+          <a:p>
+            <a:pPr algn="l"/>
+            <a:r>
+              <a:rPr sz="2400" b="1">
+                <a:solidFill>
+                  <a:srgbClr val="FFFFFF"/>
+                </a:solidFill>
+                <a:latin typeface="Calibri"/>
+              </a:rPr>
+              <a:t>Kapsam, sınırlamalar ve kaynaklar</a:t>
+            </a:r>
+          </a:p>
+        </p:txBody>
+      </p:sp>
+      <p:sp>
+        <p:nvSpPr>
+          <p:cNvPr id="6" name="Rectangle 5"/>
+          <p:cNvSpPr/>
+          <p:nvPr/>
+        </p:nvSpPr>
+        <p:spPr>
+          <a:xfrm>
+            <a:off x="0" y="6601968"/>
+            <a:ext cx="12191695" cy="256032"/>
+          </a:xfrm>
+          <a:prstGeom prst="rect">
+            <a:avLst/>
+          </a:prstGeom>
+          <a:solidFill>
+            <a:srgbClr val="0F2A3D"/>
+          </a:solidFill>
+          <a:ln>
+            <a:noFill/>
+          </a:ln>
+        </p:spPr>
+        <p:style>
+          <a:lnRef idx="1">
+            <a:schemeClr val="accent1"/>
+          </a:lnRef>
+          <a:fillRef idx="3">
+            <a:schemeClr val="accent1"/>
+          </a:fillRef>
+          <a:effectRef idx="2">
+            <a:schemeClr val="accent1"/>
+          </a:effectRef>
+          <a:fontRef idx="minor">
+            <a:schemeClr val="lt1"/>
+          </a:fontRef>
+        </p:style>
+        <p:txBody>
+          <a:bodyPr rtlCol="0" anchor="ctr"/>
+          <a:lstStyle/>
+          <a:p>
+            <a:pPr algn="ctr"/>
+          </a:p>
+        </p:txBody>
+      </p:sp>
+      <p:sp>
+        <p:nvSpPr>
+          <p:cNvPr id="7" name="TextBox 6"/>
+          <p:cNvSpPr txBox="1"/>
+          <p:nvPr/>
+        </p:nvSpPr>
+        <p:spPr>
+          <a:xfrm>
+            <a:off x="365760" y="6601968"/>
+            <a:ext cx="9601200" cy="256032"/>
+          </a:xfrm>
+          <a:prstGeom prst="rect">
+            <a:avLst/>
+          </a:prstGeom>
+          <a:noFill/>
+        </p:spPr>
+        <p:txBody>
+          <a:bodyPr wrap="square">
+            <a:spAutoFit/>
+          </a:bodyPr>
+          <a:lstStyle/>
+          <a:p>
+            <a:pPr algn="l"/>
+            <a:r>
+              <a:rPr sz="1100" b="0">
+                <a:solidFill>
+                  <a:srgbClr val="E7F3EA"/>
+                </a:solidFill>
+                <a:latin typeface="Calibri"/>
+              </a:rPr>
+              <a:t>Kampüs Kırtasiye  ·  TechTarget software testing  ·  Rıdvan Çağlar Mutlu</a:t>
+            </a:r>
+          </a:p>
+        </p:txBody>
+      </p:sp>
+      <p:sp>
+        <p:nvSpPr>
+          <p:cNvPr id="8" name="TextBox 7"/>
+          <p:cNvSpPr txBox="1"/>
+          <p:nvPr/>
+        </p:nvSpPr>
+        <p:spPr>
+          <a:xfrm>
+            <a:off x="10607040" y="6601968"/>
+            <a:ext cx="1280160" cy="256032"/>
+          </a:xfrm>
+          <a:prstGeom prst="rect">
+            <a:avLst/>
+          </a:prstGeom>
+          <a:noFill/>
+        </p:spPr>
+        <p:txBody>
+          <a:bodyPr wrap="square">
+            <a:spAutoFit/>
+          </a:bodyPr>
+          <a:lstStyle/>
+          <a:p>
+            <a:pPr algn="r"/>
+            <a:r>
+              <a:rPr sz="1100" b="1">
+                <a:solidFill>
+                  <a:srgbClr val="0B6E4F"/>
+                </a:solidFill>
+                <a:latin typeface="Calibri"/>
+              </a:rPr>
+              <a:t>23</a:t>
+            </a:r>
+          </a:p>
+        </p:txBody>
+      </p:sp>
+      <p:sp>
+        <p:nvSpPr>
           <p:cNvPr id="9" name="TextBox 8"/>
           <p:cNvSpPr txBox="1"/>
           <p:nvPr/>
@@ -9966,7 +10005,7 @@
                 </a:solidFill>
                 <a:latin typeface="Calibri"/>
               </a:rPr>
-              <a:t>▸  Ölçüt sağlandı: V2 15/15, T04 ve T12 kapandı, regresyon yeşil.</a:t>
+              <a:t>▸  15/15 sonuç yalnızca seçilen test kapsamını gösterir.</a:t>
             </a:r>
           </a:p>
           <a:p>
@@ -9982,7 +10021,7 @@
                 </a:solidFill>
                 <a:latin typeface="Calibri"/>
               </a:rPr>
-              <a:t>▸  15/15 yalnızca seçilen kapsamı gösterir; ürünün ‘hatasız’ olduğu anlamına gelmez.</a:t>
+              <a:t>▸  Yük, kapsamlı güvenlik ve mobil testleri yapılmadı.</a:t>
             </a:r>
           </a:p>
           <a:p>
@@ -9998,7 +10037,7 @@
                 </a:solidFill>
                 <a:latin typeface="Calibri"/>
               </a:rPr>
-              <a:t>▸  Yük, güvenlik ve mobil test yapılmadı (İTÜ / TechTarget’de var, biz seçmedik).</a:t>
+              <a:t>▸  Teori: TechTarget — What is software testing? Definition, types and importance.</a:t>
             </a:r>
           </a:p>
           <a:p>
@@ -10014,7 +10053,7 @@
                 </a:solidFill>
                 <a:latin typeface="Calibri"/>
               </a:rPr>
-              <a:t>▸  İTÜ BİDB: Yazılım Testi ve Test Süreçleri (2013).</a:t>
+              <a:t>▸  https://www.techtarget.com/whatis/definition/software-testing</a:t>
             </a:r>
           </a:p>
           <a:p>
@@ -10030,7 +10069,7 @@
                 </a:solidFill>
                 <a:latin typeface="Calibri"/>
               </a:rPr>
-              <a:t>▸  TechTarget: Software testing — definition, types and importance.</a:t>
+              <a:t>▸  Teknik: Playwright, PHP ve XAMPP resmî belgeleri.</a:t>
             </a:r>
           </a:p>
         </p:txBody>
@@ -10212,7 +10251,7 @@
                 </a:solidFill>
                 <a:latin typeface="Calibri"/>
               </a:rPr>
-              <a:t>İTÜ BİDB: Test nedir?</a:t>
+              <a:t>Kampüs Kırtasiye uygulaması</a:t>
             </a:r>
           </a:p>
         </p:txBody>
@@ -10290,7 +10329,7 @@
                 </a:solidFill>
                 <a:latin typeface="Calibri"/>
               </a:rPr>
-              <a:t>Kampüs Kırtasiye  ·  İTÜ BİDB + TechTarget  ·  Rıdvan Çağlar Mutlu</a:t>
+              <a:t>Kampüs Kırtasiye  ·  TechTarget software testing  ·  Rıdvan Çağlar Mutlu</a:t>
             </a:r>
           </a:p>
         </p:txBody>
@@ -10332,14 +10371,59 @@
       </p:sp>
       <p:sp>
         <p:nvSpPr>
-          <p:cNvPr id="9" name="TextBox 8"/>
+          <p:cNvPr id="9" name="Rounded Rectangle 8"/>
+          <p:cNvSpPr/>
+          <p:nvPr/>
+        </p:nvSpPr>
+        <p:spPr>
+          <a:xfrm>
+            <a:off x="411480" y="1828800"/>
+            <a:ext cx="2743200" cy="2834640"/>
+          </a:xfrm>
+          <a:prstGeom prst="roundRect">
+            <a:avLst>
+              <a:gd name="adj" fmla="val 8000"/>
+            </a:avLst>
+          </a:prstGeom>
+          <a:solidFill>
+            <a:srgbClr val="FFFFFF"/>
+          </a:solidFill>
+          <a:ln>
+            <a:noFill/>
+          </a:ln>
+        </p:spPr>
+        <p:style>
+          <a:lnRef idx="1">
+            <a:schemeClr val="accent1"/>
+          </a:lnRef>
+          <a:fillRef idx="3">
+            <a:schemeClr val="accent1"/>
+          </a:fillRef>
+          <a:effectRef idx="2">
+            <a:schemeClr val="accent1"/>
+          </a:effectRef>
+          <a:fontRef idx="minor">
+            <a:schemeClr val="lt1"/>
+          </a:fontRef>
+        </p:style>
+        <p:txBody>
+          <a:bodyPr rtlCol="0" anchor="ctr"/>
+          <a:lstStyle/>
+          <a:p>
+            <a:pPr algn="ctr"/>
+          </a:p>
+        </p:txBody>
+      </p:sp>
+      <p:sp>
+        <p:nvSpPr>
+          <p:cNvPr id="10" name="TextBox 9"/>
           <p:cNvSpPr txBox="1"/>
           <p:nvPr/>
         </p:nvSpPr>
         <p:spPr>
           <a:xfrm>
-            <a:off x="457200" y="1188720"/>
-            <a:ext cx="11155680" cy="5029200"/>
+            <a:off x="594360" y="2103120"/>
+            <a:ext cx="2377440" cy="1005840"/>
           </a:xfrm>
           <a:prstGeom prst="rect">
             <a:avLst/>
@@ -10352,67 +10436,395 @@
           </a:bodyPr>
           <a:lstStyle/>
           <a:p>
-            <a:pPr>
-              <a:spcAft>
-                <a:spcPts val="900"/>
-              </a:spcAft>
-            </a:pPr>
-            <a:r>
-              <a:rPr sz="1800" b="0">
+            <a:pPr algn="l"/>
+            <a:r>
+              <a:rPr sz="2200" b="1">
                 <a:solidFill>
-                  <a:srgbClr val="12202B"/>
+                  <a:srgbClr val="0F2A3D"/>
                 </a:solidFill>
                 <a:latin typeface="Calibri"/>
               </a:rPr>
-              <a:t>▸  Test: sistemi elle veya otomatik deneyerek gereksinimi doğrulamak, ya da beklenen ile gözlenen farkı bulmak.</a:t>
-            </a:r>
-          </a:p>
-          <a:p>
-            <a:pPr>
-              <a:spcAft>
-                <a:spcPts val="900"/>
-              </a:spcAft>
-            </a:pPr>
-            <a:r>
-              <a:rPr sz="1800" b="0">
+              <a:t>6 ürün</a:t>
+            </a:r>
+          </a:p>
+        </p:txBody>
+      </p:sp>
+      <p:sp>
+        <p:nvSpPr>
+          <p:cNvPr id="11" name="TextBox 10"/>
+          <p:cNvSpPr txBox="1"/>
+          <p:nvPr/>
+        </p:nvSpPr>
+        <p:spPr>
+          <a:xfrm>
+            <a:off x="594360" y="3200400"/>
+            <a:ext cx="2377440" cy="1005840"/>
+          </a:xfrm>
+          <a:prstGeom prst="rect">
+            <a:avLst/>
+          </a:prstGeom>
+          <a:noFill/>
+        </p:spPr>
+        <p:txBody>
+          <a:bodyPr wrap="square">
+            <a:spAutoFit/>
+          </a:bodyPr>
+          <a:lstStyle/>
+          <a:p>
+            <a:pPr algn="l"/>
+            <a:r>
+              <a:rPr sz="1600" b="0">
                 <a:solidFill>
-                  <a:srgbClr val="12202B"/>
+                  <a:srgbClr val="4D5C58"/>
                 </a:solidFill>
                 <a:latin typeface="Calibri"/>
               </a:rPr>
-              <a:t>▸  Yazılım testi: sonsuz çalışma alanından sınırlı ve uygun senaryolar seçerek dinamik doğrulama yapmak.</a:t>
-            </a:r>
-          </a:p>
-          <a:p>
-            <a:pPr>
-              <a:spcAft>
-                <a:spcPts val="900"/>
-              </a:spcAft>
-            </a:pPr>
-            <a:r>
-              <a:rPr sz="1800" b="0">
+              <a:t>Kırtasiye + elektronik</a:t>
+            </a:r>
+          </a:p>
+        </p:txBody>
+      </p:sp>
+      <p:sp>
+        <p:nvSpPr>
+          <p:cNvPr id="12" name="Rounded Rectangle 11"/>
+          <p:cNvSpPr/>
+          <p:nvPr/>
+        </p:nvSpPr>
+        <p:spPr>
+          <a:xfrm>
+            <a:off x="3337560" y="1828800"/>
+            <a:ext cx="2743200" cy="2834640"/>
+          </a:xfrm>
+          <a:prstGeom prst="roundRect">
+            <a:avLst>
+              <a:gd name="adj" fmla="val 8000"/>
+            </a:avLst>
+          </a:prstGeom>
+          <a:solidFill>
+            <a:srgbClr val="FFFFFF"/>
+          </a:solidFill>
+          <a:ln>
+            <a:noFill/>
+          </a:ln>
+        </p:spPr>
+        <p:style>
+          <a:lnRef idx="1">
+            <a:schemeClr val="accent1"/>
+          </a:lnRef>
+          <a:fillRef idx="3">
+            <a:schemeClr val="accent1"/>
+          </a:fillRef>
+          <a:effectRef idx="2">
+            <a:schemeClr val="accent1"/>
+          </a:effectRef>
+          <a:fontRef idx="minor">
+            <a:schemeClr val="lt1"/>
+          </a:fontRef>
+        </p:style>
+        <p:txBody>
+          <a:bodyPr rtlCol="0" anchor="ctr"/>
+          <a:lstStyle/>
+          <a:p>
+            <a:pPr algn="ctr"/>
+          </a:p>
+        </p:txBody>
+      </p:sp>
+      <p:sp>
+        <p:nvSpPr>
+          <p:cNvPr id="13" name="TextBox 12"/>
+          <p:cNvSpPr txBox="1"/>
+          <p:nvPr/>
+        </p:nvSpPr>
+        <p:spPr>
+          <a:xfrm>
+            <a:off x="3520440" y="2103120"/>
+            <a:ext cx="2377440" cy="1005840"/>
+          </a:xfrm>
+          <a:prstGeom prst="rect">
+            <a:avLst/>
+          </a:prstGeom>
+          <a:noFill/>
+        </p:spPr>
+        <p:txBody>
+          <a:bodyPr wrap="square">
+            <a:spAutoFit/>
+          </a:bodyPr>
+          <a:lstStyle/>
+          <a:p>
+            <a:pPr algn="l"/>
+            <a:r>
+              <a:rPr sz="2200" b="1">
                 <a:solidFill>
-                  <a:srgbClr val="12202B"/>
+                  <a:srgbClr val="0F2A3D"/>
                 </a:solidFill>
                 <a:latin typeface="Calibri"/>
               </a:rPr>
-              <a:t>▸  Kaliteli yazılım: kabul edilebilir hatasız, bütçe ve zamanda biten, gereksinimi karşılayan, sürdürülebilir.</a:t>
-            </a:r>
-          </a:p>
-          <a:p>
-            <a:pPr>
-              <a:spcAft>
-                <a:spcPts val="900"/>
-              </a:spcAft>
-            </a:pPr>
-            <a:r>
-              <a:rPr sz="1800" b="0">
+              <a:t>Giriş ve sepet</a:t>
+            </a:r>
+          </a:p>
+        </p:txBody>
+      </p:sp>
+      <p:sp>
+        <p:nvSpPr>
+          <p:cNvPr id="14" name="TextBox 13"/>
+          <p:cNvSpPr txBox="1"/>
+          <p:nvPr/>
+        </p:nvSpPr>
+        <p:spPr>
+          <a:xfrm>
+            <a:off x="3520440" y="3200400"/>
+            <a:ext cx="2377440" cy="1005840"/>
+          </a:xfrm>
+          <a:prstGeom prst="rect">
+            <a:avLst/>
+          </a:prstGeom>
+          <a:noFill/>
+        </p:spPr>
+        <p:txBody>
+          <a:bodyPr wrap="square">
+            <a:spAutoFit/>
+          </a:bodyPr>
+          <a:lstStyle/>
+          <a:p>
+            <a:pPr algn="l"/>
+            <a:r>
+              <a:rPr sz="1600" b="0">
                 <a:solidFill>
-                  <a:srgbClr val="12202B"/>
+                  <a:srgbClr val="4D5C58"/>
                 </a:solidFill>
                 <a:latin typeface="Calibri"/>
               </a:rPr>
-              <a:t>▸  Bu derste beklenen: giriş kabul/ret, 4 ürün filtresi, 398,80 TL, 10 haneli telefon, boş sepet yasağı.</a:t>
+              <a:t>ridvan / Defter2026</a:t>
+            </a:r>
+          </a:p>
+        </p:txBody>
+      </p:sp>
+      <p:sp>
+        <p:nvSpPr>
+          <p:cNvPr id="15" name="Rounded Rectangle 14"/>
+          <p:cNvSpPr/>
+          <p:nvPr/>
+        </p:nvSpPr>
+        <p:spPr>
+          <a:xfrm>
+            <a:off x="6263640" y="1828800"/>
+            <a:ext cx="2743200" cy="2834640"/>
+          </a:xfrm>
+          <a:prstGeom prst="roundRect">
+            <a:avLst>
+              <a:gd name="adj" fmla="val 8000"/>
+            </a:avLst>
+          </a:prstGeom>
+          <a:solidFill>
+            <a:srgbClr val="FFFFFF"/>
+          </a:solidFill>
+          <a:ln>
+            <a:noFill/>
+          </a:ln>
+        </p:spPr>
+        <p:style>
+          <a:lnRef idx="1">
+            <a:schemeClr val="accent1"/>
+          </a:lnRef>
+          <a:fillRef idx="3">
+            <a:schemeClr val="accent1"/>
+          </a:fillRef>
+          <a:effectRef idx="2">
+            <a:schemeClr val="accent1"/>
+          </a:effectRef>
+          <a:fontRef idx="minor">
+            <a:schemeClr val="lt1"/>
+          </a:fontRef>
+        </p:style>
+        <p:txBody>
+          <a:bodyPr rtlCol="0" anchor="ctr"/>
+          <a:lstStyle/>
+          <a:p>
+            <a:pPr algn="ctr"/>
+          </a:p>
+        </p:txBody>
+      </p:sp>
+      <p:sp>
+        <p:nvSpPr>
+          <p:cNvPr id="16" name="TextBox 15"/>
+          <p:cNvSpPr txBox="1"/>
+          <p:nvPr/>
+        </p:nvSpPr>
+        <p:spPr>
+          <a:xfrm>
+            <a:off x="6446520" y="2103120"/>
+            <a:ext cx="2377440" cy="1005840"/>
+          </a:xfrm>
+          <a:prstGeom prst="rect">
+            <a:avLst/>
+          </a:prstGeom>
+          <a:noFill/>
+        </p:spPr>
+        <p:txBody>
+          <a:bodyPr wrap="square">
+            <a:spAutoFit/>
+          </a:bodyPr>
+          <a:lstStyle/>
+          <a:p>
+            <a:pPr algn="l"/>
+            <a:r>
+              <a:rPr sz="2200" b="1">
+                <a:solidFill>
+                  <a:srgbClr val="0F2A3D"/>
+                </a:solidFill>
+                <a:latin typeface="Calibri"/>
+              </a:rPr>
+              <a:t>Teslimat formu</a:t>
+            </a:r>
+          </a:p>
+        </p:txBody>
+      </p:sp>
+      <p:sp>
+        <p:nvSpPr>
+          <p:cNvPr id="17" name="TextBox 16"/>
+          <p:cNvSpPr txBox="1"/>
+          <p:nvPr/>
+        </p:nvSpPr>
+        <p:spPr>
+          <a:xfrm>
+            <a:off x="6446520" y="3200400"/>
+            <a:ext cx="2377440" cy="1005840"/>
+          </a:xfrm>
+          <a:prstGeom prst="rect">
+            <a:avLst/>
+          </a:prstGeom>
+          <a:noFill/>
+        </p:spPr>
+        <p:txBody>
+          <a:bodyPr wrap="square">
+            <a:spAutoFit/>
+          </a:bodyPr>
+          <a:lstStyle/>
+          <a:p>
+            <a:pPr algn="l"/>
+            <a:r>
+              <a:rPr sz="1600" b="0">
+                <a:solidFill>
+                  <a:srgbClr val="4D5C58"/>
+                </a:solidFill>
+                <a:latin typeface="Calibri"/>
+              </a:rPr>
+              <a:t>10 haneli telefon</a:t>
+            </a:r>
+          </a:p>
+        </p:txBody>
+      </p:sp>
+      <p:sp>
+        <p:nvSpPr>
+          <p:cNvPr id="18" name="Rounded Rectangle 17"/>
+          <p:cNvSpPr/>
+          <p:nvPr/>
+        </p:nvSpPr>
+        <p:spPr>
+          <a:xfrm>
+            <a:off x="9189720" y="1828800"/>
+            <a:ext cx="2743200" cy="2834640"/>
+          </a:xfrm>
+          <a:prstGeom prst="roundRect">
+            <a:avLst>
+              <a:gd name="adj" fmla="val 8000"/>
+            </a:avLst>
+          </a:prstGeom>
+          <a:solidFill>
+            <a:srgbClr val="FFFFFF"/>
+          </a:solidFill>
+          <a:ln>
+            <a:noFill/>
+          </a:ln>
+        </p:spPr>
+        <p:style>
+          <a:lnRef idx="1">
+            <a:schemeClr val="accent1"/>
+          </a:lnRef>
+          <a:fillRef idx="3">
+            <a:schemeClr val="accent1"/>
+          </a:fillRef>
+          <a:effectRef idx="2">
+            <a:schemeClr val="accent1"/>
+          </a:effectRef>
+          <a:fontRef idx="minor">
+            <a:schemeClr val="lt1"/>
+          </a:fontRef>
+        </p:style>
+        <p:txBody>
+          <a:bodyPr rtlCol="0" anchor="ctr"/>
+          <a:lstStyle/>
+          <a:p>
+            <a:pPr algn="ctr"/>
+          </a:p>
+        </p:txBody>
+      </p:sp>
+      <p:sp>
+        <p:nvSpPr>
+          <p:cNvPr id="19" name="TextBox 18"/>
+          <p:cNvSpPr txBox="1"/>
+          <p:nvPr/>
+        </p:nvSpPr>
+        <p:spPr>
+          <a:xfrm>
+            <a:off x="9372600" y="2103120"/>
+            <a:ext cx="2377440" cy="1005840"/>
+          </a:xfrm>
+          <a:prstGeom prst="rect">
+            <a:avLst/>
+          </a:prstGeom>
+          <a:noFill/>
+        </p:spPr>
+        <p:txBody>
+          <a:bodyPr wrap="square">
+            <a:spAutoFit/>
+          </a:bodyPr>
+          <a:lstStyle/>
+          <a:p>
+            <a:pPr algn="l"/>
+            <a:r>
+              <a:rPr sz="2200" b="1">
+                <a:solidFill>
+                  <a:srgbClr val="0F2A3D"/>
+                </a:solidFill>
+                <a:latin typeface="Calibri"/>
+              </a:rPr>
+              <a:t>Demo sipariş</a:t>
+            </a:r>
+          </a:p>
+        </p:txBody>
+      </p:sp>
+      <p:sp>
+        <p:nvSpPr>
+          <p:cNvPr id="20" name="TextBox 19"/>
+          <p:cNvSpPr txBox="1"/>
+          <p:nvPr/>
+        </p:nvSpPr>
+        <p:spPr>
+          <a:xfrm>
+            <a:off x="9372600" y="3200400"/>
+            <a:ext cx="2377440" cy="1005840"/>
+          </a:xfrm>
+          <a:prstGeom prst="rect">
+            <a:avLst/>
+          </a:prstGeom>
+          <a:noFill/>
+        </p:spPr>
+        <p:txBody>
+          <a:bodyPr wrap="square">
+            <a:spAutoFit/>
+          </a:bodyPr>
+          <a:lstStyle/>
+          <a:p>
+            <a:pPr algn="l"/>
+            <a:r>
+              <a:rPr sz="1600" b="0">
+                <a:solidFill>
+                  <a:srgbClr val="4D5C58"/>
+                </a:solidFill>
+                <a:latin typeface="Calibri"/>
+              </a:rPr>
+              <a:t>Gerçek ödeme yok</a:t>
             </a:r>
           </a:p>
         </p:txBody>
@@ -10594,7 +11006,7 @@
                 </a:solidFill>
                 <a:latin typeface="Calibri"/>
               </a:rPr>
-              <a:t>İTÜ: Test neden yapılır?</a:t>
+              <a:t>XAMPP ve uygulama mimarisi</a:t>
             </a:r>
           </a:p>
         </p:txBody>
@@ -10672,7 +11084,7 @@
                 </a:solidFill>
                 <a:latin typeface="Calibri"/>
               </a:rPr>
-              <a:t>Kampüs Kırtasiye  ·  İTÜ BİDB + TechTarget  ·  Rıdvan Çağlar Mutlu</a:t>
+              <a:t>Kampüs Kırtasiye  ·  TechTarget software testing  ·  Rıdvan Çağlar Mutlu</a:t>
             </a:r>
           </a:p>
         </p:txBody>
@@ -10720,7 +11132,7 @@
         </p:nvSpPr>
         <p:spPr>
           <a:xfrm>
-            <a:off x="457200" y="1188720"/>
+            <a:off x="457200" y="1234440"/>
             <a:ext cx="11155680" cy="5029200"/>
           </a:xfrm>
           <a:prstGeom prst="rect">
@@ -10740,13 +11152,13 @@
               </a:spcAft>
             </a:pPr>
             <a:r>
-              <a:rPr sz="1800" b="0">
+              <a:rPr sz="2000" b="0">
                 <a:solidFill>
                   <a:srgbClr val="12202B"/>
                 </a:solidFill>
                 <a:latin typeface="Calibri"/>
               </a:rPr>
-              <a:t>▸  Yazılımdaki hatalar kaçınılmazdır; sonuç para, zaman veya güven kaybı olabilir.</a:t>
+              <a:t>▸  Kurulum: C:/xampp/htdocs/kampus-kirtasiye</a:t>
             </a:r>
           </a:p>
           <a:p>
@@ -10756,13 +11168,13 @@
               </a:spcAft>
             </a:pPr>
             <a:r>
-              <a:rPr sz="1800" b="0">
+              <a:rPr sz="2000" b="0">
                 <a:solidFill>
                   <a:srgbClr val="12202B"/>
                 </a:solidFill>
                 <a:latin typeface="Calibri"/>
               </a:rPr>
-              <a:t>▸  Müşteriye (burada öğretmene) vermeden kaliteden emin olmak.</a:t>
+              <a:t>▸  Sunucu: Apache + PHP  ·  Kapı: /  Site: /v2/  Hatalı kanıt: /v1/</a:t>
             </a:r>
           </a:p>
           <a:p>
@@ -10772,13 +11184,13 @@
               </a:spcAft>
             </a:pPr>
             <a:r>
-              <a:rPr sz="1800" b="0">
+              <a:rPr sz="2000" b="0">
                 <a:solidFill>
                   <a:srgbClr val="12202B"/>
                 </a:solidFill>
                 <a:latin typeface="Calibri"/>
               </a:rPr>
-              <a:t>▸  Hatayı erken yakalamak: V1’de T04 ve T12 bulundu, V2’de kapatıldı.</a:t>
+              <a:t>▸  Veri: Ürünler PHP dizisinde, sepet $_SESSION içinde</a:t>
             </a:r>
           </a:p>
           <a:p>
@@ -10788,13 +11200,13 @@
               </a:spcAft>
             </a:pPr>
             <a:r>
-              <a:rPr sz="1800" b="0">
+              <a:rPr sz="2000" b="0">
                 <a:solidFill>
                   <a:srgbClr val="12202B"/>
                 </a:solidFill>
                 <a:latin typeface="Calibri"/>
               </a:rPr>
-              <a:t>▸  Yeniden iş ve düzeltme maliyetini düşürmek.</a:t>
+              <a:t>▸  Para: kuruş (int). Kampüs teslimatı her sepet için 14,90 TL</a:t>
             </a:r>
           </a:p>
           <a:p>
@@ -10804,13 +11216,13 @@
               </a:spcAft>
             </a:pPr>
             <a:r>
-              <a:rPr sz="1800" b="0">
+              <a:rPr sz="2000" b="0">
                 <a:solidFill>
                   <a:srgbClr val="12202B"/>
                 </a:solidFill>
                 <a:latin typeface="Calibri"/>
               </a:rPr>
-              <a:t>▸  TechTarget aynı gerekçeyi Starbucks kasa çökmesi ve Nissan hava yastığı örneğiyle anlatır.</a:t>
+              <a:t>▸  Akış: Tarayıcı isteği → Apache/PHP → HTML yanıtı</a:t>
             </a:r>
           </a:p>
         </p:txBody>
@@ -10992,7 +11404,7 @@
                 </a:solidFill>
                 <a:latin typeface="Calibri"/>
               </a:rPr>
-              <a:t>İTÜ test süreci: üç aşama</a:t>
+              <a:t>TechTarget tanımı ve bitirme ölçütü</a:t>
             </a:r>
           </a:p>
         </p:txBody>
@@ -11070,7 +11482,7 @@
                 </a:solidFill>
                 <a:latin typeface="Calibri"/>
               </a:rPr>
-              <a:t>Kampüs Kırtasiye  ·  İTÜ BİDB + TechTarget  ·  Rıdvan Çağlar Mutlu</a:t>
+              <a:t>Kampüs Kırtasiye  ·  TechTarget software testing  ·  Rıdvan Çağlar Mutlu</a:t>
             </a:r>
           </a:p>
         </p:txBody>
@@ -11112,59 +11524,14 @@
       </p:sp>
       <p:sp>
         <p:nvSpPr>
-          <p:cNvPr id="9" name="Rounded Rectangle 8"/>
-          <p:cNvSpPr/>
-          <p:nvPr/>
-        </p:nvSpPr>
-        <p:spPr>
-          <a:xfrm>
-            <a:off x="365760" y="1280160"/>
-            <a:ext cx="3703320" cy="4206240"/>
-          </a:xfrm>
-          <a:prstGeom prst="roundRect">
-            <a:avLst>
-              <a:gd name="adj" fmla="val 8000"/>
-            </a:avLst>
-          </a:prstGeom>
-          <a:solidFill>
-            <a:srgbClr val="FFFFFF"/>
-          </a:solidFill>
-          <a:ln>
-            <a:noFill/>
-          </a:ln>
-        </p:spPr>
-        <p:style>
-          <a:lnRef idx="1">
-            <a:schemeClr val="accent1"/>
-          </a:lnRef>
-          <a:fillRef idx="3">
-            <a:schemeClr val="accent1"/>
-          </a:fillRef>
-          <a:effectRef idx="2">
-            <a:schemeClr val="accent1"/>
-          </a:effectRef>
-          <a:fontRef idx="minor">
-            <a:schemeClr val="lt1"/>
-          </a:fontRef>
-        </p:style>
-        <p:txBody>
-          <a:bodyPr rtlCol="0" anchor="ctr"/>
-          <a:lstStyle/>
-          <a:p>
-            <a:pPr algn="ctr"/>
-          </a:p>
-        </p:txBody>
-      </p:sp>
-      <p:sp>
-        <p:nvSpPr>
-          <p:cNvPr id="10" name="TextBox 9"/>
+          <p:cNvPr id="9" name="TextBox 8"/>
           <p:cNvSpPr txBox="1"/>
           <p:nvPr/>
         </p:nvSpPr>
         <p:spPr>
           <a:xfrm>
-            <a:off x="594360" y="1508760"/>
-            <a:ext cx="3246120" cy="731520"/>
+            <a:off x="457200" y="1188720"/>
+            <a:ext cx="11155680" cy="5029200"/>
           </a:xfrm>
           <a:prstGeom prst="rect">
             <a:avLst/>
@@ -11177,280 +11544,99 @@
           </a:bodyPr>
           <a:lstStyle/>
           <a:p>
-            <a:pPr algn="l"/>
-            <a:r>
-              <a:rPr sz="2200" b="1">
-                <a:solidFill>
-                  <a:srgbClr val="0B6E4F"/>
-                </a:solidFill>
-                <a:latin typeface="Calibri"/>
-              </a:rPr>
-              <a:t>1. Hazırlık</a:t>
-            </a:r>
-          </a:p>
-        </p:txBody>
-      </p:sp>
-      <p:sp>
-        <p:nvSpPr>
-          <p:cNvPr id="11" name="TextBox 10"/>
-          <p:cNvSpPr txBox="1"/>
-          <p:nvPr/>
-        </p:nvSpPr>
-        <p:spPr>
-          <a:xfrm>
-            <a:off x="594360" y="2377440"/>
-            <a:ext cx="3246120" cy="2743200"/>
-          </a:xfrm>
-          <a:prstGeom prst="rect">
-            <a:avLst/>
-          </a:prstGeom>
-          <a:noFill/>
-        </p:spPr>
-        <p:txBody>
-          <a:bodyPr wrap="square">
-            <a:spAutoFit/>
-          </a:bodyPr>
-          <a:lstStyle/>
-          <a:p>
-            <a:pPr algn="l"/>
-            <a:r>
-              <a:rPr sz="1600" b="0">
+            <a:pPr>
+              <a:spcAft>
+                <a:spcPts val="900"/>
+              </a:spcAft>
+            </a:pPr>
+            <a:r>
+              <a:rPr sz="1800" b="0">
                 <a:solidFill>
                   <a:srgbClr val="12202B"/>
                 </a:solidFill>
                 <a:latin typeface="Calibri"/>
               </a:rPr>
-              <a:t>Doküman, kapsam, risk, ortam, görev, bitirme ölçütü, test case, test planı.</a:t>
-            </a:r>
-          </a:p>
-        </p:txBody>
-      </p:sp>
-      <p:sp>
-        <p:nvSpPr>
-          <p:cNvPr id="12" name="Rounded Rectangle 11"/>
-          <p:cNvSpPr/>
-          <p:nvPr/>
-        </p:nvSpPr>
-        <p:spPr>
-          <a:xfrm>
-            <a:off x="4251960" y="1280160"/>
-            <a:ext cx="3703320" cy="4206240"/>
-          </a:xfrm>
-          <a:prstGeom prst="roundRect">
-            <a:avLst>
-              <a:gd name="adj" fmla="val 8000"/>
-            </a:avLst>
-          </a:prstGeom>
-          <a:solidFill>
-            <a:srgbClr val="FFFFFF"/>
-          </a:solidFill>
-          <a:ln>
-            <a:noFill/>
-          </a:ln>
-        </p:spPr>
-        <p:style>
-          <a:lnRef idx="1">
-            <a:schemeClr val="accent1"/>
-          </a:lnRef>
-          <a:fillRef idx="3">
-            <a:schemeClr val="accent1"/>
-          </a:fillRef>
-          <a:effectRef idx="2">
-            <a:schemeClr val="accent1"/>
-          </a:effectRef>
-          <a:fontRef idx="minor">
-            <a:schemeClr val="lt1"/>
-          </a:fontRef>
-        </p:style>
-        <p:txBody>
-          <a:bodyPr rtlCol="0" anchor="ctr"/>
-          <a:lstStyle/>
-          <a:p>
-            <a:pPr algn="ctr"/>
-          </a:p>
-        </p:txBody>
-      </p:sp>
-      <p:sp>
-        <p:nvSpPr>
-          <p:cNvPr id="13" name="TextBox 12"/>
-          <p:cNvSpPr txBox="1"/>
-          <p:nvPr/>
-        </p:nvSpPr>
-        <p:spPr>
-          <a:xfrm>
-            <a:off x="4480560" y="1508760"/>
-            <a:ext cx="3246120" cy="731520"/>
-          </a:xfrm>
-          <a:prstGeom prst="rect">
-            <a:avLst/>
-          </a:prstGeom>
-          <a:noFill/>
-        </p:spPr>
-        <p:txBody>
-          <a:bodyPr wrap="square">
-            <a:spAutoFit/>
-          </a:bodyPr>
-          <a:lstStyle/>
-          <a:p>
-            <a:pPr algn="l"/>
-            <a:r>
-              <a:rPr sz="2200" b="1">
-                <a:solidFill>
-                  <a:srgbClr val="0B6E4F"/>
-                </a:solidFill>
-                <a:latin typeface="Calibri"/>
-              </a:rPr>
-              <a:t>2. Dinamik test</a:t>
-            </a:r>
-          </a:p>
-        </p:txBody>
-      </p:sp>
-      <p:sp>
-        <p:nvSpPr>
-          <p:cNvPr id="14" name="TextBox 13"/>
-          <p:cNvSpPr txBox="1"/>
-          <p:nvPr/>
-        </p:nvSpPr>
-        <p:spPr>
-          <a:xfrm>
-            <a:off x="4480560" y="2377440"/>
-            <a:ext cx="3246120" cy="2743200"/>
-          </a:xfrm>
-          <a:prstGeom prst="rect">
-            <a:avLst/>
-          </a:prstGeom>
-          <a:noFill/>
-        </p:spPr>
-        <p:txBody>
-          <a:bodyPr wrap="square">
-            <a:spAutoFit/>
-          </a:bodyPr>
-          <a:lstStyle/>
-          <a:p>
-            <a:pPr algn="l"/>
-            <a:r>
-              <a:rPr sz="1600" b="0">
+              <a:t>▸  Software testing: yazılımın işlevini değerlendirmek; hata, boşluk ve beklenen-sonuç farkını aramak.</a:t>
+            </a:r>
+          </a:p>
+          <a:p>
+            <a:pPr>
+              <a:spcAft>
+                <a:spcPts val="900"/>
+              </a:spcAft>
+            </a:pPr>
+            <a:r>
+              <a:rPr sz="1800" b="0">
                 <a:solidFill>
                   <a:srgbClr val="12202B"/>
                 </a:solidFill>
                 <a:latin typeface="Calibri"/>
               </a:rPr>
-              <a:t>Kod çalışırken birim, tümleyim, regresyon, performans, kabul, kara/beyaz kutu.</a:t>
-            </a:r>
-          </a:p>
-        </p:txBody>
-      </p:sp>
-      <p:sp>
-        <p:nvSpPr>
-          <p:cNvPr id="15" name="Rounded Rectangle 14"/>
-          <p:cNvSpPr/>
-          <p:nvPr/>
-        </p:nvSpPr>
-        <p:spPr>
-          <a:xfrm>
-            <a:off x="8138160" y="1280160"/>
-            <a:ext cx="3703320" cy="4206240"/>
-          </a:xfrm>
-          <a:prstGeom prst="roundRect">
-            <a:avLst>
-              <a:gd name="adj" fmla="val 8000"/>
-            </a:avLst>
-          </a:prstGeom>
-          <a:solidFill>
-            <a:srgbClr val="FFFFFF"/>
-          </a:solidFill>
-          <a:ln>
-            <a:noFill/>
-          </a:ln>
-        </p:spPr>
-        <p:style>
-          <a:lnRef idx="1">
-            <a:schemeClr val="accent1"/>
-          </a:lnRef>
-          <a:fillRef idx="3">
-            <a:schemeClr val="accent1"/>
-          </a:fillRef>
-          <a:effectRef idx="2">
-            <a:schemeClr val="accent1"/>
-          </a:effectRef>
-          <a:fontRef idx="minor">
-            <a:schemeClr val="lt1"/>
-          </a:fontRef>
-        </p:style>
-        <p:txBody>
-          <a:bodyPr rtlCol="0" anchor="ctr"/>
-          <a:lstStyle/>
-          <a:p>
-            <a:pPr algn="ctr"/>
-          </a:p>
-        </p:txBody>
-      </p:sp>
-      <p:sp>
-        <p:nvSpPr>
-          <p:cNvPr id="16" name="TextBox 15"/>
-          <p:cNvSpPr txBox="1"/>
-          <p:nvPr/>
-        </p:nvSpPr>
-        <p:spPr>
-          <a:xfrm>
-            <a:off x="8366760" y="1508760"/>
-            <a:ext cx="3246120" cy="731520"/>
-          </a:xfrm>
-          <a:prstGeom prst="rect">
-            <a:avLst/>
-          </a:prstGeom>
-          <a:noFill/>
-        </p:spPr>
-        <p:txBody>
-          <a:bodyPr wrap="square">
-            <a:spAutoFit/>
-          </a:bodyPr>
-          <a:lstStyle/>
-          <a:p>
-            <a:pPr algn="l"/>
-            <a:r>
-              <a:rPr sz="2200" b="1">
-                <a:solidFill>
-                  <a:srgbClr val="0B6E4F"/>
-                </a:solidFill>
-                <a:latin typeface="Calibri"/>
-              </a:rPr>
-              <a:t>3. Sonlandırma</a:t>
-            </a:r>
-          </a:p>
-        </p:txBody>
-      </p:sp>
-      <p:sp>
-        <p:nvSpPr>
-          <p:cNvPr id="17" name="TextBox 16"/>
-          <p:cNvSpPr txBox="1"/>
-          <p:nvPr/>
-        </p:nvSpPr>
-        <p:spPr>
-          <a:xfrm>
-            <a:off x="8366760" y="2377440"/>
-            <a:ext cx="3246120" cy="2743200"/>
-          </a:xfrm>
-          <a:prstGeom prst="rect">
-            <a:avLst/>
-          </a:prstGeom>
-          <a:noFill/>
-        </p:spPr>
-        <p:txBody>
-          <a:bodyPr wrap="square">
-            <a:spAutoFit/>
-          </a:bodyPr>
-          <a:lstStyle/>
-          <a:p>
-            <a:pPr algn="l"/>
-            <a:r>
-              <a:rPr sz="1600" b="0">
+              <a:t>▸  Amaç: canlıya çıkmadan (derste teslimden önce) hatayı kapatmak.</a:t>
+            </a:r>
+          </a:p>
+          <a:p>
+            <a:pPr>
+              <a:spcAft>
+                <a:spcPts val="900"/>
+              </a:spcAft>
+            </a:pPr>
+            <a:r>
+              <a:rPr sz="1800" b="0">
                 <a:solidFill>
                   <a:srgbClr val="12202B"/>
                 </a:solidFill>
                 <a:latin typeface="Calibri"/>
               </a:rPr>
-              <a:t>Ölçüt sağlandı mı? Hatalar kapandı mı? Kabul testine açılır mı?</a:t>
+              <a:t>▸  Giriş: doğru bilgi kabul, hatalı / kilitli hesap ret.</a:t>
+            </a:r>
+          </a:p>
+          <a:p>
+            <a:pPr>
+              <a:spcAft>
+                <a:spcPts val="900"/>
+              </a:spcAft>
+            </a:pPr>
+            <a:r>
+              <a:rPr sz="1800" b="0">
+                <a:solidFill>
+                  <a:srgbClr val="12202B"/>
+                </a:solidFill>
+                <a:latin typeface="Calibri"/>
+              </a:rPr>
+              <a:t>▸  Sepet: doğru ürün, adet, 14,90 TL kargo ve toplam.</a:t>
+            </a:r>
+          </a:p>
+          <a:p>
+            <a:pPr>
+              <a:spcAft>
+                <a:spcPts val="900"/>
+              </a:spcAft>
+            </a:pPr>
+            <a:r>
+              <a:rPr sz="1800" b="0">
+                <a:solidFill>
+                  <a:srgbClr val="12202B"/>
+                </a:solidFill>
+                <a:latin typeface="Calibri"/>
+              </a:rPr>
+              <a:t>▸  Form: zorunlu alanlar ve tam 10 rakamlı telefon.</a:t>
+            </a:r>
+          </a:p>
+          <a:p>
+            <a:pPr>
+              <a:spcAft>
+                <a:spcPts val="900"/>
+              </a:spcAft>
+            </a:pPr>
+            <a:r>
+              <a:rPr sz="1800" b="0">
+                <a:solidFill>
+                  <a:srgbClr val="12202B"/>
+                </a:solidFill>
+                <a:latin typeface="Calibri"/>
+              </a:rPr>
+              <a:t>▸  Sipariş: boş sepet ilerlemez; ürünlü sepet ilerler.</a:t>
             </a:r>
           </a:p>
         </p:txBody>
@@ -11632,7 +11818,7 @@
                 </a:solidFill>
                 <a:latin typeface="Calibri"/>
               </a:rPr>
-              <a:t>TechTarget: Yazılım testi nedir, neden önemli?</a:t>
+              <a:t>Test teknikleri ve test verileri</a:t>
             </a:r>
           </a:p>
         </p:txBody>
@@ -11710,7 +11896,7 @@
                 </a:solidFill>
                 <a:latin typeface="Calibri"/>
               </a:rPr>
-              <a:t>Kampüs Kırtasiye  ·  İTÜ BİDB + TechTarget  ·  Rıdvan Çağlar Mutlu</a:t>
+              <a:t>Kampüs Kırtasiye  ·  TechTarget software testing  ·  Rıdvan Çağlar Mutlu</a:t>
             </a:r>
           </a:p>
         </p:txBody>
@@ -11750,404 +11936,6 @@
           </a:p>
         </p:txBody>
       </p:sp>
-      <p:sp>
-        <p:nvSpPr>
-          <p:cNvPr id="9" name="TextBox 8"/>
-          <p:cNvSpPr txBox="1"/>
-          <p:nvPr/>
-        </p:nvSpPr>
-        <p:spPr>
-          <a:xfrm>
-            <a:off x="457200" y="1188720"/>
-            <a:ext cx="11155680" cy="5029200"/>
-          </a:xfrm>
-          <a:prstGeom prst="rect">
-            <a:avLst/>
-          </a:prstGeom>
-          <a:noFill/>
-        </p:spPr>
-        <p:txBody>
-          <a:bodyPr wrap="square">
-            <a:spAutoFit/>
-          </a:bodyPr>
-          <a:lstStyle/>
-          <a:p>
-            <a:pPr>
-              <a:spcAft>
-                <a:spcPts val="900"/>
-              </a:spcAft>
-            </a:pPr>
-            <a:r>
-              <a:rPr sz="1800" b="0">
-                <a:solidFill>
-                  <a:srgbClr val="12202B"/>
-                </a:solidFill>
-                <a:latin typeface="Calibri"/>
-              </a:rPr>
-              <a:t>▸  İşlevi değerlendirmek: hata, boşluk ve beklenen sonuç uyuşmazlığını aramak.</a:t>
-            </a:r>
-          </a:p>
-          <a:p>
-            <a:pPr>
-              <a:spcAft>
-                <a:spcPts val="900"/>
-              </a:spcAft>
-            </a:pPr>
-            <a:r>
-              <a:rPr sz="1800" b="0">
-                <a:solidFill>
-                  <a:srgbClr val="12202B"/>
-                </a:solidFill>
-                <a:latin typeface="Calibri"/>
-              </a:rPr>
-              <a:t>▸  Canlıya çıkmadan hata düzeltmek: kalite, güven ve maliyet.</a:t>
-            </a:r>
-          </a:p>
-          <a:p>
-            <a:pPr>
-              <a:spcAft>
-                <a:spcPts val="900"/>
-              </a:spcAft>
-            </a:pPr>
-            <a:r>
-              <a:rPr sz="1800" b="0">
-                <a:solidFill>
-                  <a:srgbClr val="12202B"/>
-                </a:solidFill>
-                <a:latin typeface="Calibri"/>
-              </a:rPr>
-              <a:t>▸  Erken hata = ucuz hata. Biz T04/T12’yi teslimden önce yakaladık.</a:t>
-            </a:r>
-          </a:p>
-          <a:p>
-            <a:pPr>
-              <a:spcAft>
-                <a:spcPts val="900"/>
-              </a:spcAft>
-            </a:pPr>
-            <a:r>
-              <a:rPr sz="1800" b="0">
-                <a:solidFill>
-                  <a:srgbClr val="12202B"/>
-                </a:solidFill>
-                <a:latin typeface="Calibri"/>
-              </a:rPr>
-              <a:t>▸  Otomasyon: aynı senaryoyu tekrar tekrar koşmak (Playwright).</a:t>
-            </a:r>
-          </a:p>
-          <a:p>
-            <a:pPr>
-              <a:spcAft>
-                <a:spcPts val="900"/>
-              </a:spcAft>
-            </a:pPr>
-            <a:r>
-              <a:rPr sz="1800" b="0">
-                <a:solidFill>
-                  <a:srgbClr val="12202B"/>
-                </a:solidFill>
-                <a:latin typeface="Calibri"/>
-              </a:rPr>
-              <a:t>▸  Regresyon atlanmamalı: düzeltme eski 13 senaryoyu bozmamalı.</a:t>
-            </a:r>
-          </a:p>
-        </p:txBody>
-      </p:sp>
-    </p:spTree>
-  </p:cSld>
-  <p:clrMapOvr>
-    <a:masterClrMapping/>
-  </p:clrMapOvr>
-</p:sld>
-</file>
-
-<file path=ppt/slides/slide7.xml><?xml version="1.0" encoding="utf-8"?>
-<p:sld xmlns:a="http://schemas.openxmlformats.org/drawingml/2006/main" xmlns:p="http://schemas.openxmlformats.org/presentationml/2006/main" xmlns:r="http://schemas.openxmlformats.org/officeDocument/2006/relationships">
-  <p:cSld>
-    <p:spTree>
-      <p:nvGrpSpPr>
-        <p:cNvPr id="1" name=""/>
-        <p:cNvGrpSpPr/>
-        <p:nvPr/>
-      </p:nvGrpSpPr>
-      <p:grpSpPr/>
-      <p:sp>
-        <p:nvSpPr>
-          <p:cNvPr id="2" name="Rectangle 1"/>
-          <p:cNvSpPr/>
-          <p:nvPr/>
-        </p:nvSpPr>
-        <p:spPr>
-          <a:xfrm>
-            <a:off x="0" y="0"/>
-            <a:ext cx="12191695" cy="6858000"/>
-          </a:xfrm>
-          <a:prstGeom prst="rect">
-            <a:avLst/>
-          </a:prstGeom>
-          <a:solidFill>
-            <a:srgbClr val="EEF3F1"/>
-          </a:solidFill>
-          <a:ln>
-            <a:noFill/>
-          </a:ln>
-        </p:spPr>
-        <p:style>
-          <a:lnRef idx="1">
-            <a:schemeClr val="accent1"/>
-          </a:lnRef>
-          <a:fillRef idx="3">
-            <a:schemeClr val="accent1"/>
-          </a:fillRef>
-          <a:effectRef idx="2">
-            <a:schemeClr val="accent1"/>
-          </a:effectRef>
-          <a:fontRef idx="minor">
-            <a:schemeClr val="lt1"/>
-          </a:fontRef>
-        </p:style>
-        <p:txBody>
-          <a:bodyPr rtlCol="0" anchor="ctr"/>
-          <a:lstStyle/>
-          <a:p>
-            <a:pPr algn="ctr"/>
-          </a:p>
-        </p:txBody>
-      </p:sp>
-      <p:sp>
-        <p:nvSpPr>
-          <p:cNvPr id="3" name="Rectangle 2"/>
-          <p:cNvSpPr/>
-          <p:nvPr/>
-        </p:nvSpPr>
-        <p:spPr>
-          <a:xfrm>
-            <a:off x="0" y="0"/>
-            <a:ext cx="12191695" cy="109728"/>
-          </a:xfrm>
-          <a:prstGeom prst="rect">
-            <a:avLst/>
-          </a:prstGeom>
-          <a:solidFill>
-            <a:srgbClr val="0B6E4F"/>
-          </a:solidFill>
-          <a:ln>
-            <a:noFill/>
-          </a:ln>
-        </p:spPr>
-        <p:style>
-          <a:lnRef idx="1">
-            <a:schemeClr val="accent1"/>
-          </a:lnRef>
-          <a:fillRef idx="3">
-            <a:schemeClr val="accent1"/>
-          </a:fillRef>
-          <a:effectRef idx="2">
-            <a:schemeClr val="accent1"/>
-          </a:effectRef>
-          <a:fontRef idx="minor">
-            <a:schemeClr val="lt1"/>
-          </a:fontRef>
-        </p:style>
-        <p:txBody>
-          <a:bodyPr rtlCol="0" anchor="ctr"/>
-          <a:lstStyle/>
-          <a:p>
-            <a:pPr algn="ctr"/>
-          </a:p>
-        </p:txBody>
-      </p:sp>
-      <p:sp>
-        <p:nvSpPr>
-          <p:cNvPr id="4" name="Rectangle 3"/>
-          <p:cNvSpPr/>
-          <p:nvPr/>
-        </p:nvSpPr>
-        <p:spPr>
-          <a:xfrm>
-            <a:off x="0" y="109728"/>
-            <a:ext cx="12191695" cy="841248"/>
-          </a:xfrm>
-          <a:prstGeom prst="rect">
-            <a:avLst/>
-          </a:prstGeom>
-          <a:solidFill>
-            <a:srgbClr val="0F2A3D"/>
-          </a:solidFill>
-          <a:ln>
-            <a:noFill/>
-          </a:ln>
-        </p:spPr>
-        <p:style>
-          <a:lnRef idx="1">
-            <a:schemeClr val="accent1"/>
-          </a:lnRef>
-          <a:fillRef idx="3">
-            <a:schemeClr val="accent1"/>
-          </a:fillRef>
-          <a:effectRef idx="2">
-            <a:schemeClr val="accent1"/>
-          </a:effectRef>
-          <a:fontRef idx="minor">
-            <a:schemeClr val="lt1"/>
-          </a:fontRef>
-        </p:style>
-        <p:txBody>
-          <a:bodyPr rtlCol="0" anchor="ctr"/>
-          <a:lstStyle/>
-          <a:p>
-            <a:pPr algn="ctr"/>
-          </a:p>
-        </p:txBody>
-      </p:sp>
-      <p:sp>
-        <p:nvSpPr>
-          <p:cNvPr id="5" name="TextBox 4"/>
-          <p:cNvSpPr txBox="1"/>
-          <p:nvPr/>
-        </p:nvSpPr>
-        <p:spPr>
-          <a:xfrm>
-            <a:off x="411480" y="256032"/>
-            <a:ext cx="10972800" cy="548640"/>
-          </a:xfrm>
-          <a:prstGeom prst="rect">
-            <a:avLst/>
-          </a:prstGeom>
-          <a:noFill/>
-        </p:spPr>
-        <p:txBody>
-          <a:bodyPr wrap="square">
-            <a:spAutoFit/>
-          </a:bodyPr>
-          <a:lstStyle/>
-          <a:p>
-            <a:pPr algn="l"/>
-            <a:r>
-              <a:rPr sz="2400" b="1">
-                <a:solidFill>
-                  <a:srgbClr val="FFFFFF"/>
-                </a:solidFill>
-                <a:latin typeface="Calibri"/>
-              </a:rPr>
-              <a:t>Test türleri: kaynakta var, biz hangisini yaptık?</a:t>
-            </a:r>
-          </a:p>
-        </p:txBody>
-      </p:sp>
-      <p:sp>
-        <p:nvSpPr>
-          <p:cNvPr id="6" name="Rectangle 5"/>
-          <p:cNvSpPr/>
-          <p:nvPr/>
-        </p:nvSpPr>
-        <p:spPr>
-          <a:xfrm>
-            <a:off x="0" y="6601968"/>
-            <a:ext cx="12191695" cy="256032"/>
-          </a:xfrm>
-          <a:prstGeom prst="rect">
-            <a:avLst/>
-          </a:prstGeom>
-          <a:solidFill>
-            <a:srgbClr val="0F2A3D"/>
-          </a:solidFill>
-          <a:ln>
-            <a:noFill/>
-          </a:ln>
-        </p:spPr>
-        <p:style>
-          <a:lnRef idx="1">
-            <a:schemeClr val="accent1"/>
-          </a:lnRef>
-          <a:fillRef idx="3">
-            <a:schemeClr val="accent1"/>
-          </a:fillRef>
-          <a:effectRef idx="2">
-            <a:schemeClr val="accent1"/>
-          </a:effectRef>
-          <a:fontRef idx="minor">
-            <a:schemeClr val="lt1"/>
-          </a:fontRef>
-        </p:style>
-        <p:txBody>
-          <a:bodyPr rtlCol="0" anchor="ctr"/>
-          <a:lstStyle/>
-          <a:p>
-            <a:pPr algn="ctr"/>
-          </a:p>
-        </p:txBody>
-      </p:sp>
-      <p:sp>
-        <p:nvSpPr>
-          <p:cNvPr id="7" name="TextBox 6"/>
-          <p:cNvSpPr txBox="1"/>
-          <p:nvPr/>
-        </p:nvSpPr>
-        <p:spPr>
-          <a:xfrm>
-            <a:off x="365760" y="6601968"/>
-            <a:ext cx="9601200" cy="256032"/>
-          </a:xfrm>
-          <a:prstGeom prst="rect">
-            <a:avLst/>
-          </a:prstGeom>
-          <a:noFill/>
-        </p:spPr>
-        <p:txBody>
-          <a:bodyPr wrap="square">
-            <a:spAutoFit/>
-          </a:bodyPr>
-          <a:lstStyle/>
-          <a:p>
-            <a:pPr algn="l"/>
-            <a:r>
-              <a:rPr sz="1100" b="0">
-                <a:solidFill>
-                  <a:srgbClr val="E7F3EA"/>
-                </a:solidFill>
-                <a:latin typeface="Calibri"/>
-              </a:rPr>
-              <a:t>Kampüs Kırtasiye  ·  İTÜ BİDB + TechTarget  ·  Rıdvan Çağlar Mutlu</a:t>
-            </a:r>
-          </a:p>
-        </p:txBody>
-      </p:sp>
-      <p:sp>
-        <p:nvSpPr>
-          <p:cNvPr id="8" name="TextBox 7"/>
-          <p:cNvSpPr txBox="1"/>
-          <p:nvPr/>
-        </p:nvSpPr>
-        <p:spPr>
-          <a:xfrm>
-            <a:off x="10607040" y="6601968"/>
-            <a:ext cx="1280160" cy="256032"/>
-          </a:xfrm>
-          <a:prstGeom prst="rect">
-            <a:avLst/>
-          </a:prstGeom>
-          <a:noFill/>
-        </p:spPr>
-        <p:txBody>
-          <a:bodyPr wrap="square">
-            <a:spAutoFit/>
-          </a:bodyPr>
-          <a:lstStyle/>
-          <a:p>
-            <a:pPr algn="r"/>
-            <a:r>
-              <a:rPr sz="1100" b="1">
-                <a:solidFill>
-                  <a:srgbClr val="0B6E4F"/>
-                </a:solidFill>
-                <a:latin typeface="Calibri"/>
-              </a:rPr>
-              <a:t>07</a:t>
-            </a:r>
-          </a:p>
-        </p:txBody>
-      </p:sp>
       <p:graphicFrame>
         <p:nvGraphicFramePr>
           <p:cNvPr id="9" name="Table 8"/>
@@ -12158,7 +11946,7 @@
         </p:nvGraphicFramePr>
         <p:xfrm>
           <a:off x="365760" y="1143000"/>
-          <a:ext cx="11430000" cy="4754880"/>
+          <a:ext cx="11430000" cy="3931920"/>
         </p:xfrm>
         <a:graphic>
           <a:graphicData uri="http://schemas.openxmlformats.org/drawingml/2006/table">
@@ -12171,7 +11959,7 @@
                 <a:gridCol w="3810000"/>
                 <a:gridCol w="3810000"/>
               </a:tblGrid>
-              <a:tr h="679268">
+              <a:tr h="786384">
                 <a:tc>
                   <a:txBody>
                     <a:bodyPr/>
@@ -12184,7 +11972,7 @@
                           </a:solidFill>
                           <a:latin typeface="Calibri"/>
                         </a:rPr>
-                        <a:t>Tür (kaynak)</a:t>
+                        <a:t>Teknik (TechTarget)</a:t>
                       </a:r>
                     </a:p>
                   </a:txBody>
@@ -12206,7 +11994,7 @@
                           </a:solidFill>
                           <a:latin typeface="Calibri"/>
                         </a:rPr>
-                        <a:t>Bu projede</a:t>
+                        <a:t>Girdi</a:t>
                       </a:r>
                     </a:p>
                   </a:txBody>
@@ -12228,7 +12016,7 @@
                           </a:solidFill>
                           <a:latin typeface="Calibri"/>
                         </a:rPr>
-                        <a:t>Kanıt</a:t>
+                        <a:t>Beklenti</a:t>
                       </a:r>
                     </a:p>
                   </a:txBody>
@@ -12239,7 +12027,7 @@
                   </a:tcPr>
                 </a:tc>
               </a:tr>
-              <a:tr h="679268">
+              <a:tr h="786384">
                 <a:tc>
                   <a:txBody>
                     <a:bodyPr/>
@@ -12252,7 +12040,7 @@
                           </a:solidFill>
                           <a:latin typeface="Calibri"/>
                         </a:rPr>
-                        <a:t>Kara kutu / fonksiyonel (İTÜ + TechTarget)</a:t>
+                        <a:t>Fonksiyonel / kara kutu</a:t>
                       </a:r>
                     </a:p>
                   </a:txBody>
@@ -12274,7 +12062,7 @@
                           </a:solidFill>
                           <a:latin typeface="Calibri"/>
                         </a:rPr>
-                        <a:t>Evet, asıl yöntem</a:t>
+                        <a:t>ridvan / Defter2026</a:t>
                       </a:r>
                     </a:p>
                   </a:txBody>
@@ -12296,7 +12084,7 @@
                           </a:solidFill>
                           <a:latin typeface="Calibri"/>
                         </a:rPr>
-                        <a:t>15 Playwright senaryosu</a:t>
+                        <a:t>Giriş kabul, 6 ürün</a:t>
                       </a:r>
                     </a:p>
                   </a:txBody>
@@ -12307,7 +12095,7 @@
                   </a:tcPr>
                 </a:tc>
               </a:tr>
-              <a:tr h="679268">
+              <a:tr h="786384">
                 <a:tc>
                   <a:txBody>
                     <a:bodyPr/>
@@ -12320,7 +12108,7 @@
                           </a:solidFill>
                           <a:latin typeface="Calibri"/>
                         </a:rPr>
-                        <a:t>Beyaz kutu (İTÜ)</a:t>
+                        <a:t>Negatif test</a:t>
                       </a:r>
                     </a:p>
                   </a:txBody>
@@ -12342,7 +12130,7 @@
                           </a:solidFill>
                           <a:latin typeface="Calibri"/>
                         </a:rPr>
-                        <a:t>Kısmen</a:t>
+                        <a:t>Yanlış şifre / boş alan / mezun</a:t>
                       </a:r>
                     </a:p>
                   </a:txBody>
@@ -12364,7 +12152,7 @@
                           </a:solidFill>
                           <a:latin typeface="Calibri"/>
                         </a:rPr>
-                        <a:t>Bozuk option ve PHP if incelendi</a:t>
+                        <a:t>Uyarı ve giriş engeli</a:t>
                       </a:r>
                     </a:p>
                   </a:txBody>
@@ -12375,7 +12163,7 @@
                   </a:tcPr>
                 </a:tc>
               </a:tr>
-              <a:tr h="679268">
+              <a:tr h="786384">
                 <a:tc>
                   <a:txBody>
                     <a:bodyPr/>
@@ -12388,7 +12176,7 @@
                           </a:solidFill>
                           <a:latin typeface="Calibri"/>
                         </a:rPr>
-                        <a:t>Tümleyim (İTÜ / TechTarget)</a:t>
+                        <a:t>Sınır komşuları</a:t>
                       </a:r>
                     </a:p>
                   </a:txBody>
@@ -12410,7 +12198,7 @@
                           </a:solidFill>
                           <a:latin typeface="Calibri"/>
                         </a:rPr>
-                        <a:t>Evet</a:t>
+                        <a:t>9 / 10 / 11 haneli telefon</a:t>
                       </a:r>
                     </a:p>
                   </a:txBody>
@@ -12432,7 +12220,7 @@
                           </a:solidFill>
                           <a:latin typeface="Calibri"/>
                         </a:rPr>
-                        <a:t>Giriş + sepet + form birlikte</a:t>
+                        <a:t>Ret / kabul / ret</a:t>
                       </a:r>
                     </a:p>
                   </a:txBody>
@@ -12443,7 +12231,7 @@
                   </a:tcPr>
                 </a:tc>
               </a:tr>
-              <a:tr h="679268">
+              <a:tr h="786384">
                 <a:tc>
                   <a:txBody>
                     <a:bodyPr/>
@@ -12456,7 +12244,7 @@
                           </a:solidFill>
                           <a:latin typeface="Calibri"/>
                         </a:rPr>
-                        <a:t>Regresyon</a:t>
+                        <a:t>Regresyon (atlanmamalı)</a:t>
                       </a:r>
                     </a:p>
                   </a:txBody>
@@ -12478,7 +12266,7 @@
                           </a:solidFill>
                           <a:latin typeface="Calibri"/>
                         </a:rPr>
-                        <a:t>Evet</a:t>
+                        <a:t>Düzeltme sonrası aynı 15 test</a:t>
                       </a:r>
                     </a:p>
                   </a:txBody>
@@ -12500,7 +12288,7 @@
                           </a:solidFill>
                           <a:latin typeface="Calibri"/>
                         </a:rPr>
-                        <a:t>Aynı 15 test V2’de yeniden</a:t>
+                        <a:t>Eski işlevler korunur</a:t>
                       </a:r>
                     </a:p>
                   </a:txBody>
@@ -12511,7 +12299,443 @@
                   </a:tcPr>
                 </a:tc>
               </a:tr>
-              <a:tr h="679268">
+            </a:tbl>
+          </a:graphicData>
+        </a:graphic>
+      </p:graphicFrame>
+    </p:spTree>
+  </p:cSld>
+  <p:clrMapOvr>
+    <a:masterClrMapping/>
+  </p:clrMapOvr>
+</p:sld>
+</file>
+
+<file path=ppt/slides/slide7.xml><?xml version="1.0" encoding="utf-8"?>
+<p:sld xmlns:a="http://schemas.openxmlformats.org/drawingml/2006/main" xmlns:p="http://schemas.openxmlformats.org/presentationml/2006/main" xmlns:r="http://schemas.openxmlformats.org/officeDocument/2006/relationships">
+  <p:cSld>
+    <p:spTree>
+      <p:nvGrpSpPr>
+        <p:cNvPr id="1" name=""/>
+        <p:cNvGrpSpPr/>
+        <p:nvPr/>
+      </p:nvGrpSpPr>
+      <p:grpSpPr/>
+      <p:sp>
+        <p:nvSpPr>
+          <p:cNvPr id="2" name="Rectangle 1"/>
+          <p:cNvSpPr/>
+          <p:nvPr/>
+        </p:nvSpPr>
+        <p:spPr>
+          <a:xfrm>
+            <a:off x="0" y="0"/>
+            <a:ext cx="12191695" cy="6858000"/>
+          </a:xfrm>
+          <a:prstGeom prst="rect">
+            <a:avLst/>
+          </a:prstGeom>
+          <a:solidFill>
+            <a:srgbClr val="EEF3F1"/>
+          </a:solidFill>
+          <a:ln>
+            <a:noFill/>
+          </a:ln>
+        </p:spPr>
+        <p:style>
+          <a:lnRef idx="1">
+            <a:schemeClr val="accent1"/>
+          </a:lnRef>
+          <a:fillRef idx="3">
+            <a:schemeClr val="accent1"/>
+          </a:fillRef>
+          <a:effectRef idx="2">
+            <a:schemeClr val="accent1"/>
+          </a:effectRef>
+          <a:fontRef idx="minor">
+            <a:schemeClr val="lt1"/>
+          </a:fontRef>
+        </p:style>
+        <p:txBody>
+          <a:bodyPr rtlCol="0" anchor="ctr"/>
+          <a:lstStyle/>
+          <a:p>
+            <a:pPr algn="ctr"/>
+          </a:p>
+        </p:txBody>
+      </p:sp>
+      <p:sp>
+        <p:nvSpPr>
+          <p:cNvPr id="3" name="Rectangle 2"/>
+          <p:cNvSpPr/>
+          <p:nvPr/>
+        </p:nvSpPr>
+        <p:spPr>
+          <a:xfrm>
+            <a:off x="0" y="0"/>
+            <a:ext cx="12191695" cy="109728"/>
+          </a:xfrm>
+          <a:prstGeom prst="rect">
+            <a:avLst/>
+          </a:prstGeom>
+          <a:solidFill>
+            <a:srgbClr val="0B6E4F"/>
+          </a:solidFill>
+          <a:ln>
+            <a:noFill/>
+          </a:ln>
+        </p:spPr>
+        <p:style>
+          <a:lnRef idx="1">
+            <a:schemeClr val="accent1"/>
+          </a:lnRef>
+          <a:fillRef idx="3">
+            <a:schemeClr val="accent1"/>
+          </a:fillRef>
+          <a:effectRef idx="2">
+            <a:schemeClr val="accent1"/>
+          </a:effectRef>
+          <a:fontRef idx="minor">
+            <a:schemeClr val="lt1"/>
+          </a:fontRef>
+        </p:style>
+        <p:txBody>
+          <a:bodyPr rtlCol="0" anchor="ctr"/>
+          <a:lstStyle/>
+          <a:p>
+            <a:pPr algn="ctr"/>
+          </a:p>
+        </p:txBody>
+      </p:sp>
+      <p:sp>
+        <p:nvSpPr>
+          <p:cNvPr id="4" name="Rectangle 3"/>
+          <p:cNvSpPr/>
+          <p:nvPr/>
+        </p:nvSpPr>
+        <p:spPr>
+          <a:xfrm>
+            <a:off x="0" y="109728"/>
+            <a:ext cx="12191695" cy="841248"/>
+          </a:xfrm>
+          <a:prstGeom prst="rect">
+            <a:avLst/>
+          </a:prstGeom>
+          <a:solidFill>
+            <a:srgbClr val="0F2A3D"/>
+          </a:solidFill>
+          <a:ln>
+            <a:noFill/>
+          </a:ln>
+        </p:spPr>
+        <p:style>
+          <a:lnRef idx="1">
+            <a:schemeClr val="accent1"/>
+          </a:lnRef>
+          <a:fillRef idx="3">
+            <a:schemeClr val="accent1"/>
+          </a:fillRef>
+          <a:effectRef idx="2">
+            <a:schemeClr val="accent1"/>
+          </a:effectRef>
+          <a:fontRef idx="minor">
+            <a:schemeClr val="lt1"/>
+          </a:fontRef>
+        </p:style>
+        <p:txBody>
+          <a:bodyPr rtlCol="0" anchor="ctr"/>
+          <a:lstStyle/>
+          <a:p>
+            <a:pPr algn="ctr"/>
+          </a:p>
+        </p:txBody>
+      </p:sp>
+      <p:sp>
+        <p:nvSpPr>
+          <p:cNvPr id="5" name="TextBox 4"/>
+          <p:cNvSpPr txBox="1"/>
+          <p:nvPr/>
+        </p:nvSpPr>
+        <p:spPr>
+          <a:xfrm>
+            <a:off x="411480" y="256032"/>
+            <a:ext cx="10972800" cy="548640"/>
+          </a:xfrm>
+          <a:prstGeom prst="rect">
+            <a:avLst/>
+          </a:prstGeom>
+          <a:noFill/>
+        </p:spPr>
+        <p:txBody>
+          <a:bodyPr wrap="square">
+            <a:spAutoFit/>
+          </a:bodyPr>
+          <a:lstStyle/>
+          <a:p>
+            <a:pPr algn="l"/>
+            <a:r>
+              <a:rPr sz="2400" b="1">
+                <a:solidFill>
+                  <a:srgbClr val="FFFFFF"/>
+                </a:solidFill>
+                <a:latin typeface="Calibri"/>
+              </a:rPr>
+              <a:t>Senaryolar: Giriş ve raf</a:t>
+            </a:r>
+          </a:p>
+        </p:txBody>
+      </p:sp>
+      <p:sp>
+        <p:nvSpPr>
+          <p:cNvPr id="6" name="Rectangle 5"/>
+          <p:cNvSpPr/>
+          <p:nvPr/>
+        </p:nvSpPr>
+        <p:spPr>
+          <a:xfrm>
+            <a:off x="0" y="6601968"/>
+            <a:ext cx="12191695" cy="256032"/>
+          </a:xfrm>
+          <a:prstGeom prst="rect">
+            <a:avLst/>
+          </a:prstGeom>
+          <a:solidFill>
+            <a:srgbClr val="0F2A3D"/>
+          </a:solidFill>
+          <a:ln>
+            <a:noFill/>
+          </a:ln>
+        </p:spPr>
+        <p:style>
+          <a:lnRef idx="1">
+            <a:schemeClr val="accent1"/>
+          </a:lnRef>
+          <a:fillRef idx="3">
+            <a:schemeClr val="accent1"/>
+          </a:fillRef>
+          <a:effectRef idx="2">
+            <a:schemeClr val="accent1"/>
+          </a:effectRef>
+          <a:fontRef idx="minor">
+            <a:schemeClr val="lt1"/>
+          </a:fontRef>
+        </p:style>
+        <p:txBody>
+          <a:bodyPr rtlCol="0" anchor="ctr"/>
+          <a:lstStyle/>
+          <a:p>
+            <a:pPr algn="ctr"/>
+          </a:p>
+        </p:txBody>
+      </p:sp>
+      <p:sp>
+        <p:nvSpPr>
+          <p:cNvPr id="7" name="TextBox 6"/>
+          <p:cNvSpPr txBox="1"/>
+          <p:nvPr/>
+        </p:nvSpPr>
+        <p:spPr>
+          <a:xfrm>
+            <a:off x="365760" y="6601968"/>
+            <a:ext cx="9601200" cy="256032"/>
+          </a:xfrm>
+          <a:prstGeom prst="rect">
+            <a:avLst/>
+          </a:prstGeom>
+          <a:noFill/>
+        </p:spPr>
+        <p:txBody>
+          <a:bodyPr wrap="square">
+            <a:spAutoFit/>
+          </a:bodyPr>
+          <a:lstStyle/>
+          <a:p>
+            <a:pPr algn="l"/>
+            <a:r>
+              <a:rPr sz="1100" b="0">
+                <a:solidFill>
+                  <a:srgbClr val="E7F3EA"/>
+                </a:solidFill>
+                <a:latin typeface="Calibri"/>
+              </a:rPr>
+              <a:t>Kampüs Kırtasiye  ·  TechTarget software testing  ·  Rıdvan Çağlar Mutlu</a:t>
+            </a:r>
+          </a:p>
+        </p:txBody>
+      </p:sp>
+      <p:sp>
+        <p:nvSpPr>
+          <p:cNvPr id="8" name="TextBox 7"/>
+          <p:cNvSpPr txBox="1"/>
+          <p:nvPr/>
+        </p:nvSpPr>
+        <p:spPr>
+          <a:xfrm>
+            <a:off x="10607040" y="6601968"/>
+            <a:ext cx="1280160" cy="256032"/>
+          </a:xfrm>
+          <a:prstGeom prst="rect">
+            <a:avLst/>
+          </a:prstGeom>
+          <a:noFill/>
+        </p:spPr>
+        <p:txBody>
+          <a:bodyPr wrap="square">
+            <a:spAutoFit/>
+          </a:bodyPr>
+          <a:lstStyle/>
+          <a:p>
+            <a:pPr algn="r"/>
+            <a:r>
+              <a:rPr sz="1100" b="1">
+                <a:solidFill>
+                  <a:srgbClr val="0B6E4F"/>
+                </a:solidFill>
+                <a:latin typeface="Calibri"/>
+              </a:rPr>
+              <a:t>07</a:t>
+            </a:r>
+          </a:p>
+        </p:txBody>
+      </p:sp>
+      <p:graphicFrame>
+        <p:nvGraphicFramePr>
+          <p:cNvPr id="9" name="Table 8"/>
+          <p:cNvGraphicFramePr>
+            <a:graphicFrameLocks noGrp="1"/>
+          </p:cNvGraphicFramePr>
+          <p:nvPr/>
+        </p:nvGraphicFramePr>
+        <p:xfrm>
+          <a:off x="365760" y="1143000"/>
+          <a:ext cx="11430000" cy="3931920"/>
+        </p:xfrm>
+        <a:graphic>
+          <a:graphicData uri="http://schemas.openxmlformats.org/drawingml/2006/table">
+            <a:tbl>
+              <a:tblPr firstRow="1" bandRow="1">
+                <a:tableStyleId>{5C22544A-7EE6-4342-B048-85BDC9FD1C3A}</a:tableStyleId>
+              </a:tblPr>
+              <a:tblGrid>
+                <a:gridCol w="2286000"/>
+                <a:gridCol w="2286000"/>
+                <a:gridCol w="2286000"/>
+                <a:gridCol w="2286000"/>
+                <a:gridCol w="2286000"/>
+              </a:tblGrid>
+              <a:tr h="655320">
+                <a:tc>
+                  <a:txBody>
+                    <a:bodyPr/>
+                    <a:lstStyle/>
+                    <a:p>
+                      <a:r>
+                        <a:rPr sz="1200" b="1">
+                          <a:solidFill>
+                            <a:srgbClr val="FFFFFF"/>
+                          </a:solidFill>
+                          <a:latin typeface="Calibri"/>
+                        </a:rPr>
+                        <a:t>ID</a:t>
+                      </a:r>
+                    </a:p>
+                  </a:txBody>
+                  <a:tcPr>
+                    <a:solidFill>
+                      <a:srgbClr val="0F2A3D"/>
+                    </a:solidFill>
+                  </a:tcPr>
+                </a:tc>
+                <a:tc>
+                  <a:txBody>
+                    <a:bodyPr/>
+                    <a:lstStyle/>
+                    <a:p>
+                      <a:r>
+                        <a:rPr sz="1200" b="1">
+                          <a:solidFill>
+                            <a:srgbClr val="FFFFFF"/>
+                          </a:solidFill>
+                          <a:latin typeface="Calibri"/>
+                        </a:rPr>
+                        <a:t>Senaryo</a:t>
+                      </a:r>
+                    </a:p>
+                  </a:txBody>
+                  <a:tcPr>
+                    <a:solidFill>
+                      <a:srgbClr val="0F2A3D"/>
+                    </a:solidFill>
+                  </a:tcPr>
+                </a:tc>
+                <a:tc>
+                  <a:txBody>
+                    <a:bodyPr/>
+                    <a:lstStyle/>
+                    <a:p>
+                      <a:r>
+                        <a:rPr sz="1200" b="1">
+                          <a:solidFill>
+                            <a:srgbClr val="FFFFFF"/>
+                          </a:solidFill>
+                          <a:latin typeface="Calibri"/>
+                        </a:rPr>
+                        <a:t>Beklenen</a:t>
+                      </a:r>
+                    </a:p>
+                  </a:txBody>
+                  <a:tcPr>
+                    <a:solidFill>
+                      <a:srgbClr val="0F2A3D"/>
+                    </a:solidFill>
+                  </a:tcPr>
+                </a:tc>
+                <a:tc>
+                  <a:txBody>
+                    <a:bodyPr/>
+                    <a:lstStyle/>
+                    <a:p>
+                      <a:r>
+                        <a:rPr sz="1200" b="1">
+                          <a:solidFill>
+                            <a:srgbClr val="FFFFFF"/>
+                          </a:solidFill>
+                          <a:latin typeface="Calibri"/>
+                        </a:rPr>
+                        <a:t>V1</a:t>
+                      </a:r>
+                    </a:p>
+                  </a:txBody>
+                  <a:tcPr>
+                    <a:solidFill>
+                      <a:srgbClr val="0F2A3D"/>
+                    </a:solidFill>
+                  </a:tcPr>
+                </a:tc>
+                <a:tc>
+                  <a:txBody>
+                    <a:bodyPr/>
+                    <a:lstStyle/>
+                    <a:p>
+                      <a:r>
+                        <a:rPr sz="1200" b="1">
+                          <a:solidFill>
+                            <a:srgbClr val="FFFFFF"/>
+                          </a:solidFill>
+                          <a:latin typeface="Calibri"/>
+                        </a:rPr>
+                        <a:t>V2</a:t>
+                      </a:r>
+                    </a:p>
+                  </a:txBody>
+                  <a:tcPr>
+                    <a:solidFill>
+                      <a:srgbClr val="0F2A3D"/>
+                    </a:solidFill>
+                  </a:tcPr>
+                </a:tc>
+              </a:tr>
+              <a:tr h="655320">
                 <a:tc>
                   <a:txBody>
                     <a:bodyPr/>
@@ -12524,7 +12748,7 @@
                           </a:solidFill>
                           <a:latin typeface="Calibri"/>
                         </a:rPr>
-                        <a:t>Kabul (UAT)</a:t>
+                        <a:t>T01</a:t>
                       </a:r>
                     </a:p>
                   </a:txBody>
@@ -12546,7 +12770,7 @@
                           </a:solidFill>
                           <a:latin typeface="Calibri"/>
                         </a:rPr>
-                        <a:t>Ders ölçütü</a:t>
+                        <a:t>Boş giriş</a:t>
                       </a:r>
                     </a:p>
                   </a:txBody>
@@ -12568,7 +12792,7 @@
                           </a:solidFill>
                           <a:latin typeface="Calibri"/>
                         </a:rPr>
-                        <a:t>15/15 ve canlı gösterim</a:t>
+                        <a:t>Kullanıcı adı uyarısı</a:t>
                       </a:r>
                     </a:p>
                   </a:txBody>
@@ -12578,8 +12802,6 @@
                     </a:solidFill>
                   </a:tcPr>
                 </a:tc>
-              </a:tr>
-              <a:tr h="679272">
                 <a:tc>
                   <a:txBody>
                     <a:bodyPr/>
@@ -12592,7 +12814,53 @@
                           </a:solidFill>
                           <a:latin typeface="Calibri"/>
                         </a:rPr>
-                        <a:t>Birim / performans / güvenlik</a:t>
+                        <a:t>Geçti</a:t>
+                      </a:r>
+                    </a:p>
+                  </a:txBody>
+                  <a:tcPr>
+                    <a:solidFill>
+                      <a:srgbClr val="FFFFFF"/>
+                    </a:solidFill>
+                  </a:tcPr>
+                </a:tc>
+                <a:tc>
+                  <a:txBody>
+                    <a:bodyPr/>
+                    <a:lstStyle/>
+                    <a:p>
+                      <a:r>
+                        <a:rPr sz="1200" b="0">
+                          <a:solidFill>
+                            <a:srgbClr val="12202B"/>
+                          </a:solidFill>
+                          <a:latin typeface="Calibri"/>
+                        </a:rPr>
+                        <a:t>Geçti</a:t>
+                      </a:r>
+                    </a:p>
+                  </a:txBody>
+                  <a:tcPr>
+                    <a:solidFill>
+                      <a:srgbClr val="FFFFFF"/>
+                    </a:solidFill>
+                  </a:tcPr>
+                </a:tc>
+              </a:tr>
+              <a:tr h="655320">
+                <a:tc>
+                  <a:txBody>
+                    <a:bodyPr/>
+                    <a:lstStyle/>
+                    <a:p>
+                      <a:r>
+                        <a:rPr sz="1200" b="0">
+                          <a:solidFill>
+                            <a:srgbClr val="12202B"/>
+                          </a:solidFill>
+                          <a:latin typeface="Calibri"/>
+                        </a:rPr>
+                        <a:t>T02</a:t>
                       </a:r>
                     </a:p>
                   </a:txBody>
@@ -12614,7 +12882,7 @@
                           </a:solidFill>
                           <a:latin typeface="Calibri"/>
                         </a:rPr>
-                        <a:t>Hayır</a:t>
+                        <a:t>Yanlış şifre</a:t>
                       </a:r>
                     </a:p>
                   </a:txBody>
@@ -12636,13 +12904,393 @@
                           </a:solidFill>
                           <a:latin typeface="Calibri"/>
                         </a:rPr>
-                        <a:t>Kapsam dışı, slayt 22</a:t>
+                        <a:t>Giriş reddi</a:t>
                       </a:r>
                     </a:p>
                   </a:txBody>
                   <a:tcPr>
                     <a:solidFill>
                       <a:srgbClr val="DCE8E3"/>
+                    </a:solidFill>
+                  </a:tcPr>
+                </a:tc>
+                <a:tc>
+                  <a:txBody>
+                    <a:bodyPr/>
+                    <a:lstStyle/>
+                    <a:p>
+                      <a:r>
+                        <a:rPr sz="1200" b="0">
+                          <a:solidFill>
+                            <a:srgbClr val="12202B"/>
+                          </a:solidFill>
+                          <a:latin typeface="Calibri"/>
+                        </a:rPr>
+                        <a:t>Geçti</a:t>
+                      </a:r>
+                    </a:p>
+                  </a:txBody>
+                  <a:tcPr>
+                    <a:solidFill>
+                      <a:srgbClr val="DCE8E3"/>
+                    </a:solidFill>
+                  </a:tcPr>
+                </a:tc>
+                <a:tc>
+                  <a:txBody>
+                    <a:bodyPr/>
+                    <a:lstStyle/>
+                    <a:p>
+                      <a:r>
+                        <a:rPr sz="1200" b="0">
+                          <a:solidFill>
+                            <a:srgbClr val="12202B"/>
+                          </a:solidFill>
+                          <a:latin typeface="Calibri"/>
+                        </a:rPr>
+                        <a:t>Geçti</a:t>
+                      </a:r>
+                    </a:p>
+                  </a:txBody>
+                  <a:tcPr>
+                    <a:solidFill>
+                      <a:srgbClr val="DCE8E3"/>
+                    </a:solidFill>
+                  </a:tcPr>
+                </a:tc>
+              </a:tr>
+              <a:tr h="655320">
+                <a:tc>
+                  <a:txBody>
+                    <a:bodyPr/>
+                    <a:lstStyle/>
+                    <a:p>
+                      <a:r>
+                        <a:rPr sz="1200" b="0">
+                          <a:solidFill>
+                            <a:srgbClr val="12202B"/>
+                          </a:solidFill>
+                          <a:latin typeface="Calibri"/>
+                        </a:rPr>
+                        <a:t>T03</a:t>
+                      </a:r>
+                    </a:p>
+                  </a:txBody>
+                  <a:tcPr>
+                    <a:solidFill>
+                      <a:srgbClr val="FFFFFF"/>
+                    </a:solidFill>
+                  </a:tcPr>
+                </a:tc>
+                <a:tc>
+                  <a:txBody>
+                    <a:bodyPr/>
+                    <a:lstStyle/>
+                    <a:p>
+                      <a:r>
+                        <a:rPr sz="1200" b="0">
+                          <a:solidFill>
+                            <a:srgbClr val="12202B"/>
+                          </a:solidFill>
+                          <a:latin typeface="Calibri"/>
+                        </a:rPr>
+                        <a:t>Geçerli giriş</a:t>
+                      </a:r>
+                    </a:p>
+                  </a:txBody>
+                  <a:tcPr>
+                    <a:solidFill>
+                      <a:srgbClr val="FFFFFF"/>
+                    </a:solidFill>
+                  </a:tcPr>
+                </a:tc>
+                <a:tc>
+                  <a:txBody>
+                    <a:bodyPr/>
+                    <a:lstStyle/>
+                    <a:p>
+                      <a:r>
+                        <a:rPr sz="1200" b="0">
+                          <a:solidFill>
+                            <a:srgbClr val="12202B"/>
+                          </a:solidFill>
+                          <a:latin typeface="Calibri"/>
+                        </a:rPr>
+                        <a:t>6 ürün</a:t>
+                      </a:r>
+                    </a:p>
+                  </a:txBody>
+                  <a:tcPr>
+                    <a:solidFill>
+                      <a:srgbClr val="FFFFFF"/>
+                    </a:solidFill>
+                  </a:tcPr>
+                </a:tc>
+                <a:tc>
+                  <a:txBody>
+                    <a:bodyPr/>
+                    <a:lstStyle/>
+                    <a:p>
+                      <a:r>
+                        <a:rPr sz="1200" b="0">
+                          <a:solidFill>
+                            <a:srgbClr val="12202B"/>
+                          </a:solidFill>
+                          <a:latin typeface="Calibri"/>
+                        </a:rPr>
+                        <a:t>Geçti</a:t>
+                      </a:r>
+                    </a:p>
+                  </a:txBody>
+                  <a:tcPr>
+                    <a:solidFill>
+                      <a:srgbClr val="FFFFFF"/>
+                    </a:solidFill>
+                  </a:tcPr>
+                </a:tc>
+                <a:tc>
+                  <a:txBody>
+                    <a:bodyPr/>
+                    <a:lstStyle/>
+                    <a:p>
+                      <a:r>
+                        <a:rPr sz="1200" b="0">
+                          <a:solidFill>
+                            <a:srgbClr val="12202B"/>
+                          </a:solidFill>
+                          <a:latin typeface="Calibri"/>
+                        </a:rPr>
+                        <a:t>Geçti</a:t>
+                      </a:r>
+                    </a:p>
+                  </a:txBody>
+                  <a:tcPr>
+                    <a:solidFill>
+                      <a:srgbClr val="FFFFFF"/>
+                    </a:solidFill>
+                  </a:tcPr>
+                </a:tc>
+              </a:tr>
+              <a:tr h="655320">
+                <a:tc>
+                  <a:txBody>
+                    <a:bodyPr/>
+                    <a:lstStyle/>
+                    <a:p>
+                      <a:r>
+                        <a:rPr sz="1200" b="0">
+                          <a:solidFill>
+                            <a:srgbClr val="12202B"/>
+                          </a:solidFill>
+                          <a:latin typeface="Calibri"/>
+                        </a:rPr>
+                        <a:t>T04</a:t>
+                      </a:r>
+                    </a:p>
+                  </a:txBody>
+                  <a:tcPr>
+                    <a:solidFill>
+                      <a:srgbClr val="DCE8E3"/>
+                    </a:solidFill>
+                  </a:tcPr>
+                </a:tc>
+                <a:tc>
+                  <a:txBody>
+                    <a:bodyPr/>
+                    <a:lstStyle/>
+                    <a:p>
+                      <a:r>
+                        <a:rPr sz="1200" b="0">
+                          <a:solidFill>
+                            <a:srgbClr val="12202B"/>
+                          </a:solidFill>
+                          <a:latin typeface="Calibri"/>
+                        </a:rPr>
+                        <a:t>Kırtasiye filtresi</a:t>
+                      </a:r>
+                    </a:p>
+                  </a:txBody>
+                  <a:tcPr>
+                    <a:solidFill>
+                      <a:srgbClr val="DCE8E3"/>
+                    </a:solidFill>
+                  </a:tcPr>
+                </a:tc>
+                <a:tc>
+                  <a:txBody>
+                    <a:bodyPr/>
+                    <a:lstStyle/>
+                    <a:p>
+                      <a:r>
+                        <a:rPr sz="1200" b="0">
+                          <a:solidFill>
+                            <a:srgbClr val="12202B"/>
+                          </a:solidFill>
+                          <a:latin typeface="Calibri"/>
+                        </a:rPr>
+                        <a:t>4 ürün</a:t>
+                      </a:r>
+                    </a:p>
+                  </a:txBody>
+                  <a:tcPr>
+                    <a:solidFill>
+                      <a:srgbClr val="DCE8E3"/>
+                    </a:solidFill>
+                  </a:tcPr>
+                </a:tc>
+                <a:tc>
+                  <a:txBody>
+                    <a:bodyPr/>
+                    <a:lstStyle/>
+                    <a:p>
+                      <a:r>
+                        <a:rPr sz="1200" b="0">
+                          <a:solidFill>
+                            <a:srgbClr val="12202B"/>
+                          </a:solidFill>
+                          <a:latin typeface="Calibri"/>
+                        </a:rPr>
+                        <a:t>Başarısız</a:t>
+                      </a:r>
+                    </a:p>
+                  </a:txBody>
+                  <a:tcPr>
+                    <a:solidFill>
+                      <a:srgbClr val="DCE8E3"/>
+                    </a:solidFill>
+                  </a:tcPr>
+                </a:tc>
+                <a:tc>
+                  <a:txBody>
+                    <a:bodyPr/>
+                    <a:lstStyle/>
+                    <a:p>
+                      <a:r>
+                        <a:rPr sz="1200" b="0">
+                          <a:solidFill>
+                            <a:srgbClr val="12202B"/>
+                          </a:solidFill>
+                          <a:latin typeface="Calibri"/>
+                        </a:rPr>
+                        <a:t>Geçti</a:t>
+                      </a:r>
+                    </a:p>
+                  </a:txBody>
+                  <a:tcPr>
+                    <a:solidFill>
+                      <a:srgbClr val="DCE8E3"/>
+                    </a:solidFill>
+                  </a:tcPr>
+                </a:tc>
+              </a:tr>
+              <a:tr h="655320">
+                <a:tc>
+                  <a:txBody>
+                    <a:bodyPr/>
+                    <a:lstStyle/>
+                    <a:p>
+                      <a:r>
+                        <a:rPr sz="1200" b="0">
+                          <a:solidFill>
+                            <a:srgbClr val="12202B"/>
+                          </a:solidFill>
+                          <a:latin typeface="Calibri"/>
+                        </a:rPr>
+                        <a:t>T05</a:t>
+                      </a:r>
+                    </a:p>
+                  </a:txBody>
+                  <a:tcPr>
+                    <a:solidFill>
+                      <a:srgbClr val="FFFFFF"/>
+                    </a:solidFill>
+                  </a:tcPr>
+                </a:tc>
+                <a:tc>
+                  <a:txBody>
+                    <a:bodyPr/>
+                    <a:lstStyle/>
+                    <a:p>
+                      <a:r>
+                        <a:rPr sz="1200" b="0">
+                          <a:solidFill>
+                            <a:srgbClr val="12202B"/>
+                          </a:solidFill>
+                          <a:latin typeface="Calibri"/>
+                        </a:rPr>
+                        <a:t>Defter ekleme</a:t>
+                      </a:r>
+                    </a:p>
+                  </a:txBody>
+                  <a:tcPr>
+                    <a:solidFill>
+                      <a:srgbClr val="FFFFFF"/>
+                    </a:solidFill>
+                  </a:tcPr>
+                </a:tc>
+                <a:tc>
+                  <a:txBody>
+                    <a:bodyPr/>
+                    <a:lstStyle/>
+                    <a:p>
+                      <a:r>
+                        <a:rPr sz="1200" b="0">
+                          <a:solidFill>
+                            <a:srgbClr val="12202B"/>
+                          </a:solidFill>
+                          <a:latin typeface="Calibri"/>
+                        </a:rPr>
+                        <a:t>1 adet, 54,90 TL</a:t>
+                      </a:r>
+                    </a:p>
+                  </a:txBody>
+                  <a:tcPr>
+                    <a:solidFill>
+                      <a:srgbClr val="FFFFFF"/>
+                    </a:solidFill>
+                  </a:tcPr>
+                </a:tc>
+                <a:tc>
+                  <a:txBody>
+                    <a:bodyPr/>
+                    <a:lstStyle/>
+                    <a:p>
+                      <a:r>
+                        <a:rPr sz="1200" b="0">
+                          <a:solidFill>
+                            <a:srgbClr val="12202B"/>
+                          </a:solidFill>
+                          <a:latin typeface="Calibri"/>
+                        </a:rPr>
+                        <a:t>Geçti</a:t>
+                      </a:r>
+                    </a:p>
+                  </a:txBody>
+                  <a:tcPr>
+                    <a:solidFill>
+                      <a:srgbClr val="FFFFFF"/>
+                    </a:solidFill>
+                  </a:tcPr>
+                </a:tc>
+                <a:tc>
+                  <a:txBody>
+                    <a:bodyPr/>
+                    <a:lstStyle/>
+                    <a:p>
+                      <a:r>
+                        <a:rPr sz="1200" b="0">
+                          <a:solidFill>
+                            <a:srgbClr val="12202B"/>
+                          </a:solidFill>
+                          <a:latin typeface="Calibri"/>
+                        </a:rPr>
+                        <a:t>Geçti</a:t>
+                      </a:r>
+                    </a:p>
+                  </a:txBody>
+                  <a:tcPr>
+                    <a:solidFill>
+                      <a:srgbClr val="FFFFFF"/>
                     </a:solidFill>
                   </a:tcPr>
                 </a:tc>
@@ -12828,7 +13476,7 @@
                 </a:solidFill>
                 <a:latin typeface="Calibri"/>
               </a:rPr>
-              <a:t>Hazırlık: ne test edilir, ne edilmez?</a:t>
+              <a:t>Senaryolar: Sepet ve form</a:t>
             </a:r>
           </a:p>
         </p:txBody>
@@ -12906,7 +13554,7 @@
                 </a:solidFill>
                 <a:latin typeface="Calibri"/>
               </a:rPr>
-              <a:t>Kampüs Kırtasiye  ·  İTÜ BİDB + TechTarget  ·  Rıdvan Çağlar Mutlu</a:t>
+              <a:t>Kampüs Kırtasiye  ·  TechTarget software testing  ·  Rıdvan Çağlar Mutlu</a:t>
             </a:r>
           </a:p>
         </p:txBody>
@@ -12946,180 +13594,707 @@
           </a:p>
         </p:txBody>
       </p:sp>
-      <p:sp>
-        <p:nvSpPr>
-          <p:cNvPr id="9" name="TextBox 8"/>
-          <p:cNvSpPr txBox="1"/>
-          <p:nvPr/>
-        </p:nvSpPr>
-        <p:spPr>
-          <a:xfrm>
-            <a:off x="457200" y="1143000"/>
-            <a:ext cx="5486400" cy="5029200"/>
-          </a:xfrm>
-          <a:prstGeom prst="rect">
-            <a:avLst/>
-          </a:prstGeom>
-          <a:noFill/>
-        </p:spPr>
-        <p:txBody>
-          <a:bodyPr wrap="square">
-            <a:spAutoFit/>
-          </a:bodyPr>
-          <a:lstStyle/>
-          <a:p>
-            <a:pPr>
-              <a:spcAft>
-                <a:spcPts val="900"/>
-              </a:spcAft>
-            </a:pPr>
-            <a:r>
-              <a:rPr sz="1700" b="0">
-                <a:solidFill>
-                  <a:srgbClr val="12202B"/>
-                </a:solidFill>
-                <a:latin typeface="Calibri"/>
-              </a:rPr>
-              <a:t>▸  Edilecek: giriş, kilitli hesap, 6 ürün, kırtasiye filtresi.</a:t>
-            </a:r>
-          </a:p>
-          <a:p>
-            <a:pPr>
-              <a:spcAft>
-                <a:spcPts val="900"/>
-              </a:spcAft>
-            </a:pPr>
-            <a:r>
-              <a:rPr sz="1700" b="0">
-                <a:solidFill>
-                  <a:srgbClr val="12202B"/>
-                </a:solidFill>
-                <a:latin typeface="Calibri"/>
-              </a:rPr>
-              <a:t>▸  Edilecek: sepet adedi, 14,90 TL kargo, 398,80 TL.</a:t>
-            </a:r>
-          </a:p>
-          <a:p>
-            <a:pPr>
-              <a:spcAft>
-                <a:spcPts val="900"/>
-              </a:spcAft>
-            </a:pPr>
-            <a:r>
-              <a:rPr sz="1700" b="0">
-                <a:solidFill>
-                  <a:srgbClr val="12202B"/>
-                </a:solidFill>
-                <a:latin typeface="Calibri"/>
-              </a:rPr>
-              <a:t>▸  Edilecek: 9 / 10 / 11 haneli telefon.</a:t>
-            </a:r>
-          </a:p>
-          <a:p>
-            <a:pPr>
-              <a:spcAft>
-                <a:spcPts val="900"/>
-              </a:spcAft>
-            </a:pPr>
-            <a:r>
-              <a:rPr sz="1700" b="0">
-                <a:solidFill>
-                  <a:srgbClr val="12202B"/>
-                </a:solidFill>
-                <a:latin typeface="Calibri"/>
-              </a:rPr>
-              <a:t>▸  Edilecek: boş sepet yasağı, çıkış sonrası koruma.</a:t>
-            </a:r>
-          </a:p>
-        </p:txBody>
-      </p:sp>
-      <p:sp>
-        <p:nvSpPr>
-          <p:cNvPr id="10" name="TextBox 9"/>
-          <p:cNvSpPr txBox="1"/>
-          <p:nvPr/>
-        </p:nvSpPr>
-        <p:spPr>
-          <a:xfrm>
-            <a:off x="6126480" y="1143000"/>
-            <a:ext cx="5486400" cy="5029200"/>
-          </a:xfrm>
-          <a:prstGeom prst="rect">
-            <a:avLst/>
-          </a:prstGeom>
-          <a:noFill/>
-        </p:spPr>
-        <p:txBody>
-          <a:bodyPr wrap="square">
-            <a:spAutoFit/>
-          </a:bodyPr>
-          <a:lstStyle/>
-          <a:p>
-            <a:pPr>
-              <a:spcAft>
-                <a:spcPts val="900"/>
-              </a:spcAft>
-            </a:pPr>
-            <a:r>
-              <a:rPr sz="1700" b="0">
-                <a:solidFill>
-                  <a:srgbClr val="12202B"/>
-                </a:solidFill>
-                <a:latin typeface="Calibri"/>
-              </a:rPr>
-              <a:t>▸  Edilmeyecek: yük / performans testi.</a:t>
-            </a:r>
-          </a:p>
-          <a:p>
-            <a:pPr>
-              <a:spcAft>
-                <a:spcPts val="900"/>
-              </a:spcAft>
-            </a:pPr>
-            <a:r>
-              <a:rPr sz="1700" b="0">
-                <a:solidFill>
-                  <a:srgbClr val="12202B"/>
-                </a:solidFill>
-                <a:latin typeface="Calibri"/>
-              </a:rPr>
-              <a:t>▸  Edilmeyecek: sızma / XSS taraması.</a:t>
-            </a:r>
-          </a:p>
-          <a:p>
-            <a:pPr>
-              <a:spcAft>
-                <a:spcPts val="900"/>
-              </a:spcAft>
-            </a:pPr>
-            <a:r>
-              <a:rPr sz="1700" b="0">
-                <a:solidFill>
-                  <a:srgbClr val="12202B"/>
-                </a:solidFill>
-                <a:latin typeface="Calibri"/>
-              </a:rPr>
-              <a:t>▸  Edilmeyecek: mobil ve gerçek ödeme.</a:t>
-            </a:r>
-          </a:p>
-          <a:p>
-            <a:pPr>
-              <a:spcAft>
-                <a:spcPts val="900"/>
-              </a:spcAft>
-            </a:pPr>
-            <a:r>
-              <a:rPr sz="1700" b="0">
-                <a:solidFill>
-                  <a:srgbClr val="12202B"/>
-                </a:solidFill>
-                <a:latin typeface="Calibri"/>
-              </a:rPr>
-              <a:t>▸  Bitirme: V2’de 15/15, T04 ve T12 kapanmış.</a:t>
-            </a:r>
-          </a:p>
-        </p:txBody>
-      </p:sp>
+      <p:graphicFrame>
+        <p:nvGraphicFramePr>
+          <p:cNvPr id="9" name="Table 8"/>
+          <p:cNvGraphicFramePr>
+            <a:graphicFrameLocks noGrp="1"/>
+          </p:cNvGraphicFramePr>
+          <p:nvPr/>
+        </p:nvGraphicFramePr>
+        <p:xfrm>
+          <a:off x="365760" y="1143000"/>
+          <a:ext cx="11430000" cy="3931920"/>
+        </p:xfrm>
+        <a:graphic>
+          <a:graphicData uri="http://schemas.openxmlformats.org/drawingml/2006/table">
+            <a:tbl>
+              <a:tblPr firstRow="1" bandRow="1">
+                <a:tableStyleId>{5C22544A-7EE6-4342-B048-85BDC9FD1C3A}</a:tableStyleId>
+              </a:tblPr>
+              <a:tblGrid>
+                <a:gridCol w="2286000"/>
+                <a:gridCol w="2286000"/>
+                <a:gridCol w="2286000"/>
+                <a:gridCol w="2286000"/>
+                <a:gridCol w="2286000"/>
+              </a:tblGrid>
+              <a:tr h="655320">
+                <a:tc>
+                  <a:txBody>
+                    <a:bodyPr/>
+                    <a:lstStyle/>
+                    <a:p>
+                      <a:r>
+                        <a:rPr sz="1200" b="1">
+                          <a:solidFill>
+                            <a:srgbClr val="FFFFFF"/>
+                          </a:solidFill>
+                          <a:latin typeface="Calibri"/>
+                        </a:rPr>
+                        <a:t>ID</a:t>
+                      </a:r>
+                    </a:p>
+                  </a:txBody>
+                  <a:tcPr>
+                    <a:solidFill>
+                      <a:srgbClr val="0F2A3D"/>
+                    </a:solidFill>
+                  </a:tcPr>
+                </a:tc>
+                <a:tc>
+                  <a:txBody>
+                    <a:bodyPr/>
+                    <a:lstStyle/>
+                    <a:p>
+                      <a:r>
+                        <a:rPr sz="1200" b="1">
+                          <a:solidFill>
+                            <a:srgbClr val="FFFFFF"/>
+                          </a:solidFill>
+                          <a:latin typeface="Calibri"/>
+                        </a:rPr>
+                        <a:t>Senaryo</a:t>
+                      </a:r>
+                    </a:p>
+                  </a:txBody>
+                  <a:tcPr>
+                    <a:solidFill>
+                      <a:srgbClr val="0F2A3D"/>
+                    </a:solidFill>
+                  </a:tcPr>
+                </a:tc>
+                <a:tc>
+                  <a:txBody>
+                    <a:bodyPr/>
+                    <a:lstStyle/>
+                    <a:p>
+                      <a:r>
+                        <a:rPr sz="1200" b="1">
+                          <a:solidFill>
+                            <a:srgbClr val="FFFFFF"/>
+                          </a:solidFill>
+                          <a:latin typeface="Calibri"/>
+                        </a:rPr>
+                        <a:t>Beklenen</a:t>
+                      </a:r>
+                    </a:p>
+                  </a:txBody>
+                  <a:tcPr>
+                    <a:solidFill>
+                      <a:srgbClr val="0F2A3D"/>
+                    </a:solidFill>
+                  </a:tcPr>
+                </a:tc>
+                <a:tc>
+                  <a:txBody>
+                    <a:bodyPr/>
+                    <a:lstStyle/>
+                    <a:p>
+                      <a:r>
+                        <a:rPr sz="1200" b="1">
+                          <a:solidFill>
+                            <a:srgbClr val="FFFFFF"/>
+                          </a:solidFill>
+                          <a:latin typeface="Calibri"/>
+                        </a:rPr>
+                        <a:t>V1</a:t>
+                      </a:r>
+                    </a:p>
+                  </a:txBody>
+                  <a:tcPr>
+                    <a:solidFill>
+                      <a:srgbClr val="0F2A3D"/>
+                    </a:solidFill>
+                  </a:tcPr>
+                </a:tc>
+                <a:tc>
+                  <a:txBody>
+                    <a:bodyPr/>
+                    <a:lstStyle/>
+                    <a:p>
+                      <a:r>
+                        <a:rPr sz="1200" b="1">
+                          <a:solidFill>
+                            <a:srgbClr val="FFFFFF"/>
+                          </a:solidFill>
+                          <a:latin typeface="Calibri"/>
+                        </a:rPr>
+                        <a:t>V2</a:t>
+                      </a:r>
+                    </a:p>
+                  </a:txBody>
+                  <a:tcPr>
+                    <a:solidFill>
+                      <a:srgbClr val="0F2A3D"/>
+                    </a:solidFill>
+                  </a:tcPr>
+                </a:tc>
+              </a:tr>
+              <a:tr h="655320">
+                <a:tc>
+                  <a:txBody>
+                    <a:bodyPr/>
+                    <a:lstStyle/>
+                    <a:p>
+                      <a:r>
+                        <a:rPr sz="1200" b="0">
+                          <a:solidFill>
+                            <a:srgbClr val="12202B"/>
+                          </a:solidFill>
+                          <a:latin typeface="Calibri"/>
+                        </a:rPr>
+                        <a:t>T06</a:t>
+                      </a:r>
+                    </a:p>
+                  </a:txBody>
+                  <a:tcPr>
+                    <a:solidFill>
+                      <a:srgbClr val="FFFFFF"/>
+                    </a:solidFill>
+                  </a:tcPr>
+                </a:tc>
+                <a:tc>
+                  <a:txBody>
+                    <a:bodyPr/>
+                    <a:lstStyle/>
+                    <a:p>
+                      <a:r>
+                        <a:rPr sz="1200" b="0">
+                          <a:solidFill>
+                            <a:srgbClr val="12202B"/>
+                          </a:solidFill>
+                          <a:latin typeface="Calibri"/>
+                        </a:rPr>
+                        <a:t>Defteri kaldır</a:t>
+                      </a:r>
+                    </a:p>
+                  </a:txBody>
+                  <a:tcPr>
+                    <a:solidFill>
+                      <a:srgbClr val="FFFFFF"/>
+                    </a:solidFill>
+                  </a:tcPr>
+                </a:tc>
+                <a:tc>
+                  <a:txBody>
+                    <a:bodyPr/>
+                    <a:lstStyle/>
+                    <a:p>
+                      <a:r>
+                        <a:rPr sz="1200" b="0">
+                          <a:solidFill>
+                            <a:srgbClr val="12202B"/>
+                          </a:solidFill>
+                          <a:latin typeface="Calibri"/>
+                        </a:rPr>
+                        <a:t>0 ürün, 0,00 TL</a:t>
+                      </a:r>
+                    </a:p>
+                  </a:txBody>
+                  <a:tcPr>
+                    <a:solidFill>
+                      <a:srgbClr val="FFFFFF"/>
+                    </a:solidFill>
+                  </a:tcPr>
+                </a:tc>
+                <a:tc>
+                  <a:txBody>
+                    <a:bodyPr/>
+                    <a:lstStyle/>
+                    <a:p>
+                      <a:r>
+                        <a:rPr sz="1200" b="0">
+                          <a:solidFill>
+                            <a:srgbClr val="12202B"/>
+                          </a:solidFill>
+                          <a:latin typeface="Calibri"/>
+                        </a:rPr>
+                        <a:t>Geçti</a:t>
+                      </a:r>
+                    </a:p>
+                  </a:txBody>
+                  <a:tcPr>
+                    <a:solidFill>
+                      <a:srgbClr val="FFFFFF"/>
+                    </a:solidFill>
+                  </a:tcPr>
+                </a:tc>
+                <a:tc>
+                  <a:txBody>
+                    <a:bodyPr/>
+                    <a:lstStyle/>
+                    <a:p>
+                      <a:r>
+                        <a:rPr sz="1200" b="0">
+                          <a:solidFill>
+                            <a:srgbClr val="12202B"/>
+                          </a:solidFill>
+                          <a:latin typeface="Calibri"/>
+                        </a:rPr>
+                        <a:t>Geçti</a:t>
+                      </a:r>
+                    </a:p>
+                  </a:txBody>
+                  <a:tcPr>
+                    <a:solidFill>
+                      <a:srgbClr val="FFFFFF"/>
+                    </a:solidFill>
+                  </a:tcPr>
+                </a:tc>
+              </a:tr>
+              <a:tr h="655320">
+                <a:tc>
+                  <a:txBody>
+                    <a:bodyPr/>
+                    <a:lstStyle/>
+                    <a:p>
+                      <a:r>
+                        <a:rPr sz="1200" b="0">
+                          <a:solidFill>
+                            <a:srgbClr val="12202B"/>
+                          </a:solidFill>
+                          <a:latin typeface="Calibri"/>
+                        </a:rPr>
+                        <a:t>T07</a:t>
+                      </a:r>
+                    </a:p>
+                  </a:txBody>
+                  <a:tcPr>
+                    <a:solidFill>
+                      <a:srgbClr val="DCE8E3"/>
+                    </a:solidFill>
+                  </a:tcPr>
+                </a:tc>
+                <a:tc>
+                  <a:txBody>
+                    <a:bodyPr/>
+                    <a:lstStyle/>
+                    <a:p>
+                      <a:r>
+                        <a:rPr sz="1200" b="0">
+                          <a:solidFill>
+                            <a:srgbClr val="12202B"/>
+                          </a:solidFill>
+                          <a:latin typeface="Calibri"/>
+                        </a:rPr>
+                        <a:t>Boş teslimat formu</a:t>
+                      </a:r>
+                    </a:p>
+                  </a:txBody>
+                  <a:tcPr>
+                    <a:solidFill>
+                      <a:srgbClr val="DCE8E3"/>
+                    </a:solidFill>
+                  </a:tcPr>
+                </a:tc>
+                <a:tc>
+                  <a:txBody>
+                    <a:bodyPr/>
+                    <a:lstStyle/>
+                    <a:p>
+                      <a:r>
+                        <a:rPr sz="1200" b="0">
+                          <a:solidFill>
+                            <a:srgbClr val="12202B"/>
+                          </a:solidFill>
+                          <a:latin typeface="Calibri"/>
+                        </a:rPr>
+                        <a:t>Ad uyarısı</a:t>
+                      </a:r>
+                    </a:p>
+                  </a:txBody>
+                  <a:tcPr>
+                    <a:solidFill>
+                      <a:srgbClr val="DCE8E3"/>
+                    </a:solidFill>
+                  </a:tcPr>
+                </a:tc>
+                <a:tc>
+                  <a:txBody>
+                    <a:bodyPr/>
+                    <a:lstStyle/>
+                    <a:p>
+                      <a:r>
+                        <a:rPr sz="1200" b="0">
+                          <a:solidFill>
+                            <a:srgbClr val="12202B"/>
+                          </a:solidFill>
+                          <a:latin typeface="Calibri"/>
+                        </a:rPr>
+                        <a:t>Geçti</a:t>
+                      </a:r>
+                    </a:p>
+                  </a:txBody>
+                  <a:tcPr>
+                    <a:solidFill>
+                      <a:srgbClr val="DCE8E3"/>
+                    </a:solidFill>
+                  </a:tcPr>
+                </a:tc>
+                <a:tc>
+                  <a:txBody>
+                    <a:bodyPr/>
+                    <a:lstStyle/>
+                    <a:p>
+                      <a:r>
+                        <a:rPr sz="1200" b="0">
+                          <a:solidFill>
+                            <a:srgbClr val="12202B"/>
+                          </a:solidFill>
+                          <a:latin typeface="Calibri"/>
+                        </a:rPr>
+                        <a:t>Geçti</a:t>
+                      </a:r>
+                    </a:p>
+                  </a:txBody>
+                  <a:tcPr>
+                    <a:solidFill>
+                      <a:srgbClr val="DCE8E3"/>
+                    </a:solidFill>
+                  </a:tcPr>
+                </a:tc>
+              </a:tr>
+              <a:tr h="655320">
+                <a:tc>
+                  <a:txBody>
+                    <a:bodyPr/>
+                    <a:lstStyle/>
+                    <a:p>
+                      <a:r>
+                        <a:rPr sz="1200" b="0">
+                          <a:solidFill>
+                            <a:srgbClr val="12202B"/>
+                          </a:solidFill>
+                          <a:latin typeface="Calibri"/>
+                        </a:rPr>
+                        <a:t>T08</a:t>
+                      </a:r>
+                    </a:p>
+                  </a:txBody>
+                  <a:tcPr>
+                    <a:solidFill>
+                      <a:srgbClr val="FFFFFF"/>
+                    </a:solidFill>
+                  </a:tcPr>
+                </a:tc>
+                <a:tc>
+                  <a:txBody>
+                    <a:bodyPr/>
+                    <a:lstStyle/>
+                    <a:p>
+                      <a:r>
+                        <a:rPr sz="1200" b="0">
+                          <a:solidFill>
+                            <a:srgbClr val="12202B"/>
+                          </a:solidFill>
+                          <a:latin typeface="Calibri"/>
+                        </a:rPr>
+                        <a:t>Kilitli hesap (mezun)</a:t>
+                      </a:r>
+                    </a:p>
+                  </a:txBody>
+                  <a:tcPr>
+                    <a:solidFill>
+                      <a:srgbClr val="FFFFFF"/>
+                    </a:solidFill>
+                  </a:tcPr>
+                </a:tc>
+                <a:tc>
+                  <a:txBody>
+                    <a:bodyPr/>
+                    <a:lstStyle/>
+                    <a:p>
+                      <a:r>
+                        <a:rPr sz="1200" b="0">
+                          <a:solidFill>
+                            <a:srgbClr val="12202B"/>
+                          </a:solidFill>
+                          <a:latin typeface="Calibri"/>
+                        </a:rPr>
+                        <a:t>Giriş reddi</a:t>
+                      </a:r>
+                    </a:p>
+                  </a:txBody>
+                  <a:tcPr>
+                    <a:solidFill>
+                      <a:srgbClr val="FFFFFF"/>
+                    </a:solidFill>
+                  </a:tcPr>
+                </a:tc>
+                <a:tc>
+                  <a:txBody>
+                    <a:bodyPr/>
+                    <a:lstStyle/>
+                    <a:p>
+                      <a:r>
+                        <a:rPr sz="1200" b="0">
+                          <a:solidFill>
+                            <a:srgbClr val="12202B"/>
+                          </a:solidFill>
+                          <a:latin typeface="Calibri"/>
+                        </a:rPr>
+                        <a:t>Geçti</a:t>
+                      </a:r>
+                    </a:p>
+                  </a:txBody>
+                  <a:tcPr>
+                    <a:solidFill>
+                      <a:srgbClr val="FFFFFF"/>
+                    </a:solidFill>
+                  </a:tcPr>
+                </a:tc>
+                <a:tc>
+                  <a:txBody>
+                    <a:bodyPr/>
+                    <a:lstStyle/>
+                    <a:p>
+                      <a:r>
+                        <a:rPr sz="1200" b="0">
+                          <a:solidFill>
+                            <a:srgbClr val="12202B"/>
+                          </a:solidFill>
+                          <a:latin typeface="Calibri"/>
+                        </a:rPr>
+                        <a:t>Geçti</a:t>
+                      </a:r>
+                    </a:p>
+                  </a:txBody>
+                  <a:tcPr>
+                    <a:solidFill>
+                      <a:srgbClr val="FFFFFF"/>
+                    </a:solidFill>
+                  </a:tcPr>
+                </a:tc>
+              </a:tr>
+              <a:tr h="655320">
+                <a:tc>
+                  <a:txBody>
+                    <a:bodyPr/>
+                    <a:lstStyle/>
+                    <a:p>
+                      <a:r>
+                        <a:rPr sz="1200" b="0">
+                          <a:solidFill>
+                            <a:srgbClr val="12202B"/>
+                          </a:solidFill>
+                          <a:latin typeface="Calibri"/>
+                        </a:rPr>
+                        <a:t>T09</a:t>
+                      </a:r>
+                    </a:p>
+                  </a:txBody>
+                  <a:tcPr>
+                    <a:solidFill>
+                      <a:srgbClr val="DCE8E3"/>
+                    </a:solidFill>
+                  </a:tcPr>
+                </a:tc>
+                <a:tc>
+                  <a:txBody>
+                    <a:bodyPr/>
+                    <a:lstStyle/>
+                    <a:p>
+                      <a:r>
+                        <a:rPr sz="1200" b="0">
+                          <a:solidFill>
+                            <a:srgbClr val="12202B"/>
+                          </a:solidFill>
+                          <a:latin typeface="Calibri"/>
+                        </a:rPr>
+                        <a:t>Boş şifre</a:t>
+                      </a:r>
+                    </a:p>
+                  </a:txBody>
+                  <a:tcPr>
+                    <a:solidFill>
+                      <a:srgbClr val="DCE8E3"/>
+                    </a:solidFill>
+                  </a:tcPr>
+                </a:tc>
+                <a:tc>
+                  <a:txBody>
+                    <a:bodyPr/>
+                    <a:lstStyle/>
+                    <a:p>
+                      <a:r>
+                        <a:rPr sz="1200" b="0">
+                          <a:solidFill>
+                            <a:srgbClr val="12202B"/>
+                          </a:solidFill>
+                          <a:latin typeface="Calibri"/>
+                        </a:rPr>
+                        <a:t>Şifre uyarısı</a:t>
+                      </a:r>
+                    </a:p>
+                  </a:txBody>
+                  <a:tcPr>
+                    <a:solidFill>
+                      <a:srgbClr val="DCE8E3"/>
+                    </a:solidFill>
+                  </a:tcPr>
+                </a:tc>
+                <a:tc>
+                  <a:txBody>
+                    <a:bodyPr/>
+                    <a:lstStyle/>
+                    <a:p>
+                      <a:r>
+                        <a:rPr sz="1200" b="0">
+                          <a:solidFill>
+                            <a:srgbClr val="12202B"/>
+                          </a:solidFill>
+                          <a:latin typeface="Calibri"/>
+                        </a:rPr>
+                        <a:t>Geçti</a:t>
+                      </a:r>
+                    </a:p>
+                  </a:txBody>
+                  <a:tcPr>
+                    <a:solidFill>
+                      <a:srgbClr val="DCE8E3"/>
+                    </a:solidFill>
+                  </a:tcPr>
+                </a:tc>
+                <a:tc>
+                  <a:txBody>
+                    <a:bodyPr/>
+                    <a:lstStyle/>
+                    <a:p>
+                      <a:r>
+                        <a:rPr sz="1200" b="0">
+                          <a:solidFill>
+                            <a:srgbClr val="12202B"/>
+                          </a:solidFill>
+                          <a:latin typeface="Calibri"/>
+                        </a:rPr>
+                        <a:t>Geçti</a:t>
+                      </a:r>
+                    </a:p>
+                  </a:txBody>
+                  <a:tcPr>
+                    <a:solidFill>
+                      <a:srgbClr val="DCE8E3"/>
+                    </a:solidFill>
+                  </a:tcPr>
+                </a:tc>
+              </a:tr>
+              <a:tr h="655320">
+                <a:tc>
+                  <a:txBody>
+                    <a:bodyPr/>
+                    <a:lstStyle/>
+                    <a:p>
+                      <a:r>
+                        <a:rPr sz="1200" b="0">
+                          <a:solidFill>
+                            <a:srgbClr val="12202B"/>
+                          </a:solidFill>
+                          <a:latin typeface="Calibri"/>
+                        </a:rPr>
+                        <a:t>T10</a:t>
+                      </a:r>
+                    </a:p>
+                  </a:txBody>
+                  <a:tcPr>
+                    <a:solidFill>
+                      <a:srgbClr val="FFFFFF"/>
+                    </a:solidFill>
+                  </a:tcPr>
+                </a:tc>
+                <a:tc>
+                  <a:txBody>
+                    <a:bodyPr/>
+                    <a:lstStyle/>
+                    <a:p>
+                      <a:r>
+                        <a:rPr sz="1200" b="0">
+                          <a:solidFill>
+                            <a:srgbClr val="12202B"/>
+                          </a:solidFill>
+                          <a:latin typeface="Calibri"/>
+                        </a:rPr>
+                        <a:t>Defter + USB + kargo</a:t>
+                      </a:r>
+                    </a:p>
+                  </a:txBody>
+                  <a:tcPr>
+                    <a:solidFill>
+                      <a:srgbClr val="FFFFFF"/>
+                    </a:solidFill>
+                  </a:tcPr>
+                </a:tc>
+                <a:tc>
+                  <a:txBody>
+                    <a:bodyPr/>
+                    <a:lstStyle/>
+                    <a:p>
+                      <a:r>
+                        <a:rPr sz="1200" b="0">
+                          <a:solidFill>
+                            <a:srgbClr val="12202B"/>
+                          </a:solidFill>
+                          <a:latin typeface="Calibri"/>
+                        </a:rPr>
+                        <a:t>398,80 TL</a:t>
+                      </a:r>
+                    </a:p>
+                  </a:txBody>
+                  <a:tcPr>
+                    <a:solidFill>
+                      <a:srgbClr val="FFFFFF"/>
+                    </a:solidFill>
+                  </a:tcPr>
+                </a:tc>
+                <a:tc>
+                  <a:txBody>
+                    <a:bodyPr/>
+                    <a:lstStyle/>
+                    <a:p>
+                      <a:r>
+                        <a:rPr sz="1200" b="0">
+                          <a:solidFill>
+                            <a:srgbClr val="12202B"/>
+                          </a:solidFill>
+                          <a:latin typeface="Calibri"/>
+                        </a:rPr>
+                        <a:t>Geçti</a:t>
+                      </a:r>
+                    </a:p>
+                  </a:txBody>
+                  <a:tcPr>
+                    <a:solidFill>
+                      <a:srgbClr val="FFFFFF"/>
+                    </a:solidFill>
+                  </a:tcPr>
+                </a:tc>
+                <a:tc>
+                  <a:txBody>
+                    <a:bodyPr/>
+                    <a:lstStyle/>
+                    <a:p>
+                      <a:r>
+                        <a:rPr sz="1200" b="0">
+                          <a:solidFill>
+                            <a:srgbClr val="12202B"/>
+                          </a:solidFill>
+                          <a:latin typeface="Calibri"/>
+                        </a:rPr>
+                        <a:t>Geçti</a:t>
+                      </a:r>
+                    </a:p>
+                  </a:txBody>
+                  <a:tcPr>
+                    <a:solidFill>
+                      <a:srgbClr val="FFFFFF"/>
+                    </a:solidFill>
+                  </a:tcPr>
+                </a:tc>
+              </a:tr>
+            </a:tbl>
+          </a:graphicData>
+        </a:graphic>
+      </p:graphicFrame>
     </p:spTree>
   </p:cSld>
   <p:clrMapOvr>
@@ -13297,7 +14472,7 @@
                 </a:solidFill>
                 <a:latin typeface="Calibri"/>
               </a:rPr>
-              <a:t>Parça 1 — Web sitesi: Kampüs Kırtasiye</a:t>
+              <a:t>Senaryolar: Sipariş ve sınırlar</a:t>
             </a:r>
           </a:p>
         </p:txBody>
@@ -13375,7 +14550,7 @@
                 </a:solidFill>
                 <a:latin typeface="Calibri"/>
               </a:rPr>
-              <a:t>Kampüs Kırtasiye  ·  İTÜ BİDB + TechTarget  ·  Rıdvan Çağlar Mutlu</a:t>
+              <a:t>Kampüs Kırtasiye  ·  TechTarget software testing  ·  Rıdvan Çağlar Mutlu</a:t>
             </a:r>
           </a:p>
         </p:txBody>
@@ -13415,117 +14590,707 @@
           </a:p>
         </p:txBody>
       </p:sp>
-      <p:pic>
-        <p:nvPicPr>
-          <p:cNvPr id="9" name="Picture 8" descr="teslim.png"/>
-          <p:cNvPicPr>
-            <a:picLocks noChangeAspect="1"/>
-          </p:cNvPicPr>
-          <p:nvPr/>
-        </p:nvPicPr>
-        <p:blipFill>
-          <a:blip r:embed="rId2"/>
-          <a:stretch>
-            <a:fillRect/>
-          </a:stretch>
-        </p:blipFill>
-        <p:spPr>
-          <a:xfrm>
-            <a:off x="365760" y="1097280"/>
-            <a:ext cx="6675120" cy="4389120"/>
-          </a:xfrm>
-          <a:prstGeom prst="rect">
-            <a:avLst/>
-          </a:prstGeom>
-        </p:spPr>
-      </p:pic>
-      <p:sp>
-        <p:nvSpPr>
-          <p:cNvPr id="10" name="TextBox 9"/>
-          <p:cNvSpPr txBox="1"/>
-          <p:nvPr/>
-        </p:nvSpPr>
-        <p:spPr>
-          <a:xfrm>
-            <a:off x="7223760" y="1188720"/>
-            <a:ext cx="4572000" cy="5029200"/>
-          </a:xfrm>
-          <a:prstGeom prst="rect">
-            <a:avLst/>
-          </a:prstGeom>
-          <a:noFill/>
-        </p:spPr>
-        <p:txBody>
-          <a:bodyPr wrap="square">
-            <a:spAutoFit/>
-          </a:bodyPr>
-          <a:lstStyle/>
-          <a:p>
-            <a:pPr>
-              <a:spcAft>
-                <a:spcPts val="900"/>
-              </a:spcAft>
-            </a:pPr>
-            <a:r>
-              <a:rPr sz="1600" b="0">
-                <a:solidFill>
-                  <a:srgbClr val="12202B"/>
-                </a:solidFill>
-                <a:latin typeface="Calibri"/>
-              </a:rPr>
-              <a:t>▸  Kapı sayfası iki parçayı ayırır.</a:t>
-            </a:r>
-          </a:p>
-          <a:p>
-            <a:pPr>
-              <a:spcAft>
-                <a:spcPts val="900"/>
-              </a:spcAft>
-            </a:pPr>
-            <a:r>
-              <a:rPr sz="1600" b="0">
-                <a:solidFill>
-                  <a:srgbClr val="12202B"/>
-                </a:solidFill>
-                <a:latin typeface="Calibri"/>
-              </a:rPr>
-              <a:t>▸  Site: /v2/  (teslim)</a:t>
-            </a:r>
-          </a:p>
-          <a:p>
-            <a:pPr>
-              <a:spcAft>
-                <a:spcPts val="900"/>
-              </a:spcAft>
-            </a:pPr>
-            <a:r>
-              <a:rPr sz="1600" b="0">
-                <a:solidFill>
-                  <a:srgbClr val="12202B"/>
-                </a:solidFill>
-                <a:latin typeface="Calibri"/>
-              </a:rPr>
-              <a:t>▸  Hatalı kanıt: /v1/</a:t>
-            </a:r>
-          </a:p>
-          <a:p>
-            <a:pPr>
-              <a:spcAft>
-                <a:spcPts val="900"/>
-              </a:spcAft>
-            </a:pPr>
-            <a:r>
-              <a:rPr sz="1600" b="0">
-                <a:solidFill>
-                  <a:srgbClr val="12202B"/>
-                </a:solidFill>
-                <a:latin typeface="Calibri"/>
-              </a:rPr>
-              <a:t>▸  Giriş: ridvan / Defter2026</a:t>
-            </a:r>
-          </a:p>
-        </p:txBody>
-      </p:sp>
+      <p:graphicFrame>
+        <p:nvGraphicFramePr>
+          <p:cNvPr id="9" name="Table 8"/>
+          <p:cNvGraphicFramePr>
+            <a:graphicFrameLocks noGrp="1"/>
+          </p:cNvGraphicFramePr>
+          <p:nvPr/>
+        </p:nvGraphicFramePr>
+        <p:xfrm>
+          <a:off x="365760" y="1143000"/>
+          <a:ext cx="11430000" cy="3931920"/>
+        </p:xfrm>
+        <a:graphic>
+          <a:graphicData uri="http://schemas.openxmlformats.org/drawingml/2006/table">
+            <a:tbl>
+              <a:tblPr firstRow="1" bandRow="1">
+                <a:tableStyleId>{5C22544A-7EE6-4342-B048-85BDC9FD1C3A}</a:tableStyleId>
+              </a:tblPr>
+              <a:tblGrid>
+                <a:gridCol w="2286000"/>
+                <a:gridCol w="2286000"/>
+                <a:gridCol w="2286000"/>
+                <a:gridCol w="2286000"/>
+                <a:gridCol w="2286000"/>
+              </a:tblGrid>
+              <a:tr h="655320">
+                <a:tc>
+                  <a:txBody>
+                    <a:bodyPr/>
+                    <a:lstStyle/>
+                    <a:p>
+                      <a:r>
+                        <a:rPr sz="1200" b="1">
+                          <a:solidFill>
+                            <a:srgbClr val="FFFFFF"/>
+                          </a:solidFill>
+                          <a:latin typeface="Calibri"/>
+                        </a:rPr>
+                        <a:t>ID</a:t>
+                      </a:r>
+                    </a:p>
+                  </a:txBody>
+                  <a:tcPr>
+                    <a:solidFill>
+                      <a:srgbClr val="0F2A3D"/>
+                    </a:solidFill>
+                  </a:tcPr>
+                </a:tc>
+                <a:tc>
+                  <a:txBody>
+                    <a:bodyPr/>
+                    <a:lstStyle/>
+                    <a:p>
+                      <a:r>
+                        <a:rPr sz="1200" b="1">
+                          <a:solidFill>
+                            <a:srgbClr val="FFFFFF"/>
+                          </a:solidFill>
+                          <a:latin typeface="Calibri"/>
+                        </a:rPr>
+                        <a:t>Senaryo</a:t>
+                      </a:r>
+                    </a:p>
+                  </a:txBody>
+                  <a:tcPr>
+                    <a:solidFill>
+                      <a:srgbClr val="0F2A3D"/>
+                    </a:solidFill>
+                  </a:tcPr>
+                </a:tc>
+                <a:tc>
+                  <a:txBody>
+                    <a:bodyPr/>
+                    <a:lstStyle/>
+                    <a:p>
+                      <a:r>
+                        <a:rPr sz="1200" b="1">
+                          <a:solidFill>
+                            <a:srgbClr val="FFFFFF"/>
+                          </a:solidFill>
+                          <a:latin typeface="Calibri"/>
+                        </a:rPr>
+                        <a:t>Beklenen</a:t>
+                      </a:r>
+                    </a:p>
+                  </a:txBody>
+                  <a:tcPr>
+                    <a:solidFill>
+                      <a:srgbClr val="0F2A3D"/>
+                    </a:solidFill>
+                  </a:tcPr>
+                </a:tc>
+                <a:tc>
+                  <a:txBody>
+                    <a:bodyPr/>
+                    <a:lstStyle/>
+                    <a:p>
+                      <a:r>
+                        <a:rPr sz="1200" b="1">
+                          <a:solidFill>
+                            <a:srgbClr val="FFFFFF"/>
+                          </a:solidFill>
+                          <a:latin typeface="Calibri"/>
+                        </a:rPr>
+                        <a:t>V1</a:t>
+                      </a:r>
+                    </a:p>
+                  </a:txBody>
+                  <a:tcPr>
+                    <a:solidFill>
+                      <a:srgbClr val="0F2A3D"/>
+                    </a:solidFill>
+                  </a:tcPr>
+                </a:tc>
+                <a:tc>
+                  <a:txBody>
+                    <a:bodyPr/>
+                    <a:lstStyle/>
+                    <a:p>
+                      <a:r>
+                        <a:rPr sz="1200" b="1">
+                          <a:solidFill>
+                            <a:srgbClr val="FFFFFF"/>
+                          </a:solidFill>
+                          <a:latin typeface="Calibri"/>
+                        </a:rPr>
+                        <a:t>V2</a:t>
+                      </a:r>
+                    </a:p>
+                  </a:txBody>
+                  <a:tcPr>
+                    <a:solidFill>
+                      <a:srgbClr val="0F2A3D"/>
+                    </a:solidFill>
+                  </a:tcPr>
+                </a:tc>
+              </a:tr>
+              <a:tr h="655320">
+                <a:tc>
+                  <a:txBody>
+                    <a:bodyPr/>
+                    <a:lstStyle/>
+                    <a:p>
+                      <a:r>
+                        <a:rPr sz="1200" b="0">
+                          <a:solidFill>
+                            <a:srgbClr val="12202B"/>
+                          </a:solidFill>
+                          <a:latin typeface="Calibri"/>
+                        </a:rPr>
+                        <a:t>T11</a:t>
+                      </a:r>
+                    </a:p>
+                  </a:txBody>
+                  <a:tcPr>
+                    <a:solidFill>
+                      <a:srgbClr val="FFFFFF"/>
+                    </a:solidFill>
+                  </a:tcPr>
+                </a:tc>
+                <a:tc>
+                  <a:txBody>
+                    <a:bodyPr/>
+                    <a:lstStyle/>
+                    <a:p>
+                      <a:r>
+                        <a:rPr sz="1200" b="0">
+                          <a:solidFill>
+                            <a:srgbClr val="12202B"/>
+                          </a:solidFill>
+                          <a:latin typeface="Calibri"/>
+                        </a:rPr>
+                        <a:t>10 haneli telefon</a:t>
+                      </a:r>
+                    </a:p>
+                  </a:txBody>
+                  <a:tcPr>
+                    <a:solidFill>
+                      <a:srgbClr val="FFFFFF"/>
+                    </a:solidFill>
+                  </a:tcPr>
+                </a:tc>
+                <a:tc>
+                  <a:txBody>
+                    <a:bodyPr/>
+                    <a:lstStyle/>
+                    <a:p>
+                      <a:r>
+                        <a:rPr sz="1200" b="0">
+                          <a:solidFill>
+                            <a:srgbClr val="12202B"/>
+                          </a:solidFill>
+                          <a:latin typeface="Calibri"/>
+                        </a:rPr>
+                        <a:t>Sipariş tamamlandı</a:t>
+                      </a:r>
+                    </a:p>
+                  </a:txBody>
+                  <a:tcPr>
+                    <a:solidFill>
+                      <a:srgbClr val="FFFFFF"/>
+                    </a:solidFill>
+                  </a:tcPr>
+                </a:tc>
+                <a:tc>
+                  <a:txBody>
+                    <a:bodyPr/>
+                    <a:lstStyle/>
+                    <a:p>
+                      <a:r>
+                        <a:rPr sz="1200" b="0">
+                          <a:solidFill>
+                            <a:srgbClr val="12202B"/>
+                          </a:solidFill>
+                          <a:latin typeface="Calibri"/>
+                        </a:rPr>
+                        <a:t>Geçti</a:t>
+                      </a:r>
+                    </a:p>
+                  </a:txBody>
+                  <a:tcPr>
+                    <a:solidFill>
+                      <a:srgbClr val="FFFFFF"/>
+                    </a:solidFill>
+                  </a:tcPr>
+                </a:tc>
+                <a:tc>
+                  <a:txBody>
+                    <a:bodyPr/>
+                    <a:lstStyle/>
+                    <a:p>
+                      <a:r>
+                        <a:rPr sz="1200" b="0">
+                          <a:solidFill>
+                            <a:srgbClr val="12202B"/>
+                          </a:solidFill>
+                          <a:latin typeface="Calibri"/>
+                        </a:rPr>
+                        <a:t>Geçti</a:t>
+                      </a:r>
+                    </a:p>
+                  </a:txBody>
+                  <a:tcPr>
+                    <a:solidFill>
+                      <a:srgbClr val="FFFFFF"/>
+                    </a:solidFill>
+                  </a:tcPr>
+                </a:tc>
+              </a:tr>
+              <a:tr h="655320">
+                <a:tc>
+                  <a:txBody>
+                    <a:bodyPr/>
+                    <a:lstStyle/>
+                    <a:p>
+                      <a:r>
+                        <a:rPr sz="1200" b="0">
+                          <a:solidFill>
+                            <a:srgbClr val="12202B"/>
+                          </a:solidFill>
+                          <a:latin typeface="Calibri"/>
+                        </a:rPr>
+                        <a:t>T12</a:t>
+                      </a:r>
+                    </a:p>
+                  </a:txBody>
+                  <a:tcPr>
+                    <a:solidFill>
+                      <a:srgbClr val="DCE8E3"/>
+                    </a:solidFill>
+                  </a:tcPr>
+                </a:tc>
+                <a:tc>
+                  <a:txBody>
+                    <a:bodyPr/>
+                    <a:lstStyle/>
+                    <a:p>
+                      <a:r>
+                        <a:rPr sz="1200" b="0">
+                          <a:solidFill>
+                            <a:srgbClr val="12202B"/>
+                          </a:solidFill>
+                          <a:latin typeface="Calibri"/>
+                        </a:rPr>
+                        <a:t>Boş sepet</a:t>
+                      </a:r>
+                    </a:p>
+                  </a:txBody>
+                  <a:tcPr>
+                    <a:solidFill>
+                      <a:srgbClr val="DCE8E3"/>
+                    </a:solidFill>
+                  </a:tcPr>
+                </a:tc>
+                <a:tc>
+                  <a:txBody>
+                    <a:bodyPr/>
+                    <a:lstStyle/>
+                    <a:p>
+                      <a:r>
+                        <a:rPr sz="1200" b="0">
+                          <a:solidFill>
+                            <a:srgbClr val="12202B"/>
+                          </a:solidFill>
+                          <a:latin typeface="Calibri"/>
+                        </a:rPr>
+                        <a:t>Teslimat engeli</a:t>
+                      </a:r>
+                    </a:p>
+                  </a:txBody>
+                  <a:tcPr>
+                    <a:solidFill>
+                      <a:srgbClr val="DCE8E3"/>
+                    </a:solidFill>
+                  </a:tcPr>
+                </a:tc>
+                <a:tc>
+                  <a:txBody>
+                    <a:bodyPr/>
+                    <a:lstStyle/>
+                    <a:p>
+                      <a:r>
+                        <a:rPr sz="1200" b="0">
+                          <a:solidFill>
+                            <a:srgbClr val="12202B"/>
+                          </a:solidFill>
+                          <a:latin typeface="Calibri"/>
+                        </a:rPr>
+                        <a:t>Başarısız</a:t>
+                      </a:r>
+                    </a:p>
+                  </a:txBody>
+                  <a:tcPr>
+                    <a:solidFill>
+                      <a:srgbClr val="DCE8E3"/>
+                    </a:solidFill>
+                  </a:tcPr>
+                </a:tc>
+                <a:tc>
+                  <a:txBody>
+                    <a:bodyPr/>
+                    <a:lstStyle/>
+                    <a:p>
+                      <a:r>
+                        <a:rPr sz="1200" b="0">
+                          <a:solidFill>
+                            <a:srgbClr val="12202B"/>
+                          </a:solidFill>
+                          <a:latin typeface="Calibri"/>
+                        </a:rPr>
+                        <a:t>Geçti</a:t>
+                      </a:r>
+                    </a:p>
+                  </a:txBody>
+                  <a:tcPr>
+                    <a:solidFill>
+                      <a:srgbClr val="DCE8E3"/>
+                    </a:solidFill>
+                  </a:tcPr>
+                </a:tc>
+              </a:tr>
+              <a:tr h="655320">
+                <a:tc>
+                  <a:txBody>
+                    <a:bodyPr/>
+                    <a:lstStyle/>
+                    <a:p>
+                      <a:r>
+                        <a:rPr sz="1200" b="0">
+                          <a:solidFill>
+                            <a:srgbClr val="12202B"/>
+                          </a:solidFill>
+                          <a:latin typeface="Calibri"/>
+                        </a:rPr>
+                        <a:t>T13</a:t>
+                      </a:r>
+                    </a:p>
+                  </a:txBody>
+                  <a:tcPr>
+                    <a:solidFill>
+                      <a:srgbClr val="FFFFFF"/>
+                    </a:solidFill>
+                  </a:tcPr>
+                </a:tc>
+                <a:tc>
+                  <a:txBody>
+                    <a:bodyPr/>
+                    <a:lstStyle/>
+                    <a:p>
+                      <a:r>
+                        <a:rPr sz="1200" b="0">
+                          <a:solidFill>
+                            <a:srgbClr val="12202B"/>
+                          </a:solidFill>
+                          <a:latin typeface="Calibri"/>
+                        </a:rPr>
+                        <a:t>9 haneli telefon</a:t>
+                      </a:r>
+                    </a:p>
+                  </a:txBody>
+                  <a:tcPr>
+                    <a:solidFill>
+                      <a:srgbClr val="FFFFFF"/>
+                    </a:solidFill>
+                  </a:tcPr>
+                </a:tc>
+                <a:tc>
+                  <a:txBody>
+                    <a:bodyPr/>
+                    <a:lstStyle/>
+                    <a:p>
+                      <a:r>
+                        <a:rPr sz="1200" b="0">
+                          <a:solidFill>
+                            <a:srgbClr val="12202B"/>
+                          </a:solidFill>
+                          <a:latin typeface="Calibri"/>
+                        </a:rPr>
+                        <a:t>Formda uyarı</a:t>
+                      </a:r>
+                    </a:p>
+                  </a:txBody>
+                  <a:tcPr>
+                    <a:solidFill>
+                      <a:srgbClr val="FFFFFF"/>
+                    </a:solidFill>
+                  </a:tcPr>
+                </a:tc>
+                <a:tc>
+                  <a:txBody>
+                    <a:bodyPr/>
+                    <a:lstStyle/>
+                    <a:p>
+                      <a:r>
+                        <a:rPr sz="1200" b="0">
+                          <a:solidFill>
+                            <a:srgbClr val="12202B"/>
+                          </a:solidFill>
+                          <a:latin typeface="Calibri"/>
+                        </a:rPr>
+                        <a:t>Geçti</a:t>
+                      </a:r>
+                    </a:p>
+                  </a:txBody>
+                  <a:tcPr>
+                    <a:solidFill>
+                      <a:srgbClr val="FFFFFF"/>
+                    </a:solidFill>
+                  </a:tcPr>
+                </a:tc>
+                <a:tc>
+                  <a:txBody>
+                    <a:bodyPr/>
+                    <a:lstStyle/>
+                    <a:p>
+                      <a:r>
+                        <a:rPr sz="1200" b="0">
+                          <a:solidFill>
+                            <a:srgbClr val="12202B"/>
+                          </a:solidFill>
+                          <a:latin typeface="Calibri"/>
+                        </a:rPr>
+                        <a:t>Geçti</a:t>
+                      </a:r>
+                    </a:p>
+                  </a:txBody>
+                  <a:tcPr>
+                    <a:solidFill>
+                      <a:srgbClr val="FFFFFF"/>
+                    </a:solidFill>
+                  </a:tcPr>
+                </a:tc>
+              </a:tr>
+              <a:tr h="655320">
+                <a:tc>
+                  <a:txBody>
+                    <a:bodyPr/>
+                    <a:lstStyle/>
+                    <a:p>
+                      <a:r>
+                        <a:rPr sz="1200" b="0">
+                          <a:solidFill>
+                            <a:srgbClr val="12202B"/>
+                          </a:solidFill>
+                          <a:latin typeface="Calibri"/>
+                        </a:rPr>
+                        <a:t>T14</a:t>
+                      </a:r>
+                    </a:p>
+                  </a:txBody>
+                  <a:tcPr>
+                    <a:solidFill>
+                      <a:srgbClr val="DCE8E3"/>
+                    </a:solidFill>
+                  </a:tcPr>
+                </a:tc>
+                <a:tc>
+                  <a:txBody>
+                    <a:bodyPr/>
+                    <a:lstStyle/>
+                    <a:p>
+                      <a:r>
+                        <a:rPr sz="1200" b="0">
+                          <a:solidFill>
+                            <a:srgbClr val="12202B"/>
+                          </a:solidFill>
+                          <a:latin typeface="Calibri"/>
+                        </a:rPr>
+                        <a:t>11 haneli telefon</a:t>
+                      </a:r>
+                    </a:p>
+                  </a:txBody>
+                  <a:tcPr>
+                    <a:solidFill>
+                      <a:srgbClr val="DCE8E3"/>
+                    </a:solidFill>
+                  </a:tcPr>
+                </a:tc>
+                <a:tc>
+                  <a:txBody>
+                    <a:bodyPr/>
+                    <a:lstStyle/>
+                    <a:p>
+                      <a:r>
+                        <a:rPr sz="1200" b="0">
+                          <a:solidFill>
+                            <a:srgbClr val="12202B"/>
+                          </a:solidFill>
+                          <a:latin typeface="Calibri"/>
+                        </a:rPr>
+                        <a:t>Formda uyarı</a:t>
+                      </a:r>
+                    </a:p>
+                  </a:txBody>
+                  <a:tcPr>
+                    <a:solidFill>
+                      <a:srgbClr val="DCE8E3"/>
+                    </a:solidFill>
+                  </a:tcPr>
+                </a:tc>
+                <a:tc>
+                  <a:txBody>
+                    <a:bodyPr/>
+                    <a:lstStyle/>
+                    <a:p>
+                      <a:r>
+                        <a:rPr sz="1200" b="0">
+                          <a:solidFill>
+                            <a:srgbClr val="12202B"/>
+                          </a:solidFill>
+                          <a:latin typeface="Calibri"/>
+                        </a:rPr>
+                        <a:t>Geçti</a:t>
+                      </a:r>
+                    </a:p>
+                  </a:txBody>
+                  <a:tcPr>
+                    <a:solidFill>
+                      <a:srgbClr val="DCE8E3"/>
+                    </a:solidFill>
+                  </a:tcPr>
+                </a:tc>
+                <a:tc>
+                  <a:txBody>
+                    <a:bodyPr/>
+                    <a:lstStyle/>
+                    <a:p>
+                      <a:r>
+                        <a:rPr sz="1200" b="0">
+                          <a:solidFill>
+                            <a:srgbClr val="12202B"/>
+                          </a:solidFill>
+                          <a:latin typeface="Calibri"/>
+                        </a:rPr>
+                        <a:t>Geçti</a:t>
+                      </a:r>
+                    </a:p>
+                  </a:txBody>
+                  <a:tcPr>
+                    <a:solidFill>
+                      <a:srgbClr val="DCE8E3"/>
+                    </a:solidFill>
+                  </a:tcPr>
+                </a:tc>
+              </a:tr>
+              <a:tr h="655320">
+                <a:tc>
+                  <a:txBody>
+                    <a:bodyPr/>
+                    <a:lstStyle/>
+                    <a:p>
+                      <a:r>
+                        <a:rPr sz="1200" b="0">
+                          <a:solidFill>
+                            <a:srgbClr val="12202B"/>
+                          </a:solidFill>
+                          <a:latin typeface="Calibri"/>
+                        </a:rPr>
+                        <a:t>T15</a:t>
+                      </a:r>
+                    </a:p>
+                  </a:txBody>
+                  <a:tcPr>
+                    <a:solidFill>
+                      <a:srgbClr val="FFFFFF"/>
+                    </a:solidFill>
+                  </a:tcPr>
+                </a:tc>
+                <a:tc>
+                  <a:txBody>
+                    <a:bodyPr/>
+                    <a:lstStyle/>
+                    <a:p>
+                      <a:r>
+                        <a:rPr sz="1200" b="0">
+                          <a:solidFill>
+                            <a:srgbClr val="12202B"/>
+                          </a:solidFill>
+                          <a:latin typeface="Calibri"/>
+                        </a:rPr>
+                        <a:t>Çıkış sonrası raf</a:t>
+                      </a:r>
+                    </a:p>
+                  </a:txBody>
+                  <a:tcPr>
+                    <a:solidFill>
+                      <a:srgbClr val="FFFFFF"/>
+                    </a:solidFill>
+                  </a:tcPr>
+                </a:tc>
+                <a:tc>
+                  <a:txBody>
+                    <a:bodyPr/>
+                    <a:lstStyle/>
+                    <a:p>
+                      <a:r>
+                        <a:rPr sz="1200" b="0">
+                          <a:solidFill>
+                            <a:srgbClr val="12202B"/>
+                          </a:solidFill>
+                          <a:latin typeface="Calibri"/>
+                        </a:rPr>
+                        <a:t>Giriş sayfası</a:t>
+                      </a:r>
+                    </a:p>
+                  </a:txBody>
+                  <a:tcPr>
+                    <a:solidFill>
+                      <a:srgbClr val="FFFFFF"/>
+                    </a:solidFill>
+                  </a:tcPr>
+                </a:tc>
+                <a:tc>
+                  <a:txBody>
+                    <a:bodyPr/>
+                    <a:lstStyle/>
+                    <a:p>
+                      <a:r>
+                        <a:rPr sz="1200" b="0">
+                          <a:solidFill>
+                            <a:srgbClr val="12202B"/>
+                          </a:solidFill>
+                          <a:latin typeface="Calibri"/>
+                        </a:rPr>
+                        <a:t>Geçti</a:t>
+                      </a:r>
+                    </a:p>
+                  </a:txBody>
+                  <a:tcPr>
+                    <a:solidFill>
+                      <a:srgbClr val="FFFFFF"/>
+                    </a:solidFill>
+                  </a:tcPr>
+                </a:tc>
+                <a:tc>
+                  <a:txBody>
+                    <a:bodyPr/>
+                    <a:lstStyle/>
+                    <a:p>
+                      <a:r>
+                        <a:rPr sz="1200" b="0">
+                          <a:solidFill>
+                            <a:srgbClr val="12202B"/>
+                          </a:solidFill>
+                          <a:latin typeface="Calibri"/>
+                        </a:rPr>
+                        <a:t>Geçti</a:t>
+                      </a:r>
+                    </a:p>
+                  </a:txBody>
+                  <a:tcPr>
+                    <a:solidFill>
+                      <a:srgbClr val="FFFFFF"/>
+                    </a:solidFill>
+                  </a:tcPr>
+                </a:tc>
+              </a:tr>
+            </a:tbl>
+          </a:graphicData>
+        </a:graphic>
+      </p:graphicFrame>
     </p:spTree>
   </p:cSld>
   <p:clrMapOvr>
